--- a/3DLV3/Plam/ゲーム設計.pptx
+++ b/3DLV3/Plam/ゲーム設計.pptx
@@ -5,7 +5,7 @@
     <p:sldMasterId id="2147483889" r:id="rId1"/>
   </p:sldMasterIdLst>
   <p:notesMasterIdLst>
-    <p:notesMasterId r:id="rId10"/>
+    <p:notesMasterId r:id="rId11"/>
   </p:notesMasterIdLst>
   <p:sldIdLst>
     <p:sldId id="264" r:id="rId2"/>
@@ -13,9 +13,10 @@
     <p:sldId id="257" r:id="rId4"/>
     <p:sldId id="261" r:id="rId5"/>
     <p:sldId id="273" r:id="rId6"/>
-    <p:sldId id="278" r:id="rId7"/>
-    <p:sldId id="268" r:id="rId8"/>
-    <p:sldId id="276" r:id="rId9"/>
+    <p:sldId id="280" r:id="rId7"/>
+    <p:sldId id="279" r:id="rId8"/>
+    <p:sldId id="278" r:id="rId9"/>
+    <p:sldId id="281" r:id="rId10"/>
   </p:sldIdLst>
   <p:sldSz cx="12192000" cy="6858000"/>
   <p:notesSz cx="6858000" cy="9144000"/>
@@ -184,8 +185,8 @@
   </pc:docChgLst>
   <pc:docChgLst>
     <pc:chgData name="kousuke yamamoto" userId="516c4d66ab16f868" providerId="LiveId" clId="{D5857573-2C41-4D75-AB9F-5CA89102AE51}"/>
-    <pc:docChg chg="custSel delSld modSld">
-      <pc:chgData name="kousuke yamamoto" userId="516c4d66ab16f868" providerId="LiveId" clId="{D5857573-2C41-4D75-AB9F-5CA89102AE51}" dt="2026-10-06T07:46:29.165" v="42" actId="478"/>
+    <pc:docChg chg="custSel addSld delSld modSld">
+      <pc:chgData name="kousuke yamamoto" userId="516c4d66ab16f868" providerId="LiveId" clId="{D5857573-2C41-4D75-AB9F-5CA89102AE51}" dt="2026-10-07T06:11:25.329" v="579" actId="1076"/>
       <pc:docMkLst>
         <pc:docMk/>
       </pc:docMkLst>
@@ -195,6 +196,21 @@
           <pc:docMk/>
           <pc:sldMk cId="0" sldId="258"/>
         </pc:sldMkLst>
+      </pc:sldChg>
+      <pc:sldChg chg="modSp mod">
+        <pc:chgData name="kousuke yamamoto" userId="516c4d66ab16f868" providerId="LiveId" clId="{D5857573-2C41-4D75-AB9F-5CA89102AE51}" dt="2026-10-07T06:05:04.442" v="528" actId="1076"/>
+        <pc:sldMkLst>
+          <pc:docMk/>
+          <pc:sldMk cId="0" sldId="259"/>
+        </pc:sldMkLst>
+        <pc:spChg chg="mod">
+          <ac:chgData name="kousuke yamamoto" userId="516c4d66ab16f868" providerId="LiveId" clId="{D5857573-2C41-4D75-AB9F-5CA89102AE51}" dt="2026-10-07T06:05:04.442" v="528" actId="1076"/>
+          <ac:spMkLst>
+            <pc:docMk/>
+            <pc:sldMk cId="0" sldId="259"/>
+            <ac:spMk id="5" creationId="{5F738E8E-6FD1-4FFF-9E24-5B37EDA81C3D}"/>
+          </ac:spMkLst>
+        </pc:spChg>
       </pc:sldChg>
       <pc:sldChg chg="del">
         <pc:chgData name="kousuke yamamoto" userId="516c4d66ab16f868" providerId="LiveId" clId="{D5857573-2C41-4D75-AB9F-5CA89102AE51}" dt="2026-10-06T07:46:11.048" v="7" actId="2696"/>
@@ -241,6 +257,13 @@
         </pc:sldMkLst>
       </pc:sldChg>
       <pc:sldChg chg="del">
+        <pc:chgData name="kousuke yamamoto" userId="516c4d66ab16f868" providerId="LiveId" clId="{D5857573-2C41-4D75-AB9F-5CA89102AE51}" dt="2026-10-07T05:57:32.275" v="477" actId="2696"/>
+        <pc:sldMkLst>
+          <pc:docMk/>
+          <pc:sldMk cId="1417576500" sldId="268"/>
+        </pc:sldMkLst>
+      </pc:sldChg>
+      <pc:sldChg chg="del">
         <pc:chgData name="kousuke yamamoto" userId="516c4d66ab16f868" providerId="LiveId" clId="{D5857573-2C41-4D75-AB9F-5CA89102AE51}" dt="2026-10-06T07:45:55.120" v="2" actId="2696"/>
         <pc:sldMkLst>
           <pc:docMk/>
@@ -262,11 +285,623 @@
         </pc:sldMkLst>
       </pc:sldChg>
       <pc:sldChg chg="del">
+        <pc:chgData name="kousuke yamamoto" userId="516c4d66ab16f868" providerId="LiveId" clId="{D5857573-2C41-4D75-AB9F-5CA89102AE51}" dt="2026-10-07T05:57:35.849" v="478" actId="2696"/>
+        <pc:sldMkLst>
+          <pc:docMk/>
+          <pc:sldMk cId="2174802983" sldId="276"/>
+        </pc:sldMkLst>
+      </pc:sldChg>
+      <pc:sldChg chg="del">
         <pc:chgData name="kousuke yamamoto" userId="516c4d66ab16f868" providerId="LiveId" clId="{D5857573-2C41-4D75-AB9F-5CA89102AE51}" dt="2026-10-06T07:46:04.341" v="6" actId="2696"/>
         <pc:sldMkLst>
           <pc:docMk/>
           <pc:sldMk cId="3007763323" sldId="277"/>
         </pc:sldMkLst>
+      </pc:sldChg>
+      <pc:sldChg chg="addSp modSp new mod">
+        <pc:chgData name="kousuke yamamoto" userId="516c4d66ab16f868" providerId="LiveId" clId="{D5857573-2C41-4D75-AB9F-5CA89102AE51}" dt="2026-10-07T05:56:33.187" v="474" actId="20577"/>
+        <pc:sldMkLst>
+          <pc:docMk/>
+          <pc:sldMk cId="919960110" sldId="279"/>
+        </pc:sldMkLst>
+        <pc:spChg chg="add mod">
+          <ac:chgData name="kousuke yamamoto" userId="516c4d66ab16f868" providerId="LiveId" clId="{D5857573-2C41-4D75-AB9F-5CA89102AE51}" dt="2026-10-07T05:56:19.386" v="468" actId="14100"/>
+          <ac:spMkLst>
+            <pc:docMk/>
+            <pc:sldMk cId="919960110" sldId="279"/>
+            <ac:spMk id="2" creationId="{BF3D83FA-1539-4F05-B445-0C144A637B7C}"/>
+          </ac:spMkLst>
+        </pc:spChg>
+        <pc:spChg chg="add mod">
+          <ac:chgData name="kousuke yamamoto" userId="516c4d66ab16f868" providerId="LiveId" clId="{D5857573-2C41-4D75-AB9F-5CA89102AE51}" dt="2026-10-07T05:56:15.370" v="467" actId="14100"/>
+          <ac:spMkLst>
+            <pc:docMk/>
+            <pc:sldMk cId="919960110" sldId="279"/>
+            <ac:spMk id="3" creationId="{C47421D0-B445-49D8-9C9B-18E696574949}"/>
+          </ac:spMkLst>
+        </pc:spChg>
+        <pc:spChg chg="add mod">
+          <ac:chgData name="kousuke yamamoto" userId="516c4d66ab16f868" providerId="LiveId" clId="{D5857573-2C41-4D75-AB9F-5CA89102AE51}" dt="2026-10-07T05:56:12.697" v="466" actId="14100"/>
+          <ac:spMkLst>
+            <pc:docMk/>
+            <pc:sldMk cId="919960110" sldId="279"/>
+            <ac:spMk id="4" creationId="{9C85CDB3-11E3-4582-BCED-667AE07A3A0D}"/>
+          </ac:spMkLst>
+        </pc:spChg>
+        <pc:spChg chg="add mod">
+          <ac:chgData name="kousuke yamamoto" userId="516c4d66ab16f868" providerId="LiveId" clId="{D5857573-2C41-4D75-AB9F-5CA89102AE51}" dt="2026-10-07T05:53:57.650" v="447" actId="14100"/>
+          <ac:spMkLst>
+            <pc:docMk/>
+            <pc:sldMk cId="919960110" sldId="279"/>
+            <ac:spMk id="5" creationId="{9FF7FB84-B30C-43E4-B6AC-37C381E93622}"/>
+          </ac:spMkLst>
+        </pc:spChg>
+        <pc:spChg chg="add mod">
+          <ac:chgData name="kousuke yamamoto" userId="516c4d66ab16f868" providerId="LiveId" clId="{D5857573-2C41-4D75-AB9F-5CA89102AE51}" dt="2026-10-07T05:56:02.300" v="464" actId="208"/>
+          <ac:spMkLst>
+            <pc:docMk/>
+            <pc:sldMk cId="919960110" sldId="279"/>
+            <ac:spMk id="6" creationId="{3EF9EED5-7E2D-44F9-A550-3AB338DE4D35}"/>
+          </ac:spMkLst>
+        </pc:spChg>
+        <pc:spChg chg="add mod">
+          <ac:chgData name="kousuke yamamoto" userId="516c4d66ab16f868" providerId="LiveId" clId="{D5857573-2C41-4D75-AB9F-5CA89102AE51}" dt="2026-10-07T05:56:33.187" v="474" actId="20577"/>
+          <ac:spMkLst>
+            <pc:docMk/>
+            <pc:sldMk cId="919960110" sldId="279"/>
+            <ac:spMk id="7" creationId="{6E5B084D-CC9F-4695-B978-D9337D736B34}"/>
+          </ac:spMkLst>
+        </pc:spChg>
+      </pc:sldChg>
+      <pc:sldChg chg="addSp delSp modSp new mod">
+        <pc:chgData name="kousuke yamamoto" userId="516c4d66ab16f868" providerId="LiveId" clId="{D5857573-2C41-4D75-AB9F-5CA89102AE51}" dt="2026-10-07T05:56:46.274" v="476" actId="14100"/>
+        <pc:sldMkLst>
+          <pc:docMk/>
+          <pc:sldMk cId="1052657188" sldId="280"/>
+        </pc:sldMkLst>
+        <pc:spChg chg="add mod">
+          <ac:chgData name="kousuke yamamoto" userId="516c4d66ab16f868" providerId="LiveId" clId="{D5857573-2C41-4D75-AB9F-5CA89102AE51}" dt="2026-10-07T05:16:08.201" v="199" actId="1076"/>
+          <ac:spMkLst>
+            <pc:docMk/>
+            <pc:sldMk cId="1052657188" sldId="280"/>
+            <ac:spMk id="2" creationId="{B2FC1149-7A59-4FE9-B11D-F12ABE9B4EFE}"/>
+          </ac:spMkLst>
+        </pc:spChg>
+        <pc:spChg chg="add mod">
+          <ac:chgData name="kousuke yamamoto" userId="516c4d66ab16f868" providerId="LiveId" clId="{D5857573-2C41-4D75-AB9F-5CA89102AE51}" dt="2026-10-07T05:16:11.986" v="201" actId="1076"/>
+          <ac:spMkLst>
+            <pc:docMk/>
+            <pc:sldMk cId="1052657188" sldId="280"/>
+            <ac:spMk id="3" creationId="{2373505A-EE41-4321-9F69-FB30EFB7A053}"/>
+          </ac:spMkLst>
+        </pc:spChg>
+        <pc:spChg chg="add mod">
+          <ac:chgData name="kousuke yamamoto" userId="516c4d66ab16f868" providerId="LiveId" clId="{D5857573-2C41-4D75-AB9F-5CA89102AE51}" dt="2026-10-07T05:16:05.041" v="197" actId="1076"/>
+          <ac:spMkLst>
+            <pc:docMk/>
+            <pc:sldMk cId="1052657188" sldId="280"/>
+            <ac:spMk id="4" creationId="{CFB89082-A4EA-45D2-A362-769DB0B5B6BB}"/>
+          </ac:spMkLst>
+        </pc:spChg>
+        <pc:spChg chg="add mod">
+          <ac:chgData name="kousuke yamamoto" userId="516c4d66ab16f868" providerId="LiveId" clId="{D5857573-2C41-4D75-AB9F-5CA89102AE51}" dt="2026-10-07T05:16:15.171" v="203" actId="1076"/>
+          <ac:spMkLst>
+            <pc:docMk/>
+            <pc:sldMk cId="1052657188" sldId="280"/>
+            <ac:spMk id="5" creationId="{065A4485-D696-4283-B903-32B04CC9C478}"/>
+          </ac:spMkLst>
+        </pc:spChg>
+        <pc:spChg chg="add mod">
+          <ac:chgData name="kousuke yamamoto" userId="516c4d66ab16f868" providerId="LiveId" clId="{D5857573-2C41-4D75-AB9F-5CA89102AE51}" dt="2026-10-07T05:16:27.403" v="210" actId="1076"/>
+          <ac:spMkLst>
+            <pc:docMk/>
+            <pc:sldMk cId="1052657188" sldId="280"/>
+            <ac:spMk id="6" creationId="{36ECD351-79D8-477C-9911-D8A58679F708}"/>
+          </ac:spMkLst>
+        </pc:spChg>
+        <pc:spChg chg="add mod">
+          <ac:chgData name="kousuke yamamoto" userId="516c4d66ab16f868" providerId="LiveId" clId="{D5857573-2C41-4D75-AB9F-5CA89102AE51}" dt="2026-10-07T05:16:06.651" v="198" actId="1076"/>
+          <ac:spMkLst>
+            <pc:docMk/>
+            <pc:sldMk cId="1052657188" sldId="280"/>
+            <ac:spMk id="7" creationId="{1276B494-8EF1-4645-B573-0838DF034EAB}"/>
+          </ac:spMkLst>
+        </pc:spChg>
+        <pc:spChg chg="add mod">
+          <ac:chgData name="kousuke yamamoto" userId="516c4d66ab16f868" providerId="LiveId" clId="{D5857573-2C41-4D75-AB9F-5CA89102AE51}" dt="2026-10-07T05:15:59.369" v="195" actId="1076"/>
+          <ac:spMkLst>
+            <pc:docMk/>
+            <pc:sldMk cId="1052657188" sldId="280"/>
+            <ac:spMk id="8" creationId="{B887D46A-52F5-4D81-9995-C12C4DD18C36}"/>
+          </ac:spMkLst>
+        </pc:spChg>
+        <pc:spChg chg="add mod">
+          <ac:chgData name="kousuke yamamoto" userId="516c4d66ab16f868" providerId="LiveId" clId="{D5857573-2C41-4D75-AB9F-5CA89102AE51}" dt="2026-10-07T05:16:20.899" v="207" actId="1076"/>
+          <ac:spMkLst>
+            <pc:docMk/>
+            <pc:sldMk cId="1052657188" sldId="280"/>
+            <ac:spMk id="9" creationId="{11D8B256-FCA6-420F-A37A-CB93A18C686F}"/>
+          </ac:spMkLst>
+        </pc:spChg>
+        <pc:spChg chg="add mod">
+          <ac:chgData name="kousuke yamamoto" userId="516c4d66ab16f868" providerId="LiveId" clId="{D5857573-2C41-4D75-AB9F-5CA89102AE51}" dt="2026-10-07T05:16:16.515" v="204" actId="1076"/>
+          <ac:spMkLst>
+            <pc:docMk/>
+            <pc:sldMk cId="1052657188" sldId="280"/>
+            <ac:spMk id="10" creationId="{4D213F70-2F9D-4F46-B6EC-A37973F7CBD5}"/>
+          </ac:spMkLst>
+        </pc:spChg>
+        <pc:spChg chg="add mod">
+          <ac:chgData name="kousuke yamamoto" userId="516c4d66ab16f868" providerId="LiveId" clId="{D5857573-2C41-4D75-AB9F-5CA89102AE51}" dt="2026-10-07T05:16:02.970" v="196" actId="1076"/>
+          <ac:spMkLst>
+            <pc:docMk/>
+            <pc:sldMk cId="1052657188" sldId="280"/>
+            <ac:spMk id="11" creationId="{CC3BC033-7AD4-46D2-B96B-E5DB4A7F7329}"/>
+          </ac:spMkLst>
+        </pc:spChg>
+        <pc:spChg chg="add mod">
+          <ac:chgData name="kousuke yamamoto" userId="516c4d66ab16f868" providerId="LiveId" clId="{D5857573-2C41-4D75-AB9F-5CA89102AE51}" dt="2026-10-07T05:16:13.594" v="202" actId="1076"/>
+          <ac:spMkLst>
+            <pc:docMk/>
+            <pc:sldMk cId="1052657188" sldId="280"/>
+            <ac:spMk id="12" creationId="{F4EC8B18-7BD3-4FAF-AF4F-AC242269E04F}"/>
+          </ac:spMkLst>
+        </pc:spChg>
+        <pc:spChg chg="add mod">
+          <ac:chgData name="kousuke yamamoto" userId="516c4d66ab16f868" providerId="LiveId" clId="{D5857573-2C41-4D75-AB9F-5CA89102AE51}" dt="2026-10-07T05:16:22.881" v="208" actId="1076"/>
+          <ac:spMkLst>
+            <pc:docMk/>
+            <pc:sldMk cId="1052657188" sldId="280"/>
+            <ac:spMk id="13" creationId="{5B769432-1C2D-435D-8972-7A04AFB36472}"/>
+          </ac:spMkLst>
+        </pc:spChg>
+        <pc:spChg chg="add mod">
+          <ac:chgData name="kousuke yamamoto" userId="516c4d66ab16f868" providerId="LiveId" clId="{D5857573-2C41-4D75-AB9F-5CA89102AE51}" dt="2026-10-07T05:16:25.690" v="209" actId="1076"/>
+          <ac:spMkLst>
+            <pc:docMk/>
+            <pc:sldMk cId="1052657188" sldId="280"/>
+            <ac:spMk id="14" creationId="{46E7785E-C40D-402E-A4E6-0A214E9E65C5}"/>
+          </ac:spMkLst>
+        </pc:spChg>
+        <pc:spChg chg="add mod">
+          <ac:chgData name="kousuke yamamoto" userId="516c4d66ab16f868" providerId="LiveId" clId="{D5857573-2C41-4D75-AB9F-5CA89102AE51}" dt="2026-10-07T05:16:18.155" v="205" actId="1076"/>
+          <ac:spMkLst>
+            <pc:docMk/>
+            <pc:sldMk cId="1052657188" sldId="280"/>
+            <ac:spMk id="15" creationId="{5EDC8A07-DC2F-49ED-8A3D-EB962195CA92}"/>
+          </ac:spMkLst>
+        </pc:spChg>
+        <pc:spChg chg="add mod">
+          <ac:chgData name="kousuke yamamoto" userId="516c4d66ab16f868" providerId="LiveId" clId="{D5857573-2C41-4D75-AB9F-5CA89102AE51}" dt="2026-10-07T05:16:10.194" v="200" actId="1076"/>
+          <ac:spMkLst>
+            <pc:docMk/>
+            <pc:sldMk cId="1052657188" sldId="280"/>
+            <ac:spMk id="16" creationId="{432EBCC8-B63E-416F-9E3B-B23423C1E5B3}"/>
+          </ac:spMkLst>
+        </pc:spChg>
+        <pc:spChg chg="add del mod">
+          <ac:chgData name="kousuke yamamoto" userId="516c4d66ab16f868" providerId="LiveId" clId="{D5857573-2C41-4D75-AB9F-5CA89102AE51}" dt="2026-10-07T04:43:49.362" v="68" actId="478"/>
+          <ac:spMkLst>
+            <pc:docMk/>
+            <pc:sldMk cId="1052657188" sldId="280"/>
+            <ac:spMk id="17" creationId="{45A8AD5D-1187-4B51-8784-9B9DC7ED2513}"/>
+          </ac:spMkLst>
+        </pc:spChg>
+        <pc:spChg chg="add mod">
+          <ac:chgData name="kousuke yamamoto" userId="516c4d66ab16f868" providerId="LiveId" clId="{D5857573-2C41-4D75-AB9F-5CA89102AE51}" dt="2026-10-07T05:39:18.915" v="364" actId="14100"/>
+          <ac:spMkLst>
+            <pc:docMk/>
+            <pc:sldMk cId="1052657188" sldId="280"/>
+            <ac:spMk id="29" creationId="{BBA72A92-9735-4E30-A84C-A21F8EE0712B}"/>
+          </ac:spMkLst>
+        </pc:spChg>
+        <pc:spChg chg="add mod">
+          <ac:chgData name="kousuke yamamoto" userId="516c4d66ab16f868" providerId="LiveId" clId="{D5857573-2C41-4D75-AB9F-5CA89102AE51}" dt="2026-10-07T05:56:46.274" v="476" actId="14100"/>
+          <ac:spMkLst>
+            <pc:docMk/>
+            <pc:sldMk cId="1052657188" sldId="280"/>
+            <ac:spMk id="30" creationId="{BB3F4799-2310-4452-96E6-CB79CCE99F18}"/>
+          </ac:spMkLst>
+        </pc:spChg>
+        <pc:spChg chg="add mod">
+          <ac:chgData name="kousuke yamamoto" userId="516c4d66ab16f868" providerId="LiveId" clId="{D5857573-2C41-4D75-AB9F-5CA89102AE51}" dt="2026-10-07T05:35:53.721" v="340" actId="1076"/>
+          <ac:spMkLst>
+            <pc:docMk/>
+            <pc:sldMk cId="1052657188" sldId="280"/>
+            <ac:spMk id="31" creationId="{24615237-2BC6-419A-A5F1-BE6B0F05DD15}"/>
+          </ac:spMkLst>
+        </pc:spChg>
+        <pc:spChg chg="add mod">
+          <ac:chgData name="kousuke yamamoto" userId="516c4d66ab16f868" providerId="LiveId" clId="{D5857573-2C41-4D75-AB9F-5CA89102AE51}" dt="2026-10-07T05:38:41.330" v="356" actId="14100"/>
+          <ac:spMkLst>
+            <pc:docMk/>
+            <pc:sldMk cId="1052657188" sldId="280"/>
+            <ac:spMk id="32" creationId="{A744D7B0-C499-4C30-B5E0-DBB63874843F}"/>
+          </ac:spMkLst>
+        </pc:spChg>
+        <pc:spChg chg="add mod">
+          <ac:chgData name="kousuke yamamoto" userId="516c4d66ab16f868" providerId="LiveId" clId="{D5857573-2C41-4D75-AB9F-5CA89102AE51}" dt="2026-10-07T05:32:57.306" v="322" actId="14100"/>
+          <ac:spMkLst>
+            <pc:docMk/>
+            <pc:sldMk cId="1052657188" sldId="280"/>
+            <ac:spMk id="33" creationId="{73E9A9B1-9043-4A93-8094-6D23E06F18AA}"/>
+          </ac:spMkLst>
+        </pc:spChg>
+        <pc:spChg chg="add mod">
+          <ac:chgData name="kousuke yamamoto" userId="516c4d66ab16f868" providerId="LiveId" clId="{D5857573-2C41-4D75-AB9F-5CA89102AE51}" dt="2026-10-07T05:39:02.665" v="359" actId="14100"/>
+          <ac:spMkLst>
+            <pc:docMk/>
+            <pc:sldMk cId="1052657188" sldId="280"/>
+            <ac:spMk id="34" creationId="{D8894E93-F099-4FA9-B80C-C537672E01AF}"/>
+          </ac:spMkLst>
+        </pc:spChg>
+        <pc:spChg chg="add del mod">
+          <ac:chgData name="kousuke yamamoto" userId="516c4d66ab16f868" providerId="LiveId" clId="{D5857573-2C41-4D75-AB9F-5CA89102AE51}" dt="2026-10-07T05:14:20.516" v="183" actId="478"/>
+          <ac:spMkLst>
+            <pc:docMk/>
+            <pc:sldMk cId="1052657188" sldId="280"/>
+            <ac:spMk id="35" creationId="{D03EB042-ACCA-4716-B030-67F430993771}"/>
+          </ac:spMkLst>
+        </pc:spChg>
+        <pc:spChg chg="add mod">
+          <ac:chgData name="kousuke yamamoto" userId="516c4d66ab16f868" providerId="LiveId" clId="{D5857573-2C41-4D75-AB9F-5CA89102AE51}" dt="2026-10-07T05:39:16.218" v="363" actId="1076"/>
+          <ac:spMkLst>
+            <pc:docMk/>
+            <pc:sldMk cId="1052657188" sldId="280"/>
+            <ac:spMk id="36" creationId="{8B149464-931B-474D-91C3-259DE66DE1CE}"/>
+          </ac:spMkLst>
+        </pc:spChg>
+        <pc:spChg chg="add mod">
+          <ac:chgData name="kousuke yamamoto" userId="516c4d66ab16f868" providerId="LiveId" clId="{D5857573-2C41-4D75-AB9F-5CA89102AE51}" dt="2026-10-07T05:16:39.378" v="218" actId="1076"/>
+          <ac:spMkLst>
+            <pc:docMk/>
+            <pc:sldMk cId="1052657188" sldId="280"/>
+            <ac:spMk id="37" creationId="{09F9DEB2-FC63-48B0-81C3-D8F94E48120D}"/>
+          </ac:spMkLst>
+        </pc:spChg>
+        <pc:spChg chg="add mod">
+          <ac:chgData name="kousuke yamamoto" userId="516c4d66ab16f868" providerId="LiveId" clId="{D5857573-2C41-4D75-AB9F-5CA89102AE51}" dt="2026-10-07T05:16:37.466" v="217" actId="1076"/>
+          <ac:spMkLst>
+            <pc:docMk/>
+            <pc:sldMk cId="1052657188" sldId="280"/>
+            <ac:spMk id="38" creationId="{D3D3B249-ADBE-422C-B027-68D10BBC6FCE}"/>
+          </ac:spMkLst>
+        </pc:spChg>
+        <pc:spChg chg="add mod">
+          <ac:chgData name="kousuke yamamoto" userId="516c4d66ab16f868" providerId="LiveId" clId="{D5857573-2C41-4D75-AB9F-5CA89102AE51}" dt="2026-10-07T05:16:35.818" v="216" actId="1076"/>
+          <ac:spMkLst>
+            <pc:docMk/>
+            <pc:sldMk cId="1052657188" sldId="280"/>
+            <ac:spMk id="39" creationId="{EB032937-15FA-41CF-8750-D2D3A36655C7}"/>
+          </ac:spMkLst>
+        </pc:spChg>
+        <pc:spChg chg="add mod">
+          <ac:chgData name="kousuke yamamoto" userId="516c4d66ab16f868" providerId="LiveId" clId="{D5857573-2C41-4D75-AB9F-5CA89102AE51}" dt="2026-10-07T05:16:33.643" v="215" actId="1076"/>
+          <ac:spMkLst>
+            <pc:docMk/>
+            <pc:sldMk cId="1052657188" sldId="280"/>
+            <ac:spMk id="40" creationId="{18EFA471-7F47-4712-B4E7-F9DCA0018244}"/>
+          </ac:spMkLst>
+        </pc:spChg>
+        <pc:spChg chg="add mod">
+          <ac:chgData name="kousuke yamamoto" userId="516c4d66ab16f868" providerId="LiveId" clId="{D5857573-2C41-4D75-AB9F-5CA89102AE51}" dt="2026-10-07T05:16:51.801" v="231" actId="1076"/>
+          <ac:spMkLst>
+            <pc:docMk/>
+            <pc:sldMk cId="1052657188" sldId="280"/>
+            <ac:spMk id="41" creationId="{27B5AF6A-B720-4A15-BD96-3B2AB1BFA765}"/>
+          </ac:spMkLst>
+        </pc:spChg>
+        <pc:spChg chg="add mod">
+          <ac:chgData name="kousuke yamamoto" userId="516c4d66ab16f868" providerId="LiveId" clId="{D5857573-2C41-4D75-AB9F-5CA89102AE51}" dt="2026-10-07T05:16:50.594" v="230" actId="1076"/>
+          <ac:spMkLst>
+            <pc:docMk/>
+            <pc:sldMk cId="1052657188" sldId="280"/>
+            <ac:spMk id="42" creationId="{28866596-4847-4AAB-A3D3-97168D8FBAAA}"/>
+          </ac:spMkLst>
+        </pc:spChg>
+        <pc:spChg chg="add mod">
+          <ac:chgData name="kousuke yamamoto" userId="516c4d66ab16f868" providerId="LiveId" clId="{D5857573-2C41-4D75-AB9F-5CA89102AE51}" dt="2026-10-07T05:16:53.570" v="232" actId="1076"/>
+          <ac:spMkLst>
+            <pc:docMk/>
+            <pc:sldMk cId="1052657188" sldId="280"/>
+            <ac:spMk id="43" creationId="{DA648A99-006F-4AE3-826A-44E96410B1D6}"/>
+          </ac:spMkLst>
+        </pc:spChg>
+        <pc:spChg chg="add mod">
+          <ac:chgData name="kousuke yamamoto" userId="516c4d66ab16f868" providerId="LiveId" clId="{D5857573-2C41-4D75-AB9F-5CA89102AE51}" dt="2026-10-07T05:16:49.234" v="229" actId="1076"/>
+          <ac:spMkLst>
+            <pc:docMk/>
+            <pc:sldMk cId="1052657188" sldId="280"/>
+            <ac:spMk id="44" creationId="{79338979-1CA2-428B-87CA-C244969483C4}"/>
+          </ac:spMkLst>
+        </pc:spChg>
+        <pc:spChg chg="add mod">
+          <ac:chgData name="kousuke yamamoto" userId="516c4d66ab16f868" providerId="LiveId" clId="{D5857573-2C41-4D75-AB9F-5CA89102AE51}" dt="2026-10-07T05:16:47.524" v="228" actId="1076"/>
+          <ac:spMkLst>
+            <pc:docMk/>
+            <pc:sldMk cId="1052657188" sldId="280"/>
+            <ac:spMk id="45" creationId="{961FDBE3-C004-40EC-9C48-8FC3D133FB0D}"/>
+          </ac:spMkLst>
+        </pc:spChg>
+        <pc:spChg chg="add mod">
+          <ac:chgData name="kousuke yamamoto" userId="516c4d66ab16f868" providerId="LiveId" clId="{D5857573-2C41-4D75-AB9F-5CA89102AE51}" dt="2026-10-07T05:16:46.186" v="227" actId="1076"/>
+          <ac:spMkLst>
+            <pc:docMk/>
+            <pc:sldMk cId="1052657188" sldId="280"/>
+            <ac:spMk id="46" creationId="{DE90BADF-4B06-44E9-BA54-FBC5F847C721}"/>
+          </ac:spMkLst>
+        </pc:spChg>
+        <pc:spChg chg="add mod">
+          <ac:chgData name="kousuke yamamoto" userId="516c4d66ab16f868" providerId="LiveId" clId="{D5857573-2C41-4D75-AB9F-5CA89102AE51}" dt="2026-10-07T05:16:44.814" v="226" actId="1076"/>
+          <ac:spMkLst>
+            <pc:docMk/>
+            <pc:sldMk cId="1052657188" sldId="280"/>
+            <ac:spMk id="47" creationId="{81D19150-5041-4D06-9CEC-CE0960BB50E9}"/>
+          </ac:spMkLst>
+        </pc:spChg>
+        <pc:spChg chg="add mod">
+          <ac:chgData name="kousuke yamamoto" userId="516c4d66ab16f868" providerId="LiveId" clId="{D5857573-2C41-4D75-AB9F-5CA89102AE51}" dt="2026-10-07T05:39:11.442" v="362" actId="1076"/>
+          <ac:spMkLst>
+            <pc:docMk/>
+            <pc:sldMk cId="1052657188" sldId="280"/>
+            <ac:spMk id="48" creationId="{14A25E24-1930-4643-998D-EC398FF2BF9F}"/>
+          </ac:spMkLst>
+        </pc:spChg>
+        <pc:spChg chg="add mod">
+          <ac:chgData name="kousuke yamamoto" userId="516c4d66ab16f868" providerId="LiveId" clId="{D5857573-2C41-4D75-AB9F-5CA89102AE51}" dt="2026-10-07T05:39:09.522" v="361" actId="1076"/>
+          <ac:spMkLst>
+            <pc:docMk/>
+            <pc:sldMk cId="1052657188" sldId="280"/>
+            <ac:spMk id="49" creationId="{571FC337-D6B5-4668-80BA-0C254717675A}"/>
+          </ac:spMkLst>
+        </pc:spChg>
+        <pc:spChg chg="add del mod">
+          <ac:chgData name="kousuke yamamoto" userId="516c4d66ab16f868" providerId="LiveId" clId="{D5857573-2C41-4D75-AB9F-5CA89102AE51}" dt="2026-10-07T05:38:33.221" v="354" actId="478"/>
+          <ac:spMkLst>
+            <pc:docMk/>
+            <pc:sldMk cId="1052657188" sldId="280"/>
+            <ac:spMk id="50" creationId="{D23526A9-31B0-4C77-AFEC-169605C71A45}"/>
+          </ac:spMkLst>
+        </pc:spChg>
+        <pc:spChg chg="add del mod">
+          <ac:chgData name="kousuke yamamoto" userId="516c4d66ab16f868" providerId="LiveId" clId="{D5857573-2C41-4D75-AB9F-5CA89102AE51}" dt="2026-10-07T05:18:40.806" v="270" actId="478"/>
+          <ac:spMkLst>
+            <pc:docMk/>
+            <pc:sldMk cId="1052657188" sldId="280"/>
+            <ac:spMk id="51" creationId="{6689C2A4-7564-46C1-A20F-A1E3426796B0}"/>
+          </ac:spMkLst>
+        </pc:spChg>
+        <pc:spChg chg="add del mod">
+          <ac:chgData name="kousuke yamamoto" userId="516c4d66ab16f868" providerId="LiveId" clId="{D5857573-2C41-4D75-AB9F-5CA89102AE51}" dt="2026-10-07T05:32:51.570" v="320" actId="478"/>
+          <ac:spMkLst>
+            <pc:docMk/>
+            <pc:sldMk cId="1052657188" sldId="280"/>
+            <ac:spMk id="52" creationId="{4EE80FEF-471C-49E7-9978-DE57C8DD14FA}"/>
+          </ac:spMkLst>
+        </pc:spChg>
+        <pc:spChg chg="add del mod">
+          <ac:chgData name="kousuke yamamoto" userId="516c4d66ab16f868" providerId="LiveId" clId="{D5857573-2C41-4D75-AB9F-5CA89102AE51}" dt="2026-10-07T05:35:40.437" v="335" actId="478"/>
+          <ac:spMkLst>
+            <pc:docMk/>
+            <pc:sldMk cId="1052657188" sldId="280"/>
+            <ac:spMk id="53" creationId="{E512327E-50A0-41A1-ABD7-D15BDEE120AE}"/>
+          </ac:spMkLst>
+        </pc:spChg>
+        <pc:spChg chg="add mod">
+          <ac:chgData name="kousuke yamamoto" userId="516c4d66ab16f868" providerId="LiveId" clId="{D5857573-2C41-4D75-AB9F-5CA89102AE51}" dt="2026-10-07T05:40:40.898" v="397" actId="1076"/>
+          <ac:spMkLst>
+            <pc:docMk/>
+            <pc:sldMk cId="1052657188" sldId="280"/>
+            <ac:spMk id="54" creationId="{0373755D-C5EA-46C1-8AD8-23528D92A54F}"/>
+          </ac:spMkLst>
+        </pc:spChg>
+        <pc:spChg chg="add mod">
+          <ac:chgData name="kousuke yamamoto" userId="516c4d66ab16f868" providerId="LiveId" clId="{D5857573-2C41-4D75-AB9F-5CA89102AE51}" dt="2026-10-07T05:46:08.347" v="404" actId="14100"/>
+          <ac:spMkLst>
+            <pc:docMk/>
+            <pc:sldMk cId="1052657188" sldId="280"/>
+            <ac:spMk id="55" creationId="{1BDAB244-1DE6-4A30-B51C-22BF57ECF632}"/>
+          </ac:spMkLst>
+        </pc:spChg>
+        <pc:spChg chg="add del mod">
+          <ac:chgData name="kousuke yamamoto" userId="516c4d66ab16f868" providerId="LiveId" clId="{D5857573-2C41-4D75-AB9F-5CA89102AE51}" dt="2026-10-07T05:51:27.478" v="439" actId="478"/>
+          <ac:spMkLst>
+            <pc:docMk/>
+            <pc:sldMk cId="1052657188" sldId="280"/>
+            <ac:spMk id="56" creationId="{08754C1F-62E1-4AF4-871E-5CCF3E34FEE1}"/>
+          </ac:spMkLst>
+        </pc:spChg>
+        <pc:cxnChg chg="add mod">
+          <ac:chgData name="kousuke yamamoto" userId="516c4d66ab16f868" providerId="LiveId" clId="{D5857573-2C41-4D75-AB9F-5CA89102AE51}" dt="2026-10-07T05:06:14.354" v="77" actId="1076"/>
+          <ac:cxnSpMkLst>
+            <pc:docMk/>
+            <pc:sldMk cId="1052657188" sldId="280"/>
+            <ac:cxnSpMk id="19" creationId="{AC89E924-9F7E-41B9-BA10-D864E0FC8D88}"/>
+          </ac:cxnSpMkLst>
+        </pc:cxnChg>
+        <pc:cxnChg chg="add mod">
+          <ac:chgData name="kousuke yamamoto" userId="516c4d66ab16f868" providerId="LiveId" clId="{D5857573-2C41-4D75-AB9F-5CA89102AE51}" dt="2026-10-07T05:06:07.195" v="76" actId="1076"/>
+          <ac:cxnSpMkLst>
+            <pc:docMk/>
+            <pc:sldMk cId="1052657188" sldId="280"/>
+            <ac:cxnSpMk id="23" creationId="{9166B45F-7E97-400A-970F-69A1CEE729AE}"/>
+          </ac:cxnSpMkLst>
+        </pc:cxnChg>
+        <pc:cxnChg chg="add mod">
+          <ac:chgData name="kousuke yamamoto" userId="516c4d66ab16f868" providerId="LiveId" clId="{D5857573-2C41-4D75-AB9F-5CA89102AE51}" dt="2026-10-07T05:06:34.675" v="84" actId="14100"/>
+          <ac:cxnSpMkLst>
+            <pc:docMk/>
+            <pc:sldMk cId="1052657188" sldId="280"/>
+            <ac:cxnSpMk id="24" creationId="{A1312EE3-B9EB-45B8-9B57-AC2192580636}"/>
+          </ac:cxnSpMkLst>
+        </pc:cxnChg>
+        <pc:cxnChg chg="add mod">
+          <ac:chgData name="kousuke yamamoto" userId="516c4d66ab16f868" providerId="LiveId" clId="{D5857573-2C41-4D75-AB9F-5CA89102AE51}" dt="2026-10-07T05:06:45.451" v="86" actId="1076"/>
+          <ac:cxnSpMkLst>
+            <pc:docMk/>
+            <pc:sldMk cId="1052657188" sldId="280"/>
+            <ac:cxnSpMk id="28" creationId="{E2414651-7F75-4D84-B1E4-E27682E58B7C}"/>
+          </ac:cxnSpMkLst>
+        </pc:cxnChg>
+      </pc:sldChg>
+      <pc:sldChg chg="addSp delSp modSp new mod">
+        <pc:chgData name="kousuke yamamoto" userId="516c4d66ab16f868" providerId="LiveId" clId="{D5857573-2C41-4D75-AB9F-5CA89102AE51}" dt="2026-10-07T06:11:25.329" v="579" actId="1076"/>
+        <pc:sldMkLst>
+          <pc:docMk/>
+          <pc:sldMk cId="332326839" sldId="281"/>
+        </pc:sldMkLst>
+        <pc:spChg chg="add mod">
+          <ac:chgData name="kousuke yamamoto" userId="516c4d66ab16f868" providerId="LiveId" clId="{D5857573-2C41-4D75-AB9F-5CA89102AE51}" dt="2026-10-07T06:06:56.466" v="547" actId="14100"/>
+          <ac:spMkLst>
+            <pc:docMk/>
+            <pc:sldMk cId="332326839" sldId="281"/>
+            <ac:spMk id="2" creationId="{D6B1115E-D305-4D46-AB9A-8F11C8AEC40F}"/>
+          </ac:spMkLst>
+        </pc:spChg>
+        <pc:spChg chg="add del mod">
+          <ac:chgData name="kousuke yamamoto" userId="516c4d66ab16f868" providerId="LiveId" clId="{D5857573-2C41-4D75-AB9F-5CA89102AE51}" dt="2026-10-07T06:07:04.551" v="563" actId="478"/>
+          <ac:spMkLst>
+            <pc:docMk/>
+            <pc:sldMk cId="332326839" sldId="281"/>
+            <ac:spMk id="3" creationId="{282DD71E-1765-4184-A68C-EEAB0AA7D6CB}"/>
+          </ac:spMkLst>
+        </pc:spChg>
+        <pc:spChg chg="add del mod">
+          <ac:chgData name="kousuke yamamoto" userId="516c4d66ab16f868" providerId="LiveId" clId="{D5857573-2C41-4D75-AB9F-5CA89102AE51}" dt="2026-10-07T06:07:05.259" v="564" actId="478"/>
+          <ac:spMkLst>
+            <pc:docMk/>
+            <pc:sldMk cId="332326839" sldId="281"/>
+            <ac:spMk id="4" creationId="{E6E79D95-A308-4045-9D19-1293A208A749}"/>
+          </ac:spMkLst>
+        </pc:spChg>
+        <pc:spChg chg="add del mod">
+          <ac:chgData name="kousuke yamamoto" userId="516c4d66ab16f868" providerId="LiveId" clId="{D5857573-2C41-4D75-AB9F-5CA89102AE51}" dt="2026-10-07T06:07:03.256" v="562" actId="478"/>
+          <ac:spMkLst>
+            <pc:docMk/>
+            <pc:sldMk cId="332326839" sldId="281"/>
+            <ac:spMk id="5" creationId="{A567B1BD-CB0F-40D1-B984-FBCFE10D84C4}"/>
+          </ac:spMkLst>
+        </pc:spChg>
+        <pc:spChg chg="add del mod">
+          <ac:chgData name="kousuke yamamoto" userId="516c4d66ab16f868" providerId="LiveId" clId="{D5857573-2C41-4D75-AB9F-5CA89102AE51}" dt="2026-10-07T06:07:07.139" v="566" actId="478"/>
+          <ac:spMkLst>
+            <pc:docMk/>
+            <pc:sldMk cId="332326839" sldId="281"/>
+            <ac:spMk id="6" creationId="{90D1EAF5-6519-45F2-89F5-9716C0FA1D34}"/>
+          </ac:spMkLst>
+        </pc:spChg>
+        <pc:spChg chg="add del mod">
+          <ac:chgData name="kousuke yamamoto" userId="516c4d66ab16f868" providerId="LiveId" clId="{D5857573-2C41-4D75-AB9F-5CA89102AE51}" dt="2026-10-07T06:07:06.419" v="565" actId="478"/>
+          <ac:spMkLst>
+            <pc:docMk/>
+            <pc:sldMk cId="332326839" sldId="281"/>
+            <ac:spMk id="7" creationId="{96EE1366-B0B4-4860-BCC7-B8CACCC6204C}"/>
+          </ac:spMkLst>
+        </pc:spChg>
+        <pc:spChg chg="add mod">
+          <ac:chgData name="kousuke yamamoto" userId="516c4d66ab16f868" providerId="LiveId" clId="{D5857573-2C41-4D75-AB9F-5CA89102AE51}" dt="2026-10-07T06:06:59.077" v="548"/>
+          <ac:spMkLst>
+            <pc:docMk/>
+            <pc:sldMk cId="332326839" sldId="281"/>
+            <ac:spMk id="8" creationId="{F176A1D4-4FDF-4A47-ACF2-1ED266931630}"/>
+          </ac:spMkLst>
+        </pc:spChg>
+        <pc:spChg chg="add mod">
+          <ac:chgData name="kousuke yamamoto" userId="516c4d66ab16f868" providerId="LiveId" clId="{D5857573-2C41-4D75-AB9F-5CA89102AE51}" dt="2026-10-07T06:06:59.309" v="549"/>
+          <ac:spMkLst>
+            <pc:docMk/>
+            <pc:sldMk cId="332326839" sldId="281"/>
+            <ac:spMk id="9" creationId="{66123DBD-858F-42CD-BA18-EA03A6265CF3}"/>
+          </ac:spMkLst>
+        </pc:spChg>
+        <pc:spChg chg="add mod">
+          <ac:chgData name="kousuke yamamoto" userId="516c4d66ab16f868" providerId="LiveId" clId="{D5857573-2C41-4D75-AB9F-5CA89102AE51}" dt="2026-10-07T06:11:25.329" v="579" actId="1076"/>
+          <ac:spMkLst>
+            <pc:docMk/>
+            <pc:sldMk cId="332326839" sldId="281"/>
+            <ac:spMk id="10" creationId="{E88FE659-FD37-45BB-A382-3E92E9355853}"/>
+          </ac:spMkLst>
+        </pc:spChg>
+        <pc:spChg chg="add mod">
+          <ac:chgData name="kousuke yamamoto" userId="516c4d66ab16f868" providerId="LiveId" clId="{D5857573-2C41-4D75-AB9F-5CA89102AE51}" dt="2026-10-07T06:11:24.043" v="578" actId="1076"/>
+          <ac:spMkLst>
+            <pc:docMk/>
+            <pc:sldMk cId="332326839" sldId="281"/>
+            <ac:spMk id="11" creationId="{7DF02EA0-B6F8-4A6C-9957-A00D864F36A8}"/>
+          </ac:spMkLst>
+        </pc:spChg>
+        <pc:spChg chg="add mod">
+          <ac:chgData name="kousuke yamamoto" userId="516c4d66ab16f868" providerId="LiveId" clId="{D5857573-2C41-4D75-AB9F-5CA89102AE51}" dt="2026-10-07T06:11:23.154" v="577" actId="1076"/>
+          <ac:spMkLst>
+            <pc:docMk/>
+            <pc:sldMk cId="332326839" sldId="281"/>
+            <ac:spMk id="12" creationId="{324B2212-6109-48C6-B020-6F52BF8E4677}"/>
+          </ac:spMkLst>
+        </pc:spChg>
+        <pc:spChg chg="add mod">
+          <ac:chgData name="kousuke yamamoto" userId="516c4d66ab16f868" providerId="LiveId" clId="{D5857573-2C41-4D75-AB9F-5CA89102AE51}" dt="2026-10-07T06:11:21.602" v="576" actId="1076"/>
+          <ac:spMkLst>
+            <pc:docMk/>
+            <pc:sldMk cId="332326839" sldId="281"/>
+            <ac:spMk id="13" creationId="{673C9526-63F9-4F46-B507-6AB8933F0C8B}"/>
+          </ac:spMkLst>
+        </pc:spChg>
+        <pc:spChg chg="add mod">
+          <ac:chgData name="kousuke yamamoto" userId="516c4d66ab16f868" providerId="LiveId" clId="{D5857573-2C41-4D75-AB9F-5CA89102AE51}" dt="2026-10-07T06:11:20.410" v="575" actId="1076"/>
+          <ac:spMkLst>
+            <pc:docMk/>
+            <pc:sldMk cId="332326839" sldId="281"/>
+            <ac:spMk id="14" creationId="{AAA8DC7F-6EA4-4A4C-BEF5-93339F2C7F43}"/>
+          </ac:spMkLst>
+        </pc:spChg>
+        <pc:spChg chg="add mod">
+          <ac:chgData name="kousuke yamamoto" userId="516c4d66ab16f868" providerId="LiveId" clId="{D5857573-2C41-4D75-AB9F-5CA89102AE51}" dt="2026-10-07T06:11:19.155" v="574" actId="1076"/>
+          <ac:spMkLst>
+            <pc:docMk/>
+            <pc:sldMk cId="332326839" sldId="281"/>
+            <ac:spMk id="15" creationId="{790E5A46-6D4F-4785-9BD2-C3710EF2D01C}"/>
+          </ac:spMkLst>
+        </pc:spChg>
+        <pc:spChg chg="add mod">
+          <ac:chgData name="kousuke yamamoto" userId="516c4d66ab16f868" providerId="LiveId" clId="{D5857573-2C41-4D75-AB9F-5CA89102AE51}" dt="2026-10-07T06:11:16.730" v="573" actId="1076"/>
+          <ac:spMkLst>
+            <pc:docMk/>
+            <pc:sldMk cId="332326839" sldId="281"/>
+            <ac:spMk id="16" creationId="{54E718A8-C194-4C20-BB55-1FDE59670CB8}"/>
+          </ac:spMkLst>
+        </pc:spChg>
+        <pc:spChg chg="add mod">
+          <ac:chgData name="kousuke yamamoto" userId="516c4d66ab16f868" providerId="LiveId" clId="{D5857573-2C41-4D75-AB9F-5CA89102AE51}" dt="2026-10-07T06:11:11.812" v="572" actId="1076"/>
+          <ac:spMkLst>
+            <pc:docMk/>
+            <pc:sldMk cId="332326839" sldId="281"/>
+            <ac:spMk id="17" creationId="{90FF442E-8CD0-4054-AA21-54424510B52E}"/>
+          </ac:spMkLst>
+        </pc:spChg>
+        <pc:spChg chg="add mod">
+          <ac:chgData name="kousuke yamamoto" userId="516c4d66ab16f868" providerId="LiveId" clId="{D5857573-2C41-4D75-AB9F-5CA89102AE51}" dt="2026-10-07T06:11:03.050" v="569" actId="1076"/>
+          <ac:spMkLst>
+            <pc:docMk/>
+            <pc:sldMk cId="332326839" sldId="281"/>
+            <ac:spMk id="18" creationId="{845A5E4D-DE58-4E0C-A3D0-E279F0219CB5}"/>
+          </ac:spMkLst>
+        </pc:spChg>
+        <pc:spChg chg="add mod">
+          <ac:chgData name="kousuke yamamoto" userId="516c4d66ab16f868" providerId="LiveId" clId="{D5857573-2C41-4D75-AB9F-5CA89102AE51}" dt="2026-10-07T06:10:57.387" v="568" actId="1076"/>
+          <ac:spMkLst>
+            <pc:docMk/>
+            <pc:sldMk cId="332326839" sldId="281"/>
+            <ac:spMk id="19" creationId="{81933CC8-99D5-4AE5-9B81-4F5565E33C58}"/>
+          </ac:spMkLst>
+        </pc:spChg>
+        <pc:spChg chg="add mod">
+          <ac:chgData name="kousuke yamamoto" userId="516c4d66ab16f868" providerId="LiveId" clId="{D5857573-2C41-4D75-AB9F-5CA89102AE51}" dt="2026-10-07T06:10:52.866" v="567" actId="1076"/>
+          <ac:spMkLst>
+            <pc:docMk/>
+            <pc:sldMk cId="332326839" sldId="281"/>
+            <ac:spMk id="20" creationId="{E3C0F741-AB12-441B-BE49-6E3573FA328B}"/>
+          </ac:spMkLst>
+        </pc:spChg>
       </pc:sldChg>
     </pc:docChg>
   </pc:docChgLst>
@@ -355,7 +990,7 @@
           <a:p>
             <a:fld id="{EA23BABC-04D1-40FF-A826-E108E600BEAD}" type="datetimeFigureOut">
               <a:rPr kumimoji="1" lang="ja-JP" altLang="en-US" smtClean="0"/>
-              <a:t>2026/10/6</a:t>
+              <a:t>2026/10/7</a:t>
             </a:fld>
             <a:endParaRPr kumimoji="1" lang="ja-JP" altLang="en-US"/>
           </a:p>
@@ -885,7 +1520,7 @@
           <a:p>
             <a:fld id="{5BCAD085-E8A6-8845-BD4E-CB4CCA059FC4}" type="datetimeFigureOut">
               <a:rPr lang="en-US" smtClean="0"/>
-              <a:t>10/6/2026</a:t>
+              <a:t>10/7/2026</a:t>
             </a:fld>
             <a:endParaRPr lang="en-US"/>
           </a:p>
@@ -1115,7 +1750,7 @@
           <a:p>
             <a:fld id="{5BCAD085-E8A6-8845-BD4E-CB4CCA059FC4}" type="datetimeFigureOut">
               <a:rPr lang="en-US" smtClean="0"/>
-              <a:t>10/6/2026</a:t>
+              <a:t>10/7/2026</a:t>
             </a:fld>
             <a:endParaRPr lang="en-US"/>
           </a:p>
@@ -1355,7 +1990,7 @@
           <a:p>
             <a:fld id="{5BCAD085-E8A6-8845-BD4E-CB4CCA059FC4}" type="datetimeFigureOut">
               <a:rPr lang="en-US" smtClean="0"/>
-              <a:t>10/6/2026</a:t>
+              <a:t>10/7/2026</a:t>
             </a:fld>
             <a:endParaRPr lang="en-US"/>
           </a:p>
@@ -1585,7 +2220,7 @@
           <a:p>
             <a:fld id="{5BCAD085-E8A6-8845-BD4E-CB4CCA059FC4}" type="datetimeFigureOut">
               <a:rPr lang="en-US" smtClean="0"/>
-              <a:t>10/6/2026</a:t>
+              <a:t>10/7/2026</a:t>
             </a:fld>
             <a:endParaRPr lang="en-US"/>
           </a:p>
@@ -1860,7 +2495,7 @@
           <a:p>
             <a:fld id="{5BCAD085-E8A6-8845-BD4E-CB4CCA059FC4}" type="datetimeFigureOut">
               <a:rPr lang="en-US" smtClean="0"/>
-              <a:t>10/6/2026</a:t>
+              <a:t>10/7/2026</a:t>
             </a:fld>
             <a:endParaRPr lang="en-US"/>
           </a:p>
@@ -2189,7 +2824,7 @@
           <a:p>
             <a:fld id="{5BCAD085-E8A6-8845-BD4E-CB4CCA059FC4}" type="datetimeFigureOut">
               <a:rPr lang="en-US" smtClean="0"/>
-              <a:t>10/6/2026</a:t>
+              <a:t>10/7/2026</a:t>
             </a:fld>
             <a:endParaRPr lang="en-US"/>
           </a:p>
@@ -2665,7 +3300,7 @@
           <a:p>
             <a:fld id="{5BCAD085-E8A6-8845-BD4E-CB4CCA059FC4}" type="datetimeFigureOut">
               <a:rPr lang="en-US" smtClean="0"/>
-              <a:t>10/6/2026</a:t>
+              <a:t>10/7/2026</a:t>
             </a:fld>
             <a:endParaRPr lang="en-US"/>
           </a:p>
@@ -2806,7 +3441,7 @@
           <a:p>
             <a:fld id="{5BCAD085-E8A6-8845-BD4E-CB4CCA059FC4}" type="datetimeFigureOut">
               <a:rPr lang="en-US" smtClean="0"/>
-              <a:t>10/6/2026</a:t>
+              <a:t>10/7/2026</a:t>
             </a:fld>
             <a:endParaRPr lang="en-US"/>
           </a:p>
@@ -2919,7 +3554,7 @@
           <a:p>
             <a:fld id="{5BCAD085-E8A6-8845-BD4E-CB4CCA059FC4}" type="datetimeFigureOut">
               <a:rPr lang="en-US" smtClean="0"/>
-              <a:t>10/6/2026</a:t>
+              <a:t>10/7/2026</a:t>
             </a:fld>
             <a:endParaRPr lang="en-US"/>
           </a:p>
@@ -3262,7 +3897,7 @@
           <a:p>
             <a:fld id="{5BCAD085-E8A6-8845-BD4E-CB4CCA059FC4}" type="datetimeFigureOut">
               <a:rPr lang="en-US" smtClean="0"/>
-              <a:t>10/6/2026</a:t>
+              <a:t>10/7/2026</a:t>
             </a:fld>
             <a:endParaRPr lang="en-US"/>
           </a:p>
@@ -3550,7 +4185,7 @@
           <a:p>
             <a:fld id="{5BCAD085-E8A6-8845-BD4E-CB4CCA059FC4}" type="datetimeFigureOut">
               <a:rPr lang="en-US" smtClean="0"/>
-              <a:t>10/6/2026</a:t>
+              <a:t>10/7/2026</a:t>
             </a:fld>
             <a:endParaRPr lang="en-US"/>
           </a:p>
@@ -3826,7 +4461,7 @@
           <a:p>
             <a:fld id="{5BCAD085-E8A6-8845-BD4E-CB4CCA059FC4}" type="datetimeFigureOut">
               <a:rPr lang="en-US" smtClean="0"/>
-              <a:t>10/6/2026</a:t>
+              <a:t>10/7/2026</a:t>
             </a:fld>
             <a:endParaRPr lang="en-US"/>
           </a:p>
@@ -4623,6 +5258,18 @@
               <a:rPr lang="ja-JP" altLang="en-US" dirty="0"/>
               <a:t>↑　↓　←　→</a:t>
             </a:r>
+            <a:endParaRPr lang="en-US" altLang="ja-JP" dirty="0"/>
+          </a:p>
+          <a:p>
+            <a:pPr algn="ctr"/>
+            <a:r>
+              <a:rPr kumimoji="1" lang="en-US" altLang="ja-JP" dirty="0"/>
+              <a:t>Space</a:t>
+            </a:r>
+            <a:r>
+              <a:rPr kumimoji="1" lang="ja-JP" altLang="en-US" dirty="0"/>
+              <a:t>で止める</a:t>
+            </a:r>
             <a:endParaRPr kumimoji="1" lang="en-US" altLang="ja-JP" dirty="0"/>
           </a:p>
         </p:txBody>
@@ -6131,10 +6778,10 @@
       </p:grpSpPr>
       <p:sp>
         <p:nvSpPr>
-          <p:cNvPr id="2" name="正方形/長方形 1">
-            <a:extLst>
-              <a:ext uri="{FF2B5EF4-FFF2-40B4-BE49-F238E27FC236}">
-                <a16:creationId xmlns:a16="http://schemas.microsoft.com/office/drawing/2014/main" id="{9F7CA3D4-E67C-4023-B580-346E725E68BF}"/>
+          <p:cNvPr id="2" name="楕円 1">
+            <a:extLst>
+              <a:ext uri="{FF2B5EF4-FFF2-40B4-BE49-F238E27FC236}">
+                <a16:creationId xmlns:a16="http://schemas.microsoft.com/office/drawing/2014/main" id="{B2FC1149-7A59-4FE9-B11D-F12ABE9B4EFE}"/>
               </a:ext>
             </a:extLst>
           </p:cNvPr>
@@ -6143,10 +6790,10 @@
         </p:nvSpPr>
         <p:spPr>
           <a:xfrm>
-            <a:off x="2569464" y="457201"/>
-            <a:ext cx="7863840" cy="4325112"/>
-          </a:xfrm>
-          <a:prstGeom prst="rect">
+            <a:off x="3613406" y="2512699"/>
+            <a:ext cx="146303" cy="137159"/>
+          </a:xfrm>
+          <a:prstGeom prst="ellipse">
             <a:avLst/>
           </a:prstGeom>
         </p:spPr>
@@ -6171,9 +6818,851 @@
           <a:lstStyle/>
           <a:p>
             <a:pPr algn="ctr"/>
+            <a:endParaRPr kumimoji="1" lang="ja-JP" altLang="en-US"/>
+          </a:p>
+        </p:txBody>
+      </p:sp>
+      <p:sp>
+        <p:nvSpPr>
+          <p:cNvPr id="3" name="楕円 2">
+            <a:extLst>
+              <a:ext uri="{FF2B5EF4-FFF2-40B4-BE49-F238E27FC236}">
+                <a16:creationId xmlns:a16="http://schemas.microsoft.com/office/drawing/2014/main" id="{2373505A-EE41-4321-9F69-FB30EFB7A053}"/>
+              </a:ext>
+            </a:extLst>
+          </p:cNvPr>
+          <p:cNvSpPr/>
+          <p:nvPr/>
+        </p:nvSpPr>
+        <p:spPr>
+          <a:xfrm>
+            <a:off x="3467103" y="3835899"/>
+            <a:ext cx="146303" cy="137159"/>
+          </a:xfrm>
+          <a:prstGeom prst="ellipse">
+            <a:avLst/>
+          </a:prstGeom>
+        </p:spPr>
+        <p:style>
+          <a:lnRef idx="2">
+            <a:schemeClr val="accent1">
+              <a:shade val="50000"/>
+            </a:schemeClr>
+          </a:lnRef>
+          <a:fillRef idx="1">
+            <a:schemeClr val="accent1"/>
+          </a:fillRef>
+          <a:effectRef idx="0">
+            <a:schemeClr val="accent1"/>
+          </a:effectRef>
+          <a:fontRef idx="minor">
+            <a:schemeClr val="lt1"/>
+          </a:fontRef>
+        </p:style>
+        <p:txBody>
+          <a:bodyPr rtlCol="0" anchor="ctr"/>
+          <a:lstStyle/>
+          <a:p>
+            <a:pPr algn="ctr"/>
+            <a:endParaRPr kumimoji="1" lang="ja-JP" altLang="en-US"/>
+          </a:p>
+        </p:txBody>
+      </p:sp>
+      <p:sp>
+        <p:nvSpPr>
+          <p:cNvPr id="4" name="楕円 3">
+            <a:extLst>
+              <a:ext uri="{FF2B5EF4-FFF2-40B4-BE49-F238E27FC236}">
+                <a16:creationId xmlns:a16="http://schemas.microsoft.com/office/drawing/2014/main" id="{CFB89082-A4EA-45D2-A362-769DB0B5B6BB}"/>
+              </a:ext>
+            </a:extLst>
+          </p:cNvPr>
+          <p:cNvSpPr/>
+          <p:nvPr/>
+        </p:nvSpPr>
+        <p:spPr>
+          <a:xfrm>
+            <a:off x="2708915" y="4593333"/>
+            <a:ext cx="146303" cy="137159"/>
+          </a:xfrm>
+          <a:prstGeom prst="ellipse">
+            <a:avLst/>
+          </a:prstGeom>
+        </p:spPr>
+        <p:style>
+          <a:lnRef idx="2">
+            <a:schemeClr val="accent1">
+              <a:shade val="50000"/>
+            </a:schemeClr>
+          </a:lnRef>
+          <a:fillRef idx="1">
+            <a:schemeClr val="accent1"/>
+          </a:fillRef>
+          <a:effectRef idx="0">
+            <a:schemeClr val="accent1"/>
+          </a:effectRef>
+          <a:fontRef idx="minor">
+            <a:schemeClr val="lt1"/>
+          </a:fontRef>
+        </p:style>
+        <p:txBody>
+          <a:bodyPr rtlCol="0" anchor="ctr"/>
+          <a:lstStyle/>
+          <a:p>
+            <a:pPr algn="ctr"/>
+            <a:endParaRPr kumimoji="1" lang="ja-JP" altLang="en-US"/>
+          </a:p>
+        </p:txBody>
+      </p:sp>
+      <p:sp>
+        <p:nvSpPr>
+          <p:cNvPr id="5" name="楕円 4">
+            <a:extLst>
+              <a:ext uri="{FF2B5EF4-FFF2-40B4-BE49-F238E27FC236}">
+                <a16:creationId xmlns:a16="http://schemas.microsoft.com/office/drawing/2014/main" id="{065A4485-D696-4283-B903-32B04CC9C478}"/>
+              </a:ext>
+            </a:extLst>
+          </p:cNvPr>
+          <p:cNvSpPr/>
+          <p:nvPr/>
+        </p:nvSpPr>
+        <p:spPr>
+          <a:xfrm>
+            <a:off x="4420360" y="5709287"/>
+            <a:ext cx="146303" cy="137159"/>
+          </a:xfrm>
+          <a:prstGeom prst="ellipse">
+            <a:avLst/>
+          </a:prstGeom>
+        </p:spPr>
+        <p:style>
+          <a:lnRef idx="2">
+            <a:schemeClr val="accent1">
+              <a:shade val="50000"/>
+            </a:schemeClr>
+          </a:lnRef>
+          <a:fillRef idx="1">
+            <a:schemeClr val="accent1"/>
+          </a:fillRef>
+          <a:effectRef idx="0">
+            <a:schemeClr val="accent1"/>
+          </a:effectRef>
+          <a:fontRef idx="minor">
+            <a:schemeClr val="lt1"/>
+          </a:fontRef>
+        </p:style>
+        <p:txBody>
+          <a:bodyPr rtlCol="0" anchor="ctr"/>
+          <a:lstStyle/>
+          <a:p>
+            <a:pPr algn="ctr"/>
+            <a:endParaRPr kumimoji="1" lang="ja-JP" altLang="en-US"/>
+          </a:p>
+        </p:txBody>
+      </p:sp>
+      <p:sp>
+        <p:nvSpPr>
+          <p:cNvPr id="6" name="楕円 5">
+            <a:extLst>
+              <a:ext uri="{FF2B5EF4-FFF2-40B4-BE49-F238E27FC236}">
+                <a16:creationId xmlns:a16="http://schemas.microsoft.com/office/drawing/2014/main" id="{36ECD351-79D8-477C-9911-D8A58679F708}"/>
+              </a:ext>
+            </a:extLst>
+          </p:cNvPr>
+          <p:cNvSpPr/>
+          <p:nvPr/>
+        </p:nvSpPr>
+        <p:spPr>
+          <a:xfrm>
+            <a:off x="5916170" y="5303134"/>
+            <a:ext cx="146303" cy="137159"/>
+          </a:xfrm>
+          <a:prstGeom prst="ellipse">
+            <a:avLst/>
+          </a:prstGeom>
+        </p:spPr>
+        <p:style>
+          <a:lnRef idx="2">
+            <a:schemeClr val="accent1">
+              <a:shade val="50000"/>
+            </a:schemeClr>
+          </a:lnRef>
+          <a:fillRef idx="1">
+            <a:schemeClr val="accent1"/>
+          </a:fillRef>
+          <a:effectRef idx="0">
+            <a:schemeClr val="accent1"/>
+          </a:effectRef>
+          <a:fontRef idx="minor">
+            <a:schemeClr val="lt1"/>
+          </a:fontRef>
+        </p:style>
+        <p:txBody>
+          <a:bodyPr rtlCol="0" anchor="ctr"/>
+          <a:lstStyle/>
+          <a:p>
+            <a:pPr algn="ctr"/>
+            <a:endParaRPr kumimoji="1" lang="ja-JP" altLang="en-US"/>
+          </a:p>
+        </p:txBody>
+      </p:sp>
+      <p:sp>
+        <p:nvSpPr>
+          <p:cNvPr id="7" name="楕円 6">
+            <a:extLst>
+              <a:ext uri="{FF2B5EF4-FFF2-40B4-BE49-F238E27FC236}">
+                <a16:creationId xmlns:a16="http://schemas.microsoft.com/office/drawing/2014/main" id="{1276B494-8EF1-4645-B573-0838DF034EAB}"/>
+              </a:ext>
+            </a:extLst>
+          </p:cNvPr>
+          <p:cNvSpPr/>
+          <p:nvPr/>
+        </p:nvSpPr>
+        <p:spPr>
+          <a:xfrm>
+            <a:off x="2963426" y="5651372"/>
+            <a:ext cx="146303" cy="137159"/>
+          </a:xfrm>
+          <a:prstGeom prst="ellipse">
+            <a:avLst/>
+          </a:prstGeom>
+        </p:spPr>
+        <p:style>
+          <a:lnRef idx="2">
+            <a:schemeClr val="accent1">
+              <a:shade val="50000"/>
+            </a:schemeClr>
+          </a:lnRef>
+          <a:fillRef idx="1">
+            <a:schemeClr val="accent1"/>
+          </a:fillRef>
+          <a:effectRef idx="0">
+            <a:schemeClr val="accent1"/>
+          </a:effectRef>
+          <a:fontRef idx="minor">
+            <a:schemeClr val="lt1"/>
+          </a:fontRef>
+        </p:style>
+        <p:txBody>
+          <a:bodyPr rtlCol="0" anchor="ctr"/>
+          <a:lstStyle/>
+          <a:p>
+            <a:pPr algn="ctr"/>
+            <a:endParaRPr kumimoji="1" lang="ja-JP" altLang="en-US"/>
+          </a:p>
+        </p:txBody>
+      </p:sp>
+      <p:sp>
+        <p:nvSpPr>
+          <p:cNvPr id="8" name="楕円 7">
+            <a:extLst>
+              <a:ext uri="{FF2B5EF4-FFF2-40B4-BE49-F238E27FC236}">
+                <a16:creationId xmlns:a16="http://schemas.microsoft.com/office/drawing/2014/main" id="{B887D46A-52F5-4D81-9995-C12C4DD18C36}"/>
+              </a:ext>
+            </a:extLst>
+          </p:cNvPr>
+          <p:cNvSpPr/>
+          <p:nvPr/>
+        </p:nvSpPr>
+        <p:spPr>
+          <a:xfrm>
+            <a:off x="2705100" y="2265812"/>
+            <a:ext cx="146303" cy="137159"/>
+          </a:xfrm>
+          <a:prstGeom prst="ellipse">
+            <a:avLst/>
+          </a:prstGeom>
+        </p:spPr>
+        <p:style>
+          <a:lnRef idx="2">
+            <a:schemeClr val="accent1">
+              <a:shade val="50000"/>
+            </a:schemeClr>
+          </a:lnRef>
+          <a:fillRef idx="1">
+            <a:schemeClr val="accent1"/>
+          </a:fillRef>
+          <a:effectRef idx="0">
+            <a:schemeClr val="accent1"/>
+          </a:effectRef>
+          <a:fontRef idx="minor">
+            <a:schemeClr val="lt1"/>
+          </a:fontRef>
+        </p:style>
+        <p:txBody>
+          <a:bodyPr rtlCol="0" anchor="ctr"/>
+          <a:lstStyle/>
+          <a:p>
+            <a:pPr algn="ctr"/>
+            <a:endParaRPr kumimoji="1" lang="ja-JP" altLang="en-US"/>
+          </a:p>
+        </p:txBody>
+      </p:sp>
+      <p:sp>
+        <p:nvSpPr>
+          <p:cNvPr id="9" name="楕円 8">
+            <a:extLst>
+              <a:ext uri="{FF2B5EF4-FFF2-40B4-BE49-F238E27FC236}">
+                <a16:creationId xmlns:a16="http://schemas.microsoft.com/office/drawing/2014/main" id="{11D8B256-FCA6-420F-A37A-CB93A18C686F}"/>
+              </a:ext>
+            </a:extLst>
+          </p:cNvPr>
+          <p:cNvSpPr/>
+          <p:nvPr/>
+        </p:nvSpPr>
+        <p:spPr>
+          <a:xfrm>
+            <a:off x="4783077" y="2793505"/>
+            <a:ext cx="146303" cy="137159"/>
+          </a:xfrm>
+          <a:prstGeom prst="ellipse">
+            <a:avLst/>
+          </a:prstGeom>
+        </p:spPr>
+        <p:style>
+          <a:lnRef idx="2">
+            <a:schemeClr val="accent1">
+              <a:shade val="50000"/>
+            </a:schemeClr>
+          </a:lnRef>
+          <a:fillRef idx="1">
+            <a:schemeClr val="accent1"/>
+          </a:fillRef>
+          <a:effectRef idx="0">
+            <a:schemeClr val="accent1"/>
+          </a:effectRef>
+          <a:fontRef idx="minor">
+            <a:schemeClr val="lt1"/>
+          </a:fontRef>
+        </p:style>
+        <p:txBody>
+          <a:bodyPr rtlCol="0" anchor="ctr"/>
+          <a:lstStyle/>
+          <a:p>
+            <a:pPr algn="ctr"/>
+            <a:endParaRPr kumimoji="1" lang="ja-JP" altLang="en-US"/>
+          </a:p>
+        </p:txBody>
+      </p:sp>
+      <p:sp>
+        <p:nvSpPr>
+          <p:cNvPr id="10" name="楕円 9">
+            <a:extLst>
+              <a:ext uri="{FF2B5EF4-FFF2-40B4-BE49-F238E27FC236}">
+                <a16:creationId xmlns:a16="http://schemas.microsoft.com/office/drawing/2014/main" id="{4D213F70-2F9D-4F46-B6EC-A37973F7CBD5}"/>
+              </a:ext>
+            </a:extLst>
+          </p:cNvPr>
+          <p:cNvSpPr/>
+          <p:nvPr/>
+        </p:nvSpPr>
+        <p:spPr>
+          <a:xfrm>
+            <a:off x="4653537" y="4593333"/>
+            <a:ext cx="146303" cy="137159"/>
+          </a:xfrm>
+          <a:prstGeom prst="ellipse">
+            <a:avLst/>
+          </a:prstGeom>
+        </p:spPr>
+        <p:style>
+          <a:lnRef idx="2">
+            <a:schemeClr val="accent1">
+              <a:shade val="50000"/>
+            </a:schemeClr>
+          </a:lnRef>
+          <a:fillRef idx="1">
+            <a:schemeClr val="accent1"/>
+          </a:fillRef>
+          <a:effectRef idx="0">
+            <a:schemeClr val="accent1"/>
+          </a:effectRef>
+          <a:fontRef idx="minor">
+            <a:schemeClr val="lt1"/>
+          </a:fontRef>
+        </p:style>
+        <p:txBody>
+          <a:bodyPr rtlCol="0" anchor="ctr"/>
+          <a:lstStyle/>
+          <a:p>
+            <a:pPr algn="ctr"/>
+            <a:endParaRPr kumimoji="1" lang="ja-JP" altLang="en-US"/>
+          </a:p>
+        </p:txBody>
+      </p:sp>
+      <p:sp>
+        <p:nvSpPr>
+          <p:cNvPr id="11" name="楕円 10">
+            <a:extLst>
+              <a:ext uri="{FF2B5EF4-FFF2-40B4-BE49-F238E27FC236}">
+                <a16:creationId xmlns:a16="http://schemas.microsoft.com/office/drawing/2014/main" id="{CC3BC033-7AD4-46D2-B96B-E5DB4A7F7329}"/>
+              </a:ext>
+            </a:extLst>
+          </p:cNvPr>
+          <p:cNvSpPr/>
+          <p:nvPr/>
+        </p:nvSpPr>
+        <p:spPr>
+          <a:xfrm>
+            <a:off x="3019811" y="3127252"/>
+            <a:ext cx="146303" cy="137159"/>
+          </a:xfrm>
+          <a:prstGeom prst="ellipse">
+            <a:avLst/>
+          </a:prstGeom>
+        </p:spPr>
+        <p:style>
+          <a:lnRef idx="2">
+            <a:schemeClr val="accent1">
+              <a:shade val="50000"/>
+            </a:schemeClr>
+          </a:lnRef>
+          <a:fillRef idx="1">
+            <a:schemeClr val="accent1"/>
+          </a:fillRef>
+          <a:effectRef idx="0">
+            <a:schemeClr val="accent1"/>
+          </a:effectRef>
+          <a:fontRef idx="minor">
+            <a:schemeClr val="lt1"/>
+          </a:fontRef>
+        </p:style>
+        <p:txBody>
+          <a:bodyPr rtlCol="0" anchor="ctr"/>
+          <a:lstStyle/>
+          <a:p>
+            <a:pPr algn="ctr"/>
+            <a:endParaRPr kumimoji="1" lang="ja-JP" altLang="en-US"/>
+          </a:p>
+        </p:txBody>
+      </p:sp>
+      <p:sp>
+        <p:nvSpPr>
+          <p:cNvPr id="12" name="楕円 11">
+            <a:extLst>
+              <a:ext uri="{FF2B5EF4-FFF2-40B4-BE49-F238E27FC236}">
+                <a16:creationId xmlns:a16="http://schemas.microsoft.com/office/drawing/2014/main" id="{F4EC8B18-7BD3-4FAF-AF4F-AC242269E04F}"/>
+              </a:ext>
+            </a:extLst>
+          </p:cNvPr>
+          <p:cNvSpPr/>
+          <p:nvPr/>
+        </p:nvSpPr>
+        <p:spPr>
+          <a:xfrm>
+            <a:off x="3843529" y="5032249"/>
+            <a:ext cx="146303" cy="137159"/>
+          </a:xfrm>
+          <a:prstGeom prst="ellipse">
+            <a:avLst/>
+          </a:prstGeom>
+        </p:spPr>
+        <p:style>
+          <a:lnRef idx="2">
+            <a:schemeClr val="accent1">
+              <a:shade val="50000"/>
+            </a:schemeClr>
+          </a:lnRef>
+          <a:fillRef idx="1">
+            <a:schemeClr val="accent1"/>
+          </a:fillRef>
+          <a:effectRef idx="0">
+            <a:schemeClr val="accent1"/>
+          </a:effectRef>
+          <a:fontRef idx="minor">
+            <a:schemeClr val="lt1"/>
+          </a:fontRef>
+        </p:style>
+        <p:txBody>
+          <a:bodyPr rtlCol="0" anchor="ctr"/>
+          <a:lstStyle/>
+          <a:p>
+            <a:pPr algn="ctr"/>
+            <a:endParaRPr kumimoji="1" lang="ja-JP" altLang="en-US"/>
+          </a:p>
+        </p:txBody>
+      </p:sp>
+      <p:sp>
+        <p:nvSpPr>
+          <p:cNvPr id="13" name="楕円 12">
+            <a:extLst>
+              <a:ext uri="{FF2B5EF4-FFF2-40B4-BE49-F238E27FC236}">
+                <a16:creationId xmlns:a16="http://schemas.microsoft.com/office/drawing/2014/main" id="{5B769432-1C2D-435D-8972-7A04AFB36472}"/>
+              </a:ext>
+            </a:extLst>
+          </p:cNvPr>
+          <p:cNvSpPr/>
+          <p:nvPr/>
+        </p:nvSpPr>
+        <p:spPr>
+          <a:xfrm>
+            <a:off x="5465063" y="2107317"/>
+            <a:ext cx="146303" cy="137159"/>
+          </a:xfrm>
+          <a:prstGeom prst="ellipse">
+            <a:avLst/>
+          </a:prstGeom>
+        </p:spPr>
+        <p:style>
+          <a:lnRef idx="2">
+            <a:schemeClr val="accent1">
+              <a:shade val="50000"/>
+            </a:schemeClr>
+          </a:lnRef>
+          <a:fillRef idx="1">
+            <a:schemeClr val="accent1"/>
+          </a:fillRef>
+          <a:effectRef idx="0">
+            <a:schemeClr val="accent1"/>
+          </a:effectRef>
+          <a:fontRef idx="minor">
+            <a:schemeClr val="lt1"/>
+          </a:fontRef>
+        </p:style>
+        <p:txBody>
+          <a:bodyPr rtlCol="0" anchor="ctr"/>
+          <a:lstStyle/>
+          <a:p>
+            <a:pPr algn="ctr"/>
+            <a:endParaRPr kumimoji="1" lang="ja-JP" altLang="en-US"/>
+          </a:p>
+        </p:txBody>
+      </p:sp>
+      <p:sp>
+        <p:nvSpPr>
+          <p:cNvPr id="14" name="楕円 13">
+            <a:extLst>
+              <a:ext uri="{FF2B5EF4-FFF2-40B4-BE49-F238E27FC236}">
+                <a16:creationId xmlns:a16="http://schemas.microsoft.com/office/drawing/2014/main" id="{46E7785E-C40D-402E-A4E6-0A214E9E65C5}"/>
+              </a:ext>
+            </a:extLst>
+          </p:cNvPr>
+          <p:cNvSpPr/>
+          <p:nvPr/>
+        </p:nvSpPr>
+        <p:spPr>
+          <a:xfrm>
+            <a:off x="5321808" y="3904478"/>
+            <a:ext cx="146303" cy="137159"/>
+          </a:xfrm>
+          <a:prstGeom prst="ellipse">
+            <a:avLst/>
+          </a:prstGeom>
+        </p:spPr>
+        <p:style>
+          <a:lnRef idx="2">
+            <a:schemeClr val="accent1">
+              <a:shade val="50000"/>
+            </a:schemeClr>
+          </a:lnRef>
+          <a:fillRef idx="1">
+            <a:schemeClr val="accent1"/>
+          </a:fillRef>
+          <a:effectRef idx="0">
+            <a:schemeClr val="accent1"/>
+          </a:effectRef>
+          <a:fontRef idx="minor">
+            <a:schemeClr val="lt1"/>
+          </a:fontRef>
+        </p:style>
+        <p:txBody>
+          <a:bodyPr rtlCol="0" anchor="ctr"/>
+          <a:lstStyle/>
+          <a:p>
+            <a:pPr algn="ctr"/>
+            <a:endParaRPr kumimoji="1" lang="ja-JP" altLang="en-US"/>
+          </a:p>
+        </p:txBody>
+      </p:sp>
+      <p:sp>
+        <p:nvSpPr>
+          <p:cNvPr id="15" name="楕円 14">
+            <a:extLst>
+              <a:ext uri="{FF2B5EF4-FFF2-40B4-BE49-F238E27FC236}">
+                <a16:creationId xmlns:a16="http://schemas.microsoft.com/office/drawing/2014/main" id="{5EDC8A07-DC2F-49ED-8A3D-EB962195CA92}"/>
+              </a:ext>
+            </a:extLst>
+          </p:cNvPr>
+          <p:cNvSpPr/>
+          <p:nvPr/>
+        </p:nvSpPr>
+        <p:spPr>
+          <a:xfrm>
+            <a:off x="4268728" y="3342518"/>
+            <a:ext cx="146303" cy="137159"/>
+          </a:xfrm>
+          <a:prstGeom prst="ellipse">
+            <a:avLst/>
+          </a:prstGeom>
+        </p:spPr>
+        <p:style>
+          <a:lnRef idx="2">
+            <a:schemeClr val="accent1">
+              <a:shade val="50000"/>
+            </a:schemeClr>
+          </a:lnRef>
+          <a:fillRef idx="1">
+            <a:schemeClr val="accent1"/>
+          </a:fillRef>
+          <a:effectRef idx="0">
+            <a:schemeClr val="accent1"/>
+          </a:effectRef>
+          <a:fontRef idx="minor">
+            <a:schemeClr val="lt1"/>
+          </a:fontRef>
+        </p:style>
+        <p:txBody>
+          <a:bodyPr rtlCol="0" anchor="ctr"/>
+          <a:lstStyle/>
+          <a:p>
+            <a:pPr algn="ctr"/>
+            <a:endParaRPr kumimoji="1" lang="ja-JP" altLang="en-US"/>
+          </a:p>
+        </p:txBody>
+      </p:sp>
+      <p:sp>
+        <p:nvSpPr>
+          <p:cNvPr id="16" name="楕円 15">
+            <a:extLst>
+              <a:ext uri="{FF2B5EF4-FFF2-40B4-BE49-F238E27FC236}">
+                <a16:creationId xmlns:a16="http://schemas.microsoft.com/office/drawing/2014/main" id="{432EBCC8-B63E-416F-9E3B-B23423C1E5B3}"/>
+              </a:ext>
+            </a:extLst>
+          </p:cNvPr>
+          <p:cNvSpPr/>
+          <p:nvPr/>
+        </p:nvSpPr>
+        <p:spPr>
+          <a:xfrm>
+            <a:off x="4347210" y="2197232"/>
+            <a:ext cx="146303" cy="137159"/>
+          </a:xfrm>
+          <a:prstGeom prst="ellipse">
+            <a:avLst/>
+          </a:prstGeom>
+        </p:spPr>
+        <p:style>
+          <a:lnRef idx="2">
+            <a:schemeClr val="accent1">
+              <a:shade val="50000"/>
+            </a:schemeClr>
+          </a:lnRef>
+          <a:fillRef idx="1">
+            <a:schemeClr val="accent1"/>
+          </a:fillRef>
+          <a:effectRef idx="0">
+            <a:schemeClr val="accent1"/>
+          </a:effectRef>
+          <a:fontRef idx="minor">
+            <a:schemeClr val="lt1"/>
+          </a:fontRef>
+        </p:style>
+        <p:txBody>
+          <a:bodyPr rtlCol="0" anchor="ctr"/>
+          <a:lstStyle/>
+          <a:p>
+            <a:pPr algn="ctr"/>
+            <a:endParaRPr kumimoji="1" lang="ja-JP" altLang="en-US"/>
+          </a:p>
+        </p:txBody>
+      </p:sp>
+      <p:cxnSp>
+        <p:nvCxnSpPr>
+          <p:cNvPr id="19" name="直線コネクタ 18">
+            <a:extLst>
+              <a:ext uri="{FF2B5EF4-FFF2-40B4-BE49-F238E27FC236}">
+                <a16:creationId xmlns:a16="http://schemas.microsoft.com/office/drawing/2014/main" id="{AC89E924-9F7E-41B9-BA10-D864E0FC8D88}"/>
+              </a:ext>
+            </a:extLst>
+          </p:cNvPr>
+          <p:cNvCxnSpPr>
+            <a:cxnSpLocks/>
+          </p:cNvCxnSpPr>
+          <p:nvPr/>
+        </p:nvCxnSpPr>
+        <p:spPr>
+          <a:xfrm>
+            <a:off x="679705" y="765048"/>
+            <a:ext cx="73152" cy="5760720"/>
+          </a:xfrm>
+          <a:prstGeom prst="line">
+            <a:avLst/>
+          </a:prstGeom>
+        </p:spPr>
+        <p:style>
+          <a:lnRef idx="1">
+            <a:schemeClr val="accent1"/>
+          </a:lnRef>
+          <a:fillRef idx="0">
+            <a:schemeClr val="accent1"/>
+          </a:fillRef>
+          <a:effectRef idx="0">
+            <a:schemeClr val="accent1"/>
+          </a:effectRef>
+          <a:fontRef idx="minor">
+            <a:schemeClr val="tx1"/>
+          </a:fontRef>
+        </p:style>
+      </p:cxnSp>
+      <p:cxnSp>
+        <p:nvCxnSpPr>
+          <p:cNvPr id="23" name="直線コネクタ 22">
+            <a:extLst>
+              <a:ext uri="{FF2B5EF4-FFF2-40B4-BE49-F238E27FC236}">
+                <a16:creationId xmlns:a16="http://schemas.microsoft.com/office/drawing/2014/main" id="{9166B45F-7E97-400A-970F-69A1CEE729AE}"/>
+              </a:ext>
+            </a:extLst>
+          </p:cNvPr>
+          <p:cNvCxnSpPr>
+            <a:cxnSpLocks/>
+          </p:cNvCxnSpPr>
+          <p:nvPr/>
+        </p:nvCxnSpPr>
+        <p:spPr>
+          <a:xfrm>
+            <a:off x="11189208" y="765048"/>
+            <a:ext cx="73152" cy="5760720"/>
+          </a:xfrm>
+          <a:prstGeom prst="line">
+            <a:avLst/>
+          </a:prstGeom>
+        </p:spPr>
+        <p:style>
+          <a:lnRef idx="1">
+            <a:schemeClr val="accent1"/>
+          </a:lnRef>
+          <a:fillRef idx="0">
+            <a:schemeClr val="accent1"/>
+          </a:fillRef>
+          <a:effectRef idx="0">
+            <a:schemeClr val="accent1"/>
+          </a:effectRef>
+          <a:fontRef idx="minor">
+            <a:schemeClr val="tx1"/>
+          </a:fontRef>
+        </p:style>
+      </p:cxnSp>
+      <p:cxnSp>
+        <p:nvCxnSpPr>
+          <p:cNvPr id="24" name="直線コネクタ 23">
+            <a:extLst>
+              <a:ext uri="{FF2B5EF4-FFF2-40B4-BE49-F238E27FC236}">
+                <a16:creationId xmlns:a16="http://schemas.microsoft.com/office/drawing/2014/main" id="{A1312EE3-B9EB-45B8-9B57-AC2192580636}"/>
+              </a:ext>
+            </a:extLst>
+          </p:cNvPr>
+          <p:cNvCxnSpPr>
+            <a:cxnSpLocks/>
+          </p:cNvCxnSpPr>
+          <p:nvPr/>
+        </p:nvCxnSpPr>
+        <p:spPr>
+          <a:xfrm>
+            <a:off x="749809" y="6461760"/>
+            <a:ext cx="10512551" cy="0"/>
+          </a:xfrm>
+          <a:prstGeom prst="line">
+            <a:avLst/>
+          </a:prstGeom>
+        </p:spPr>
+        <p:style>
+          <a:lnRef idx="1">
+            <a:schemeClr val="accent1"/>
+          </a:lnRef>
+          <a:fillRef idx="0">
+            <a:schemeClr val="accent1"/>
+          </a:fillRef>
+          <a:effectRef idx="0">
+            <a:schemeClr val="accent1"/>
+          </a:effectRef>
+          <a:fontRef idx="minor">
+            <a:schemeClr val="tx1"/>
+          </a:fontRef>
+        </p:style>
+      </p:cxnSp>
+      <p:cxnSp>
+        <p:nvCxnSpPr>
+          <p:cNvPr id="28" name="直線コネクタ 27">
+            <a:extLst>
+              <a:ext uri="{FF2B5EF4-FFF2-40B4-BE49-F238E27FC236}">
+                <a16:creationId xmlns:a16="http://schemas.microsoft.com/office/drawing/2014/main" id="{E2414651-7F75-4D84-B1E4-E27682E58B7C}"/>
+              </a:ext>
+            </a:extLst>
+          </p:cNvPr>
+          <p:cNvCxnSpPr>
+            <a:cxnSpLocks/>
+          </p:cNvCxnSpPr>
+          <p:nvPr/>
+        </p:nvCxnSpPr>
+        <p:spPr>
+          <a:xfrm>
+            <a:off x="716281" y="765048"/>
+            <a:ext cx="10512551" cy="0"/>
+          </a:xfrm>
+          <a:prstGeom prst="line">
+            <a:avLst/>
+          </a:prstGeom>
+        </p:spPr>
+        <p:style>
+          <a:lnRef idx="1">
+            <a:schemeClr val="accent1"/>
+          </a:lnRef>
+          <a:fillRef idx="0">
+            <a:schemeClr val="accent1"/>
+          </a:fillRef>
+          <a:effectRef idx="0">
+            <a:schemeClr val="accent1"/>
+          </a:effectRef>
+          <a:fontRef idx="minor">
+            <a:schemeClr val="tx1"/>
+          </a:fontRef>
+        </p:style>
+      </p:cxnSp>
+      <p:sp>
+        <p:nvSpPr>
+          <p:cNvPr id="29" name="正方形/長方形 28">
+            <a:extLst>
+              <a:ext uri="{FF2B5EF4-FFF2-40B4-BE49-F238E27FC236}">
+                <a16:creationId xmlns:a16="http://schemas.microsoft.com/office/drawing/2014/main" id="{BBA72A92-9735-4E30-A84C-A21F8EE0712B}"/>
+              </a:ext>
+            </a:extLst>
+          </p:cNvPr>
+          <p:cNvSpPr/>
+          <p:nvPr/>
+        </p:nvSpPr>
+        <p:spPr>
+          <a:xfrm>
+            <a:off x="696088" y="765047"/>
+            <a:ext cx="1505711" cy="1185427"/>
+          </a:xfrm>
+          <a:prstGeom prst="rect">
+            <a:avLst/>
+          </a:prstGeom>
+        </p:spPr>
+        <p:style>
+          <a:lnRef idx="2">
+            <a:schemeClr val="accent1">
+              <a:shade val="50000"/>
+            </a:schemeClr>
+          </a:lnRef>
+          <a:fillRef idx="1">
+            <a:schemeClr val="accent1"/>
+          </a:fillRef>
+          <a:effectRef idx="0">
+            <a:schemeClr val="accent1"/>
+          </a:effectRef>
+          <a:fontRef idx="minor">
+            <a:schemeClr val="lt1"/>
+          </a:fontRef>
+        </p:style>
+        <p:txBody>
+          <a:bodyPr rtlCol="0" anchor="ctr"/>
+          <a:lstStyle/>
+          <a:p>
+            <a:pPr algn="ctr"/>
             <a:r>
               <a:rPr kumimoji="1" lang="ja-JP" altLang="en-US" dirty="0"/>
-              <a:t>雨粒をどうする　お題を簡単にするより</a:t>
+              <a:t>お題</a:t>
             </a:r>
             <a:endParaRPr kumimoji="1" lang="en-US" altLang="ja-JP" dirty="0"/>
           </a:p>
@@ -6181,36 +7670,1011 @@
             <a:pPr algn="ctr"/>
             <a:r>
               <a:rPr lang="ja-JP" altLang="en-US" dirty="0"/>
-              <a:t>もともとのシステムを見ろ</a:t>
+              <a:t>をここに</a:t>
             </a:r>
             <a:endParaRPr lang="en-US" altLang="ja-JP" dirty="0"/>
           </a:p>
           <a:p>
             <a:pPr algn="ctr"/>
             <a:r>
+              <a:rPr lang="ja-JP" altLang="en-US" dirty="0"/>
+              <a:t>表示</a:t>
+            </a:r>
+            <a:endParaRPr kumimoji="1" lang="ja-JP" altLang="en-US" dirty="0"/>
+          </a:p>
+        </p:txBody>
+      </p:sp>
+      <p:sp>
+        <p:nvSpPr>
+          <p:cNvPr id="30" name="正方形/長方形 29">
+            <a:extLst>
+              <a:ext uri="{FF2B5EF4-FFF2-40B4-BE49-F238E27FC236}">
+                <a16:creationId xmlns:a16="http://schemas.microsoft.com/office/drawing/2014/main" id="{BB3F4799-2310-4452-96E6-CB79CCE99F18}"/>
+              </a:ext>
+            </a:extLst>
+          </p:cNvPr>
+          <p:cNvSpPr/>
+          <p:nvPr/>
+        </p:nvSpPr>
+        <p:spPr>
+          <a:xfrm>
+            <a:off x="2225612" y="811855"/>
+            <a:ext cx="7543039" cy="907211"/>
+          </a:xfrm>
+          <a:prstGeom prst="rect">
+            <a:avLst/>
+          </a:prstGeom>
+        </p:spPr>
+        <p:style>
+          <a:lnRef idx="2">
+            <a:schemeClr val="accent1">
+              <a:shade val="50000"/>
+            </a:schemeClr>
+          </a:lnRef>
+          <a:fillRef idx="1">
+            <a:schemeClr val="accent1"/>
+          </a:fillRef>
+          <a:effectRef idx="0">
+            <a:schemeClr val="accent1"/>
+          </a:effectRef>
+          <a:fontRef idx="minor">
+            <a:schemeClr val="lt1"/>
+          </a:fontRef>
+        </p:style>
+        <p:txBody>
+          <a:bodyPr rtlCol="0" anchor="ctr"/>
+          <a:lstStyle/>
+          <a:p>
+            <a:pPr algn="ctr"/>
+            <a:r>
               <a:rPr kumimoji="1" lang="ja-JP" altLang="en-US" dirty="0"/>
-              <a:t>　</a:t>
+              <a:t>タイマー</a:t>
+            </a:r>
+          </a:p>
+        </p:txBody>
+      </p:sp>
+      <p:sp>
+        <p:nvSpPr>
+          <p:cNvPr id="31" name="正方形/長方形 30">
+            <a:extLst>
+              <a:ext uri="{FF2B5EF4-FFF2-40B4-BE49-F238E27FC236}">
+                <a16:creationId xmlns:a16="http://schemas.microsoft.com/office/drawing/2014/main" id="{24615237-2BC6-419A-A5F1-BE6B0F05DD15}"/>
+              </a:ext>
+            </a:extLst>
+          </p:cNvPr>
+          <p:cNvSpPr/>
+          <p:nvPr/>
+        </p:nvSpPr>
+        <p:spPr>
+          <a:xfrm>
+            <a:off x="2191894" y="1407523"/>
+            <a:ext cx="490728" cy="5002534"/>
+          </a:xfrm>
+          <a:prstGeom prst="rect">
+            <a:avLst/>
+          </a:prstGeom>
+        </p:spPr>
+        <p:style>
+          <a:lnRef idx="2">
+            <a:schemeClr val="dk1">
+              <a:shade val="50000"/>
+            </a:schemeClr>
+          </a:lnRef>
+          <a:fillRef idx="1">
+            <a:schemeClr val="dk1"/>
+          </a:fillRef>
+          <a:effectRef idx="0">
+            <a:schemeClr val="dk1"/>
+          </a:effectRef>
+          <a:fontRef idx="minor">
+            <a:schemeClr val="lt1"/>
+          </a:fontRef>
+        </p:style>
+        <p:txBody>
+          <a:bodyPr rtlCol="0" anchor="ctr"/>
+          <a:lstStyle/>
+          <a:p>
+            <a:pPr algn="ctr"/>
+            <a:endParaRPr kumimoji="1" lang="ja-JP" altLang="en-US"/>
+          </a:p>
+        </p:txBody>
+      </p:sp>
+      <p:sp>
+        <p:nvSpPr>
+          <p:cNvPr id="32" name="正方形/長方形 31">
+            <a:extLst>
+              <a:ext uri="{FF2B5EF4-FFF2-40B4-BE49-F238E27FC236}">
+                <a16:creationId xmlns:a16="http://schemas.microsoft.com/office/drawing/2014/main" id="{A744D7B0-C499-4C30-B5E0-DBB63874843F}"/>
+              </a:ext>
+            </a:extLst>
+          </p:cNvPr>
+          <p:cNvSpPr/>
+          <p:nvPr/>
+        </p:nvSpPr>
+        <p:spPr>
+          <a:xfrm>
+            <a:off x="9270875" y="1510276"/>
+            <a:ext cx="469391" cy="5015491"/>
+          </a:xfrm>
+          <a:prstGeom prst="rect">
+            <a:avLst/>
+          </a:prstGeom>
+        </p:spPr>
+        <p:style>
+          <a:lnRef idx="2">
+            <a:schemeClr val="dk1">
+              <a:shade val="50000"/>
+            </a:schemeClr>
+          </a:lnRef>
+          <a:fillRef idx="1">
+            <a:schemeClr val="dk1"/>
+          </a:fillRef>
+          <a:effectRef idx="0">
+            <a:schemeClr val="dk1"/>
+          </a:effectRef>
+          <a:fontRef idx="minor">
+            <a:schemeClr val="lt1"/>
+          </a:fontRef>
+        </p:style>
+        <p:txBody>
+          <a:bodyPr rtlCol="0" anchor="ctr"/>
+          <a:lstStyle/>
+          <a:p>
+            <a:pPr algn="ctr"/>
+            <a:endParaRPr kumimoji="1" lang="ja-JP" altLang="en-US"/>
+          </a:p>
+        </p:txBody>
+      </p:sp>
+      <p:sp>
+        <p:nvSpPr>
+          <p:cNvPr id="33" name="正方形/長方形 32">
+            <a:extLst>
+              <a:ext uri="{FF2B5EF4-FFF2-40B4-BE49-F238E27FC236}">
+                <a16:creationId xmlns:a16="http://schemas.microsoft.com/office/drawing/2014/main" id="{73E9A9B1-9043-4A93-8094-6D23E06F18AA}"/>
+              </a:ext>
+            </a:extLst>
+          </p:cNvPr>
+          <p:cNvSpPr/>
+          <p:nvPr/>
+        </p:nvSpPr>
+        <p:spPr>
+          <a:xfrm rot="5400000">
+            <a:off x="5660895" y="2544894"/>
+            <a:ext cx="469391" cy="7565138"/>
+          </a:xfrm>
+          <a:prstGeom prst="rect">
+            <a:avLst/>
+          </a:prstGeom>
+        </p:spPr>
+        <p:style>
+          <a:lnRef idx="2">
+            <a:schemeClr val="dk1">
+              <a:shade val="50000"/>
+            </a:schemeClr>
+          </a:lnRef>
+          <a:fillRef idx="1">
+            <a:schemeClr val="dk1"/>
+          </a:fillRef>
+          <a:effectRef idx="0">
+            <a:schemeClr val="dk1"/>
+          </a:effectRef>
+          <a:fontRef idx="minor">
+            <a:schemeClr val="lt1"/>
+          </a:fontRef>
+        </p:style>
+        <p:txBody>
+          <a:bodyPr rtlCol="0" anchor="ctr"/>
+          <a:lstStyle/>
+          <a:p>
+            <a:pPr algn="ctr"/>
+            <a:endParaRPr kumimoji="1" lang="ja-JP" altLang="en-US"/>
+          </a:p>
+        </p:txBody>
+      </p:sp>
+      <p:sp>
+        <p:nvSpPr>
+          <p:cNvPr id="34" name="正方形/長方形 33">
+            <a:extLst>
+              <a:ext uri="{FF2B5EF4-FFF2-40B4-BE49-F238E27FC236}">
+                <a16:creationId xmlns:a16="http://schemas.microsoft.com/office/drawing/2014/main" id="{D8894E93-F099-4FA9-B80C-C537672E01AF}"/>
+              </a:ext>
+            </a:extLst>
+          </p:cNvPr>
+          <p:cNvSpPr/>
+          <p:nvPr/>
+        </p:nvSpPr>
+        <p:spPr>
+          <a:xfrm rot="5400000">
+            <a:off x="5740147" y="-2189269"/>
+            <a:ext cx="469391" cy="7565138"/>
+          </a:xfrm>
+          <a:prstGeom prst="rect">
+            <a:avLst/>
+          </a:prstGeom>
+        </p:spPr>
+        <p:style>
+          <a:lnRef idx="2">
+            <a:schemeClr val="dk1">
+              <a:shade val="50000"/>
+            </a:schemeClr>
+          </a:lnRef>
+          <a:fillRef idx="1">
+            <a:schemeClr val="dk1"/>
+          </a:fillRef>
+          <a:effectRef idx="0">
+            <a:schemeClr val="dk1"/>
+          </a:effectRef>
+          <a:fontRef idx="minor">
+            <a:schemeClr val="lt1"/>
+          </a:fontRef>
+        </p:style>
+        <p:txBody>
+          <a:bodyPr rtlCol="0" anchor="ctr"/>
+          <a:lstStyle/>
+          <a:p>
+            <a:pPr algn="ctr"/>
+            <a:endParaRPr kumimoji="1" lang="ja-JP" altLang="en-US"/>
+          </a:p>
+        </p:txBody>
+      </p:sp>
+      <p:sp>
+        <p:nvSpPr>
+          <p:cNvPr id="36" name="正方形/長方形 35">
+            <a:extLst>
+              <a:ext uri="{FF2B5EF4-FFF2-40B4-BE49-F238E27FC236}">
+                <a16:creationId xmlns:a16="http://schemas.microsoft.com/office/drawing/2014/main" id="{8B149464-931B-474D-91C3-259DE66DE1CE}"/>
+              </a:ext>
+            </a:extLst>
+          </p:cNvPr>
+          <p:cNvSpPr/>
+          <p:nvPr/>
+        </p:nvSpPr>
+        <p:spPr>
+          <a:xfrm>
+            <a:off x="716281" y="1919690"/>
+            <a:ext cx="1505711" cy="1519758"/>
+          </a:xfrm>
+          <a:prstGeom prst="rect">
+            <a:avLst/>
+          </a:prstGeom>
+        </p:spPr>
+        <p:style>
+          <a:lnRef idx="2">
+            <a:schemeClr val="accent1">
+              <a:shade val="50000"/>
+            </a:schemeClr>
+          </a:lnRef>
+          <a:fillRef idx="1">
+            <a:schemeClr val="accent1"/>
+          </a:fillRef>
+          <a:effectRef idx="0">
+            <a:schemeClr val="accent1"/>
+          </a:effectRef>
+          <a:fontRef idx="minor">
+            <a:schemeClr val="lt1"/>
+          </a:fontRef>
+        </p:style>
+        <p:txBody>
+          <a:bodyPr rtlCol="0" anchor="ctr"/>
+          <a:lstStyle/>
+          <a:p>
+            <a:pPr algn="ctr"/>
+            <a:r>
+              <a:rPr kumimoji="1" lang="ja-JP" altLang="en-US" dirty="0"/>
+              <a:t>アイテム</a:t>
             </a:r>
             <a:endParaRPr kumimoji="1" lang="en-US" altLang="ja-JP" dirty="0"/>
           </a:p>
+        </p:txBody>
+      </p:sp>
+      <p:sp>
+        <p:nvSpPr>
+          <p:cNvPr id="37" name="楕円 36">
+            <a:extLst>
+              <a:ext uri="{FF2B5EF4-FFF2-40B4-BE49-F238E27FC236}">
+                <a16:creationId xmlns:a16="http://schemas.microsoft.com/office/drawing/2014/main" id="{09F9DEB2-FC63-48B0-81C3-D8F94E48120D}"/>
+              </a:ext>
+            </a:extLst>
+          </p:cNvPr>
+          <p:cNvSpPr/>
+          <p:nvPr/>
+        </p:nvSpPr>
+        <p:spPr>
+          <a:xfrm>
+            <a:off x="8803381" y="4426446"/>
+            <a:ext cx="146303" cy="137159"/>
+          </a:xfrm>
+          <a:prstGeom prst="ellipse">
+            <a:avLst/>
+          </a:prstGeom>
+        </p:spPr>
+        <p:style>
+          <a:lnRef idx="2">
+            <a:schemeClr val="accent1">
+              <a:shade val="50000"/>
+            </a:schemeClr>
+          </a:lnRef>
+          <a:fillRef idx="1">
+            <a:schemeClr val="accent1"/>
+          </a:fillRef>
+          <a:effectRef idx="0">
+            <a:schemeClr val="accent1"/>
+          </a:effectRef>
+          <a:fontRef idx="minor">
+            <a:schemeClr val="lt1"/>
+          </a:fontRef>
+        </p:style>
+        <p:txBody>
+          <a:bodyPr rtlCol="0" anchor="ctr"/>
+          <a:lstStyle/>
           <a:p>
             <a:pPr algn="ctr"/>
-            <a:r>
-              <a:rPr lang="ja-JP" altLang="en-US" dirty="0"/>
-              <a:t>頭で自分のゲームをプレイしてみろ</a:t>
-            </a:r>
-            <a:endParaRPr lang="en-US" altLang="ja-JP" dirty="0"/>
-          </a:p>
+            <a:endParaRPr kumimoji="1" lang="ja-JP" altLang="en-US"/>
+          </a:p>
+        </p:txBody>
+      </p:sp>
+      <p:sp>
+        <p:nvSpPr>
+          <p:cNvPr id="38" name="楕円 37">
+            <a:extLst>
+              <a:ext uri="{FF2B5EF4-FFF2-40B4-BE49-F238E27FC236}">
+                <a16:creationId xmlns:a16="http://schemas.microsoft.com/office/drawing/2014/main" id="{D3D3B249-ADBE-422C-B027-68D10BBC6FCE}"/>
+              </a:ext>
+            </a:extLst>
+          </p:cNvPr>
+          <p:cNvSpPr/>
+          <p:nvPr/>
+        </p:nvSpPr>
+        <p:spPr>
+          <a:xfrm>
+            <a:off x="8297420" y="3207832"/>
+            <a:ext cx="146303" cy="137159"/>
+          </a:xfrm>
+          <a:prstGeom prst="ellipse">
+            <a:avLst/>
+          </a:prstGeom>
+        </p:spPr>
+        <p:style>
+          <a:lnRef idx="2">
+            <a:schemeClr val="accent1">
+              <a:shade val="50000"/>
+            </a:schemeClr>
+          </a:lnRef>
+          <a:fillRef idx="1">
+            <a:schemeClr val="accent1"/>
+          </a:fillRef>
+          <a:effectRef idx="0">
+            <a:schemeClr val="accent1"/>
+          </a:effectRef>
+          <a:fontRef idx="minor">
+            <a:schemeClr val="lt1"/>
+          </a:fontRef>
+        </p:style>
+        <p:txBody>
+          <a:bodyPr rtlCol="0" anchor="ctr"/>
+          <a:lstStyle/>
           <a:p>
             <a:pPr algn="ctr"/>
-            <a:endParaRPr kumimoji="1" lang="ja-JP" altLang="en-US" dirty="0"/>
+            <a:endParaRPr kumimoji="1" lang="ja-JP" altLang="en-US"/>
+          </a:p>
+        </p:txBody>
+      </p:sp>
+      <p:sp>
+        <p:nvSpPr>
+          <p:cNvPr id="39" name="楕円 38">
+            <a:extLst>
+              <a:ext uri="{FF2B5EF4-FFF2-40B4-BE49-F238E27FC236}">
+                <a16:creationId xmlns:a16="http://schemas.microsoft.com/office/drawing/2014/main" id="{EB032937-15FA-41CF-8750-D2D3A36655C7}"/>
+              </a:ext>
+            </a:extLst>
+          </p:cNvPr>
+          <p:cNvSpPr/>
+          <p:nvPr/>
+        </p:nvSpPr>
+        <p:spPr>
+          <a:xfrm>
+            <a:off x="8763000" y="5655753"/>
+            <a:ext cx="146303" cy="137159"/>
+          </a:xfrm>
+          <a:prstGeom prst="ellipse">
+            <a:avLst/>
+          </a:prstGeom>
+        </p:spPr>
+        <p:style>
+          <a:lnRef idx="2">
+            <a:schemeClr val="accent1">
+              <a:shade val="50000"/>
+            </a:schemeClr>
+          </a:lnRef>
+          <a:fillRef idx="1">
+            <a:schemeClr val="accent1"/>
+          </a:fillRef>
+          <a:effectRef idx="0">
+            <a:schemeClr val="accent1"/>
+          </a:effectRef>
+          <a:fontRef idx="minor">
+            <a:schemeClr val="lt1"/>
+          </a:fontRef>
+        </p:style>
+        <p:txBody>
+          <a:bodyPr rtlCol="0" anchor="ctr"/>
+          <a:lstStyle/>
+          <a:p>
+            <a:pPr algn="ctr"/>
+            <a:endParaRPr kumimoji="1" lang="ja-JP" altLang="en-US"/>
+          </a:p>
+        </p:txBody>
+      </p:sp>
+      <p:sp>
+        <p:nvSpPr>
+          <p:cNvPr id="40" name="楕円 39">
+            <a:extLst>
+              <a:ext uri="{FF2B5EF4-FFF2-40B4-BE49-F238E27FC236}">
+                <a16:creationId xmlns:a16="http://schemas.microsoft.com/office/drawing/2014/main" id="{18EFA471-7F47-4712-B4E7-F9DCA0018244}"/>
+              </a:ext>
+            </a:extLst>
+          </p:cNvPr>
+          <p:cNvSpPr/>
+          <p:nvPr/>
+        </p:nvSpPr>
+        <p:spPr>
+          <a:xfrm>
+            <a:off x="8730230" y="2393071"/>
+            <a:ext cx="146303" cy="137159"/>
+          </a:xfrm>
+          <a:prstGeom prst="ellipse">
+            <a:avLst/>
+          </a:prstGeom>
+        </p:spPr>
+        <p:style>
+          <a:lnRef idx="2">
+            <a:schemeClr val="accent1">
+              <a:shade val="50000"/>
+            </a:schemeClr>
+          </a:lnRef>
+          <a:fillRef idx="1">
+            <a:schemeClr val="accent1"/>
+          </a:fillRef>
+          <a:effectRef idx="0">
+            <a:schemeClr val="accent1"/>
+          </a:effectRef>
+          <a:fontRef idx="minor">
+            <a:schemeClr val="lt1"/>
+          </a:fontRef>
+        </p:style>
+        <p:txBody>
+          <a:bodyPr rtlCol="0" anchor="ctr"/>
+          <a:lstStyle/>
+          <a:p>
+            <a:pPr algn="ctr"/>
+            <a:endParaRPr kumimoji="1" lang="ja-JP" altLang="en-US"/>
+          </a:p>
+        </p:txBody>
+      </p:sp>
+      <p:sp>
+        <p:nvSpPr>
+          <p:cNvPr id="41" name="楕円 40">
+            <a:extLst>
+              <a:ext uri="{FF2B5EF4-FFF2-40B4-BE49-F238E27FC236}">
+                <a16:creationId xmlns:a16="http://schemas.microsoft.com/office/drawing/2014/main" id="{27B5AF6A-B720-4A15-BD96-3B2AB1BFA765}"/>
+              </a:ext>
+            </a:extLst>
+          </p:cNvPr>
+          <p:cNvSpPr/>
+          <p:nvPr/>
+        </p:nvSpPr>
+        <p:spPr>
+          <a:xfrm>
+            <a:off x="6195058" y="3158473"/>
+            <a:ext cx="146303" cy="137159"/>
+          </a:xfrm>
+          <a:prstGeom prst="ellipse">
+            <a:avLst/>
+          </a:prstGeom>
+        </p:spPr>
+        <p:style>
+          <a:lnRef idx="2">
+            <a:schemeClr val="accent1">
+              <a:shade val="50000"/>
+            </a:schemeClr>
+          </a:lnRef>
+          <a:fillRef idx="1">
+            <a:schemeClr val="accent1"/>
+          </a:fillRef>
+          <a:effectRef idx="0">
+            <a:schemeClr val="accent1"/>
+          </a:effectRef>
+          <a:fontRef idx="minor">
+            <a:schemeClr val="lt1"/>
+          </a:fontRef>
+        </p:style>
+        <p:txBody>
+          <a:bodyPr rtlCol="0" anchor="ctr"/>
+          <a:lstStyle/>
+          <a:p>
+            <a:pPr algn="ctr"/>
+            <a:endParaRPr kumimoji="1" lang="ja-JP" altLang="en-US"/>
+          </a:p>
+        </p:txBody>
+      </p:sp>
+      <p:sp>
+        <p:nvSpPr>
+          <p:cNvPr id="42" name="楕円 41">
+            <a:extLst>
+              <a:ext uri="{FF2B5EF4-FFF2-40B4-BE49-F238E27FC236}">
+                <a16:creationId xmlns:a16="http://schemas.microsoft.com/office/drawing/2014/main" id="{28866596-4847-4AAB-A3D3-97168D8FBAAA}"/>
+              </a:ext>
+            </a:extLst>
+          </p:cNvPr>
+          <p:cNvSpPr/>
+          <p:nvPr/>
+        </p:nvSpPr>
+        <p:spPr>
+          <a:xfrm>
+            <a:off x="7283190" y="3391849"/>
+            <a:ext cx="146303" cy="137159"/>
+          </a:xfrm>
+          <a:prstGeom prst="ellipse">
+            <a:avLst/>
+          </a:prstGeom>
+        </p:spPr>
+        <p:style>
+          <a:lnRef idx="2">
+            <a:schemeClr val="accent1">
+              <a:shade val="50000"/>
+            </a:schemeClr>
+          </a:lnRef>
+          <a:fillRef idx="1">
+            <a:schemeClr val="accent1"/>
+          </a:fillRef>
+          <a:effectRef idx="0">
+            <a:schemeClr val="accent1"/>
+          </a:effectRef>
+          <a:fontRef idx="minor">
+            <a:schemeClr val="lt1"/>
+          </a:fontRef>
+        </p:style>
+        <p:txBody>
+          <a:bodyPr rtlCol="0" anchor="ctr"/>
+          <a:lstStyle/>
+          <a:p>
+            <a:pPr algn="ctr"/>
+            <a:endParaRPr kumimoji="1" lang="ja-JP" altLang="en-US"/>
+          </a:p>
+        </p:txBody>
+      </p:sp>
+      <p:sp>
+        <p:nvSpPr>
+          <p:cNvPr id="43" name="楕円 42">
+            <a:extLst>
+              <a:ext uri="{FF2B5EF4-FFF2-40B4-BE49-F238E27FC236}">
+                <a16:creationId xmlns:a16="http://schemas.microsoft.com/office/drawing/2014/main" id="{DA648A99-006F-4AE3-826A-44E96410B1D6}"/>
+              </a:ext>
+            </a:extLst>
+          </p:cNvPr>
+          <p:cNvSpPr/>
+          <p:nvPr/>
+        </p:nvSpPr>
+        <p:spPr>
+          <a:xfrm>
+            <a:off x="7433312" y="2347519"/>
+            <a:ext cx="146303" cy="137159"/>
+          </a:xfrm>
+          <a:prstGeom prst="ellipse">
+            <a:avLst/>
+          </a:prstGeom>
+        </p:spPr>
+        <p:style>
+          <a:lnRef idx="2">
+            <a:schemeClr val="accent1">
+              <a:shade val="50000"/>
+            </a:schemeClr>
+          </a:lnRef>
+          <a:fillRef idx="1">
+            <a:schemeClr val="accent1"/>
+          </a:fillRef>
+          <a:effectRef idx="0">
+            <a:schemeClr val="accent1"/>
+          </a:effectRef>
+          <a:fontRef idx="minor">
+            <a:schemeClr val="lt1"/>
+          </a:fontRef>
+        </p:style>
+        <p:txBody>
+          <a:bodyPr rtlCol="0" anchor="ctr"/>
+          <a:lstStyle/>
+          <a:p>
+            <a:pPr algn="ctr"/>
+            <a:endParaRPr kumimoji="1" lang="ja-JP" altLang="en-US"/>
+          </a:p>
+        </p:txBody>
+      </p:sp>
+      <p:sp>
+        <p:nvSpPr>
+          <p:cNvPr id="44" name="楕円 43">
+            <a:extLst>
+              <a:ext uri="{FF2B5EF4-FFF2-40B4-BE49-F238E27FC236}">
+                <a16:creationId xmlns:a16="http://schemas.microsoft.com/office/drawing/2014/main" id="{79338979-1CA2-428B-87CA-C244969483C4}"/>
+              </a:ext>
+            </a:extLst>
+          </p:cNvPr>
+          <p:cNvSpPr/>
+          <p:nvPr/>
+        </p:nvSpPr>
+        <p:spPr>
+          <a:xfrm>
+            <a:off x="6254500" y="4370071"/>
+            <a:ext cx="146303" cy="137159"/>
+          </a:xfrm>
+          <a:prstGeom prst="ellipse">
+            <a:avLst/>
+          </a:prstGeom>
+        </p:spPr>
+        <p:style>
+          <a:lnRef idx="2">
+            <a:schemeClr val="accent1">
+              <a:shade val="50000"/>
+            </a:schemeClr>
+          </a:lnRef>
+          <a:fillRef idx="1">
+            <a:schemeClr val="accent1"/>
+          </a:fillRef>
+          <a:effectRef idx="0">
+            <a:schemeClr val="accent1"/>
+          </a:effectRef>
+          <a:fontRef idx="minor">
+            <a:schemeClr val="lt1"/>
+          </a:fontRef>
+        </p:style>
+        <p:txBody>
+          <a:bodyPr rtlCol="0" anchor="ctr"/>
+          <a:lstStyle/>
+          <a:p>
+            <a:pPr algn="ctr"/>
+            <a:endParaRPr kumimoji="1" lang="ja-JP" altLang="en-US"/>
+          </a:p>
+        </p:txBody>
+      </p:sp>
+      <p:sp>
+        <p:nvSpPr>
+          <p:cNvPr id="45" name="楕円 44">
+            <a:extLst>
+              <a:ext uri="{FF2B5EF4-FFF2-40B4-BE49-F238E27FC236}">
+                <a16:creationId xmlns:a16="http://schemas.microsoft.com/office/drawing/2014/main" id="{961FDBE3-C004-40EC-9C48-8FC3D133FB0D}"/>
+              </a:ext>
+            </a:extLst>
+          </p:cNvPr>
+          <p:cNvSpPr/>
+          <p:nvPr/>
+        </p:nvSpPr>
+        <p:spPr>
+          <a:xfrm>
+            <a:off x="7043161" y="5792912"/>
+            <a:ext cx="146303" cy="137159"/>
+          </a:xfrm>
+          <a:prstGeom prst="ellipse">
+            <a:avLst/>
+          </a:prstGeom>
+        </p:spPr>
+        <p:style>
+          <a:lnRef idx="2">
+            <a:schemeClr val="accent1">
+              <a:shade val="50000"/>
+            </a:schemeClr>
+          </a:lnRef>
+          <a:fillRef idx="1">
+            <a:schemeClr val="accent1"/>
+          </a:fillRef>
+          <a:effectRef idx="0">
+            <a:schemeClr val="accent1"/>
+          </a:effectRef>
+          <a:fontRef idx="minor">
+            <a:schemeClr val="lt1"/>
+          </a:fontRef>
+        </p:style>
+        <p:txBody>
+          <a:bodyPr rtlCol="0" anchor="ctr"/>
+          <a:lstStyle/>
+          <a:p>
+            <a:pPr algn="ctr"/>
+            <a:endParaRPr kumimoji="1" lang="ja-JP" altLang="en-US"/>
+          </a:p>
+        </p:txBody>
+      </p:sp>
+      <p:sp>
+        <p:nvSpPr>
+          <p:cNvPr id="46" name="楕円 45">
+            <a:extLst>
+              <a:ext uri="{FF2B5EF4-FFF2-40B4-BE49-F238E27FC236}">
+                <a16:creationId xmlns:a16="http://schemas.microsoft.com/office/drawing/2014/main" id="{DE90BADF-4B06-44E9-BA54-FBC5F847C721}"/>
+              </a:ext>
+            </a:extLst>
+          </p:cNvPr>
+          <p:cNvSpPr/>
+          <p:nvPr/>
+        </p:nvSpPr>
+        <p:spPr>
+          <a:xfrm>
+            <a:off x="8106540" y="5050900"/>
+            <a:ext cx="146303" cy="137159"/>
+          </a:xfrm>
+          <a:prstGeom prst="ellipse">
+            <a:avLst/>
+          </a:prstGeom>
+        </p:spPr>
+        <p:style>
+          <a:lnRef idx="2">
+            <a:schemeClr val="accent1">
+              <a:shade val="50000"/>
+            </a:schemeClr>
+          </a:lnRef>
+          <a:fillRef idx="1">
+            <a:schemeClr val="accent1"/>
+          </a:fillRef>
+          <a:effectRef idx="0">
+            <a:schemeClr val="accent1"/>
+          </a:effectRef>
+          <a:fontRef idx="minor">
+            <a:schemeClr val="lt1"/>
+          </a:fontRef>
+        </p:style>
+        <p:txBody>
+          <a:bodyPr rtlCol="0" anchor="ctr"/>
+          <a:lstStyle/>
+          <a:p>
+            <a:pPr algn="ctr"/>
+            <a:endParaRPr kumimoji="1" lang="ja-JP" altLang="en-US"/>
+          </a:p>
+        </p:txBody>
+      </p:sp>
+      <p:sp>
+        <p:nvSpPr>
+          <p:cNvPr id="47" name="楕円 46">
+            <a:extLst>
+              <a:ext uri="{FF2B5EF4-FFF2-40B4-BE49-F238E27FC236}">
+                <a16:creationId xmlns:a16="http://schemas.microsoft.com/office/drawing/2014/main" id="{81D19150-5041-4D06-9CEC-CE0960BB50E9}"/>
+              </a:ext>
+            </a:extLst>
+          </p:cNvPr>
+          <p:cNvSpPr/>
+          <p:nvPr/>
+        </p:nvSpPr>
+        <p:spPr>
+          <a:xfrm>
+            <a:off x="7209282" y="4289287"/>
+            <a:ext cx="146303" cy="137159"/>
+          </a:xfrm>
+          <a:prstGeom prst="ellipse">
+            <a:avLst/>
+          </a:prstGeom>
+        </p:spPr>
+        <p:style>
+          <a:lnRef idx="2">
+            <a:schemeClr val="accent1">
+              <a:shade val="50000"/>
+            </a:schemeClr>
+          </a:lnRef>
+          <a:fillRef idx="1">
+            <a:schemeClr val="accent1"/>
+          </a:fillRef>
+          <a:effectRef idx="0">
+            <a:schemeClr val="accent1"/>
+          </a:effectRef>
+          <a:fontRef idx="minor">
+            <a:schemeClr val="lt1"/>
+          </a:fontRef>
+        </p:style>
+        <p:txBody>
+          <a:bodyPr rtlCol="0" anchor="ctr"/>
+          <a:lstStyle/>
+          <a:p>
+            <a:pPr algn="ctr"/>
+            <a:endParaRPr kumimoji="1" lang="ja-JP" altLang="en-US"/>
+          </a:p>
+        </p:txBody>
+      </p:sp>
+      <p:sp>
+        <p:nvSpPr>
+          <p:cNvPr id="48" name="正方形/長方形 47">
+            <a:extLst>
+              <a:ext uri="{FF2B5EF4-FFF2-40B4-BE49-F238E27FC236}">
+                <a16:creationId xmlns:a16="http://schemas.microsoft.com/office/drawing/2014/main" id="{14A25E24-1930-4643-998D-EC398FF2BF9F}"/>
+              </a:ext>
+            </a:extLst>
+          </p:cNvPr>
+          <p:cNvSpPr/>
+          <p:nvPr/>
+        </p:nvSpPr>
+        <p:spPr>
+          <a:xfrm>
+            <a:off x="701807" y="3408166"/>
+            <a:ext cx="1505711" cy="1521020"/>
+          </a:xfrm>
+          <a:prstGeom prst="rect">
+            <a:avLst/>
+          </a:prstGeom>
+        </p:spPr>
+        <p:style>
+          <a:lnRef idx="2">
+            <a:schemeClr val="accent1">
+              <a:shade val="50000"/>
+            </a:schemeClr>
+          </a:lnRef>
+          <a:fillRef idx="1">
+            <a:schemeClr val="accent1"/>
+          </a:fillRef>
+          <a:effectRef idx="0">
+            <a:schemeClr val="accent1"/>
+          </a:effectRef>
+          <a:fontRef idx="minor">
+            <a:schemeClr val="lt1"/>
+          </a:fontRef>
+        </p:style>
+        <p:txBody>
+          <a:bodyPr rtlCol="0" anchor="ctr"/>
+          <a:lstStyle/>
+          <a:p>
+            <a:pPr algn="ctr"/>
+            <a:r>
+              <a:rPr kumimoji="1" lang="ja-JP" altLang="en-US" dirty="0"/>
+              <a:t>アイテム</a:t>
+            </a:r>
+            <a:endParaRPr kumimoji="1" lang="en-US" altLang="ja-JP" dirty="0"/>
+          </a:p>
+        </p:txBody>
+      </p:sp>
+      <p:sp>
+        <p:nvSpPr>
+          <p:cNvPr id="49" name="正方形/長方形 48">
+            <a:extLst>
+              <a:ext uri="{FF2B5EF4-FFF2-40B4-BE49-F238E27FC236}">
+                <a16:creationId xmlns:a16="http://schemas.microsoft.com/office/drawing/2014/main" id="{571FC337-D6B5-4668-80BA-0C254717675A}"/>
+              </a:ext>
+            </a:extLst>
+          </p:cNvPr>
+          <p:cNvSpPr/>
+          <p:nvPr/>
+        </p:nvSpPr>
+        <p:spPr>
+          <a:xfrm>
+            <a:off x="696088" y="4907341"/>
+            <a:ext cx="1505711" cy="1669552"/>
+          </a:xfrm>
+          <a:prstGeom prst="rect">
+            <a:avLst/>
+          </a:prstGeom>
+        </p:spPr>
+        <p:style>
+          <a:lnRef idx="2">
+            <a:schemeClr val="accent1">
+              <a:shade val="50000"/>
+            </a:schemeClr>
+          </a:lnRef>
+          <a:fillRef idx="1">
+            <a:schemeClr val="accent1"/>
+          </a:fillRef>
+          <a:effectRef idx="0">
+            <a:schemeClr val="accent1"/>
+          </a:effectRef>
+          <a:fontRef idx="minor">
+            <a:schemeClr val="lt1"/>
+          </a:fontRef>
+        </p:style>
+        <p:txBody>
+          <a:bodyPr rtlCol="0" anchor="ctr"/>
+          <a:lstStyle/>
+          <a:p>
+            <a:pPr algn="ctr"/>
+            <a:r>
+              <a:rPr kumimoji="1" lang="ja-JP" altLang="en-US" dirty="0"/>
+              <a:t>アイテム</a:t>
+            </a:r>
+            <a:endParaRPr kumimoji="1" lang="en-US" altLang="ja-JP" dirty="0"/>
+          </a:p>
+        </p:txBody>
+      </p:sp>
+      <p:sp>
+        <p:nvSpPr>
+          <p:cNvPr id="54" name="正方形/長方形 53">
+            <a:extLst>
+              <a:ext uri="{FF2B5EF4-FFF2-40B4-BE49-F238E27FC236}">
+                <a16:creationId xmlns:a16="http://schemas.microsoft.com/office/drawing/2014/main" id="{0373755D-C5EA-46C1-8AD8-23528D92A54F}"/>
+              </a:ext>
+            </a:extLst>
+          </p:cNvPr>
+          <p:cNvSpPr/>
+          <p:nvPr/>
+        </p:nvSpPr>
+        <p:spPr>
+          <a:xfrm>
+            <a:off x="2682622" y="94848"/>
+            <a:ext cx="6571488" cy="694335"/>
+          </a:xfrm>
+          <a:prstGeom prst="rect">
+            <a:avLst/>
+          </a:prstGeom>
+          <a:ln>
+            <a:solidFill>
+              <a:schemeClr val="tx1"/>
+            </a:solidFill>
+          </a:ln>
+        </p:spPr>
+        <p:style>
+          <a:lnRef idx="2">
+            <a:schemeClr val="accent6"/>
+          </a:lnRef>
+          <a:fillRef idx="1">
+            <a:schemeClr val="lt1"/>
+          </a:fillRef>
+          <a:effectRef idx="0">
+            <a:schemeClr val="accent6"/>
+          </a:effectRef>
+          <a:fontRef idx="minor">
+            <a:schemeClr val="dk1"/>
+          </a:fontRef>
+        </p:style>
+        <p:txBody>
+          <a:bodyPr rtlCol="0" anchor="ctr"/>
+          <a:lstStyle/>
+          <a:p>
+            <a:pPr algn="ctr"/>
+            <a:r>
+              <a:rPr kumimoji="1" lang="ja-JP" altLang="en-US" dirty="0"/>
+              <a:t>プレイ画面１イメージ</a:t>
+            </a:r>
+          </a:p>
+        </p:txBody>
+      </p:sp>
+      <p:sp>
+        <p:nvSpPr>
+          <p:cNvPr id="55" name="正方形/長方形 54">
+            <a:extLst>
+              <a:ext uri="{FF2B5EF4-FFF2-40B4-BE49-F238E27FC236}">
+                <a16:creationId xmlns:a16="http://schemas.microsoft.com/office/drawing/2014/main" id="{1BDAB244-1DE6-4A30-B51C-22BF57ECF632}"/>
+              </a:ext>
+            </a:extLst>
+          </p:cNvPr>
+          <p:cNvSpPr/>
+          <p:nvPr/>
+        </p:nvSpPr>
+        <p:spPr>
+          <a:xfrm>
+            <a:off x="9734932" y="757541"/>
+            <a:ext cx="1471421" cy="5760719"/>
+          </a:xfrm>
+          <a:prstGeom prst="rect">
+            <a:avLst/>
+          </a:prstGeom>
+        </p:spPr>
+        <p:style>
+          <a:lnRef idx="2">
+            <a:schemeClr val="dk1">
+              <a:shade val="50000"/>
+            </a:schemeClr>
+          </a:lnRef>
+          <a:fillRef idx="1">
+            <a:schemeClr val="dk1"/>
+          </a:fillRef>
+          <a:effectRef idx="0">
+            <a:schemeClr val="dk1"/>
+          </a:effectRef>
+          <a:fontRef idx="minor">
+            <a:schemeClr val="lt1"/>
+          </a:fontRef>
+        </p:style>
+        <p:txBody>
+          <a:bodyPr rtlCol="0" anchor="ctr"/>
+          <a:lstStyle/>
+          <a:p>
+            <a:pPr algn="ctr"/>
+            <a:endParaRPr kumimoji="1" lang="ja-JP" altLang="en-US"/>
           </a:p>
         </p:txBody>
       </p:sp>
     </p:spTree>
     <p:extLst>
       <p:ext uri="{BB962C8B-B14F-4D97-AF65-F5344CB8AC3E}">
-        <p14:creationId xmlns:p14="http://schemas.microsoft.com/office/powerpoint/2010/main" val="1752989940"/>
+        <p14:creationId xmlns:p14="http://schemas.microsoft.com/office/powerpoint/2010/main" val="1052657188"/>
       </p:ext>
     </p:extLst>
   </p:cSld>
@@ -6239,10 +8703,10 @@
       </p:grpSpPr>
       <p:sp>
         <p:nvSpPr>
-          <p:cNvPr id="4" name="正方形/長方形 3">
-            <a:extLst>
-              <a:ext uri="{FF2B5EF4-FFF2-40B4-BE49-F238E27FC236}">
-                <a16:creationId xmlns:a16="http://schemas.microsoft.com/office/drawing/2014/main" id="{6840A768-F67B-4920-B60C-4E4E518CFD24}"/>
+          <p:cNvPr id="2" name="正方形/長方形 1">
+            <a:extLst>
+              <a:ext uri="{FF2B5EF4-FFF2-40B4-BE49-F238E27FC236}">
+                <a16:creationId xmlns:a16="http://schemas.microsoft.com/office/drawing/2014/main" id="{BF3D83FA-1539-4F05-B445-0C144A637B7C}"/>
               </a:ext>
             </a:extLst>
           </p:cNvPr>
@@ -6251,14 +8715,219 @@
         </p:nvSpPr>
         <p:spPr>
           <a:xfrm>
-            <a:off x="184014" y="188174"/>
-            <a:ext cx="5911986" cy="2854054"/>
+            <a:off x="795528" y="777240"/>
+            <a:ext cx="1396748" cy="932688"/>
           </a:xfrm>
           <a:prstGeom prst="rect">
             <a:avLst/>
           </a:prstGeom>
+        </p:spPr>
+        <p:style>
+          <a:lnRef idx="2">
+            <a:schemeClr val="accent1">
+              <a:shade val="50000"/>
+            </a:schemeClr>
+          </a:lnRef>
+          <a:fillRef idx="1">
+            <a:schemeClr val="accent1"/>
+          </a:fillRef>
+          <a:effectRef idx="0">
+            <a:schemeClr val="accent1"/>
+          </a:effectRef>
+          <a:fontRef idx="minor">
+            <a:schemeClr val="lt1"/>
+          </a:fontRef>
+        </p:style>
+        <p:txBody>
+          <a:bodyPr rtlCol="0" anchor="ctr"/>
+          <a:lstStyle/>
+          <a:p>
+            <a:pPr algn="ctr"/>
+            <a:r>
+              <a:rPr kumimoji="1" lang="ja-JP" altLang="en-US" dirty="0"/>
+              <a:t>お題</a:t>
+            </a:r>
+            <a:endParaRPr kumimoji="1" lang="en-US" altLang="ja-JP" dirty="0"/>
+          </a:p>
+          <a:p>
+            <a:pPr algn="ctr"/>
+            <a:r>
+              <a:rPr lang="ja-JP" altLang="en-US" dirty="0"/>
+              <a:t>表示</a:t>
+            </a:r>
+            <a:endParaRPr kumimoji="1" lang="ja-JP" altLang="en-US" dirty="0"/>
+          </a:p>
+        </p:txBody>
+      </p:sp>
+      <p:sp>
+        <p:nvSpPr>
+          <p:cNvPr id="3" name="正方形/長方形 2">
+            <a:extLst>
+              <a:ext uri="{FF2B5EF4-FFF2-40B4-BE49-F238E27FC236}">
+                <a16:creationId xmlns:a16="http://schemas.microsoft.com/office/drawing/2014/main" id="{C47421D0-B445-49D8-9C9B-18E696574949}"/>
+              </a:ext>
+            </a:extLst>
+          </p:cNvPr>
+          <p:cNvSpPr/>
+          <p:nvPr/>
+        </p:nvSpPr>
+        <p:spPr>
+          <a:xfrm>
+            <a:off x="9735314" y="777240"/>
+            <a:ext cx="1472181" cy="932686"/>
+          </a:xfrm>
+          <a:prstGeom prst="rect">
+            <a:avLst/>
+          </a:prstGeom>
+        </p:spPr>
+        <p:style>
+          <a:lnRef idx="2">
+            <a:schemeClr val="accent1">
+              <a:shade val="50000"/>
+            </a:schemeClr>
+          </a:lnRef>
+          <a:fillRef idx="1">
+            <a:schemeClr val="accent1"/>
+          </a:fillRef>
+          <a:effectRef idx="0">
+            <a:schemeClr val="accent1"/>
+          </a:effectRef>
+          <a:fontRef idx="minor">
+            <a:schemeClr val="lt1"/>
+          </a:fontRef>
+        </p:style>
+        <p:txBody>
+          <a:bodyPr rtlCol="0" anchor="ctr"/>
+          <a:lstStyle/>
+          <a:p>
+            <a:pPr algn="ctr"/>
+            <a:r>
+              <a:rPr lang="ja-JP" altLang="en-US" dirty="0"/>
+              <a:t>アイテム</a:t>
+            </a:r>
+            <a:endParaRPr kumimoji="1" lang="en-US" altLang="ja-JP" dirty="0"/>
+          </a:p>
+        </p:txBody>
+      </p:sp>
+      <p:sp>
+        <p:nvSpPr>
+          <p:cNvPr id="4" name="正方形/長方形 3">
+            <a:extLst>
+              <a:ext uri="{FF2B5EF4-FFF2-40B4-BE49-F238E27FC236}">
+                <a16:creationId xmlns:a16="http://schemas.microsoft.com/office/drawing/2014/main" id="{9C85CDB3-11E3-4582-BCED-667AE07A3A0D}"/>
+              </a:ext>
+            </a:extLst>
+          </p:cNvPr>
+          <p:cNvSpPr/>
+          <p:nvPr/>
+        </p:nvSpPr>
+        <p:spPr>
+          <a:xfrm>
+            <a:off x="2192274" y="777240"/>
+            <a:ext cx="7543039" cy="932686"/>
+          </a:xfrm>
+          <a:prstGeom prst="rect">
+            <a:avLst/>
+          </a:prstGeom>
+        </p:spPr>
+        <p:style>
+          <a:lnRef idx="2">
+            <a:schemeClr val="accent1">
+              <a:shade val="50000"/>
+            </a:schemeClr>
+          </a:lnRef>
+          <a:fillRef idx="1">
+            <a:schemeClr val="accent1"/>
+          </a:fillRef>
+          <a:effectRef idx="0">
+            <a:schemeClr val="accent1"/>
+          </a:effectRef>
+          <a:fontRef idx="minor">
+            <a:schemeClr val="lt1"/>
+          </a:fontRef>
+        </p:style>
+        <p:txBody>
+          <a:bodyPr rtlCol="0" anchor="ctr"/>
+          <a:lstStyle/>
+          <a:p>
+            <a:pPr algn="ctr"/>
+            <a:r>
+              <a:rPr kumimoji="1" lang="ja-JP" altLang="en-US" dirty="0"/>
+              <a:t>タイマー</a:t>
+            </a:r>
+          </a:p>
+        </p:txBody>
+      </p:sp>
+      <p:sp>
+        <p:nvSpPr>
+          <p:cNvPr id="5" name="正方形/長方形 4">
+            <a:extLst>
+              <a:ext uri="{FF2B5EF4-FFF2-40B4-BE49-F238E27FC236}">
+                <a16:creationId xmlns:a16="http://schemas.microsoft.com/office/drawing/2014/main" id="{9FF7FB84-B30C-43E4-B6AC-37C381E93622}"/>
+              </a:ext>
+            </a:extLst>
+          </p:cNvPr>
+          <p:cNvSpPr/>
+          <p:nvPr/>
+        </p:nvSpPr>
+        <p:spPr>
+          <a:xfrm>
+            <a:off x="795528" y="1709928"/>
+            <a:ext cx="10411968" cy="4818888"/>
+          </a:xfrm>
+          <a:prstGeom prst="rect">
+            <a:avLst/>
+          </a:prstGeom>
+        </p:spPr>
+        <p:style>
+          <a:lnRef idx="2">
+            <a:schemeClr val="dk1">
+              <a:shade val="50000"/>
+            </a:schemeClr>
+          </a:lnRef>
+          <a:fillRef idx="1">
+            <a:schemeClr val="dk1"/>
+          </a:fillRef>
+          <a:effectRef idx="0">
+            <a:schemeClr val="dk1"/>
+          </a:effectRef>
+          <a:fontRef idx="minor">
+            <a:schemeClr val="lt1"/>
+          </a:fontRef>
+        </p:style>
+        <p:txBody>
+          <a:bodyPr rtlCol="0" anchor="ctr"/>
+          <a:lstStyle/>
+          <a:p>
+            <a:pPr algn="ctr"/>
+            <a:endParaRPr kumimoji="1" lang="ja-JP" altLang="en-US"/>
+          </a:p>
+        </p:txBody>
+      </p:sp>
+      <p:sp>
+        <p:nvSpPr>
+          <p:cNvPr id="6" name="正方形/長方形 5">
+            <a:extLst>
+              <a:ext uri="{FF2B5EF4-FFF2-40B4-BE49-F238E27FC236}">
+                <a16:creationId xmlns:a16="http://schemas.microsoft.com/office/drawing/2014/main" id="{3EF9EED5-7E2D-44F9-A550-3AB338DE4D35}"/>
+              </a:ext>
+            </a:extLst>
+          </p:cNvPr>
+          <p:cNvSpPr/>
+          <p:nvPr/>
+        </p:nvSpPr>
+        <p:spPr>
+          <a:xfrm>
+            <a:off x="2192276" y="2368297"/>
+            <a:ext cx="7543038" cy="3895342"/>
+          </a:xfrm>
+          <a:prstGeom prst="rect">
+            <a:avLst/>
+          </a:prstGeom>
           <a:ln>
-            <a:noFill/>
+            <a:solidFill>
+              <a:schemeClr val="tx1"/>
+            </a:solidFill>
           </a:ln>
         </p:spPr>
         <p:style>
@@ -6280,107 +8949,16 @@
           <a:lstStyle/>
           <a:p>
             <a:pPr algn="ctr"/>
-            <a:r>
-              <a:rPr lang="ja-JP" altLang="en-US" sz="4800" dirty="0">
-                <a:latin typeface="メイリオ" panose="020B0604030504040204" pitchFamily="50" charset="-128"/>
-                <a:ea typeface="メイリオ" panose="020B0604030504040204" pitchFamily="50" charset="-128"/>
-              </a:rPr>
-              <a:t>既存のゲームとの</a:t>
-            </a:r>
-            <a:endParaRPr lang="en-US" altLang="ja-JP" sz="4800" dirty="0">
-              <a:latin typeface="メイリオ" panose="020B0604030504040204" pitchFamily="50" charset="-128"/>
-              <a:ea typeface="メイリオ" panose="020B0604030504040204" pitchFamily="50" charset="-128"/>
-            </a:endParaRPr>
-          </a:p>
-          <a:p>
-            <a:pPr algn="ctr"/>
-            <a:r>
-              <a:rPr lang="ja-JP" altLang="en-US" sz="4800" dirty="0">
-                <a:latin typeface="メイリオ" panose="020B0604030504040204" pitchFamily="50" charset="-128"/>
-                <a:ea typeface="メイリオ" panose="020B0604030504040204" pitchFamily="50" charset="-128"/>
-              </a:rPr>
-              <a:t>差別点</a:t>
-            </a:r>
-            <a:endParaRPr lang="en-US" altLang="ja-JP" sz="4800" dirty="0">
-              <a:latin typeface="メイリオ" panose="020B0604030504040204" pitchFamily="50" charset="-128"/>
-              <a:ea typeface="メイリオ" panose="020B0604030504040204" pitchFamily="50" charset="-128"/>
-            </a:endParaRPr>
-          </a:p>
-          <a:p>
-            <a:pPr algn="ctr"/>
-            <a:endParaRPr kumimoji="1" lang="ja-JP" altLang="en-US" sz="4800" dirty="0">
-              <a:latin typeface="メイリオ" panose="020B0604030504040204" pitchFamily="50" charset="-128"/>
-              <a:ea typeface="メイリオ" panose="020B0604030504040204" pitchFamily="50" charset="-128"/>
-            </a:endParaRPr>
-          </a:p>
-        </p:txBody>
-      </p:sp>
-      <p:pic>
-        <p:nvPicPr>
-          <p:cNvPr id="5" name="図 4">
-            <a:extLst>
-              <a:ext uri="{FF2B5EF4-FFF2-40B4-BE49-F238E27FC236}">
-                <a16:creationId xmlns:a16="http://schemas.microsoft.com/office/drawing/2014/main" id="{3258D720-4F32-47AB-A04F-C0226CFDB304}"/>
-              </a:ext>
-            </a:extLst>
-          </p:cNvPr>
-          <p:cNvPicPr>
-            <a:picLocks noChangeAspect="1"/>
-          </p:cNvPicPr>
-          <p:nvPr/>
-        </p:nvPicPr>
-        <p:blipFill>
-          <a:blip r:embed="rId2"/>
-          <a:stretch>
-            <a:fillRect/>
-          </a:stretch>
-        </p:blipFill>
-        <p:spPr>
-          <a:xfrm>
-            <a:off x="5911986" y="2348834"/>
-            <a:ext cx="6280014" cy="3981450"/>
-          </a:xfrm>
-          <a:prstGeom prst="rect">
-            <a:avLst/>
-          </a:prstGeom>
-        </p:spPr>
-      </p:pic>
-      <p:pic>
-        <p:nvPicPr>
-          <p:cNvPr id="8" name="図 7">
-            <a:extLst>
-              <a:ext uri="{FF2B5EF4-FFF2-40B4-BE49-F238E27FC236}">
-                <a16:creationId xmlns:a16="http://schemas.microsoft.com/office/drawing/2014/main" id="{E15A6B13-698C-466F-8857-1D17DD41414E}"/>
-              </a:ext>
-            </a:extLst>
-          </p:cNvPr>
-          <p:cNvPicPr>
-            <a:picLocks noChangeAspect="1"/>
-          </p:cNvPicPr>
-          <p:nvPr/>
-        </p:nvPicPr>
-        <p:blipFill>
-          <a:blip r:embed="rId3"/>
-          <a:stretch>
-            <a:fillRect/>
-          </a:stretch>
-        </p:blipFill>
-        <p:spPr>
-          <a:xfrm>
-            <a:off x="0" y="2244059"/>
-            <a:ext cx="5911986" cy="4086225"/>
-          </a:xfrm>
-          <a:prstGeom prst="rect">
-            <a:avLst/>
-          </a:prstGeom>
-        </p:spPr>
-      </p:pic>
-      <p:sp>
-        <p:nvSpPr>
-          <p:cNvPr id="9" name="正方形/長方形 8">
-            <a:extLst>
-              <a:ext uri="{FF2B5EF4-FFF2-40B4-BE49-F238E27FC236}">
-                <a16:creationId xmlns:a16="http://schemas.microsoft.com/office/drawing/2014/main" id="{AE2D33BF-6DBF-49C0-BADC-46794B569439}"/>
+            <a:endParaRPr kumimoji="1" lang="ja-JP" altLang="en-US"/>
+          </a:p>
+        </p:txBody>
+      </p:sp>
+      <p:sp>
+        <p:nvSpPr>
+          <p:cNvPr id="7" name="正方形/長方形 6">
+            <a:extLst>
+              <a:ext uri="{FF2B5EF4-FFF2-40B4-BE49-F238E27FC236}">
+                <a16:creationId xmlns:a16="http://schemas.microsoft.com/office/drawing/2014/main" id="{6E5B084D-CC9F-4695-B978-D9337D736B34}"/>
               </a:ext>
             </a:extLst>
           </p:cNvPr>
@@ -6389,27 +8967,27 @@
         </p:nvSpPr>
         <p:spPr>
           <a:xfrm>
-            <a:off x="5911986" y="804085"/>
-            <a:ext cx="4994531" cy="777828"/>
+            <a:off x="2682622" y="94848"/>
+            <a:ext cx="6571488" cy="694335"/>
           </a:xfrm>
           <a:prstGeom prst="rect">
             <a:avLst/>
           </a:prstGeom>
           <a:ln>
             <a:solidFill>
-              <a:schemeClr val="bg1"/>
+              <a:schemeClr val="tx1"/>
             </a:solidFill>
           </a:ln>
         </p:spPr>
         <p:style>
           <a:lnRef idx="2">
-            <a:schemeClr val="dk1"/>
+            <a:schemeClr val="accent6"/>
           </a:lnRef>
           <a:fillRef idx="1">
             <a:schemeClr val="lt1"/>
           </a:fillRef>
           <a:effectRef idx="0">
-            <a:schemeClr val="dk1"/>
+            <a:schemeClr val="accent6"/>
           </a:effectRef>
           <a:fontRef idx="minor">
             <a:schemeClr val="dk1"/>
@@ -6421,49 +8999,16 @@
           <a:p>
             <a:pPr algn="ctr"/>
             <a:r>
-              <a:rPr kumimoji="1" lang="ja-JP" altLang="en-US" sz="3600" dirty="0">
-                <a:solidFill>
-                  <a:srgbClr val="FF0000"/>
-                </a:solidFill>
-                <a:latin typeface="メイリオ" panose="020B0604030504040204" pitchFamily="50" charset="-128"/>
-                <a:ea typeface="メイリオ" panose="020B0604030504040204" pitchFamily="50" charset="-128"/>
-              </a:rPr>
-              <a:t>このゲームは</a:t>
-            </a:r>
-            <a:endParaRPr kumimoji="1" lang="en-US" altLang="ja-JP" sz="3600" dirty="0">
-              <a:solidFill>
-                <a:srgbClr val="FF0000"/>
-              </a:solidFill>
-              <a:latin typeface="メイリオ" panose="020B0604030504040204" pitchFamily="50" charset="-128"/>
-              <a:ea typeface="メイリオ" panose="020B0604030504040204" pitchFamily="50" charset="-128"/>
-            </a:endParaRPr>
-          </a:p>
-          <a:p>
-            <a:pPr algn="ctr"/>
-            <a:r>
-              <a:rPr lang="ja-JP" altLang="en-US" sz="3600" dirty="0">
-                <a:solidFill>
-                  <a:srgbClr val="FF0000"/>
-                </a:solidFill>
-                <a:latin typeface="メイリオ" panose="020B0604030504040204" pitchFamily="50" charset="-128"/>
-                <a:ea typeface="メイリオ" panose="020B0604030504040204" pitchFamily="50" charset="-128"/>
-              </a:rPr>
-              <a:t>マウスとキーボードを同時に使う</a:t>
-            </a:r>
-            <a:endParaRPr kumimoji="1" lang="ja-JP" altLang="en-US" sz="3600" dirty="0">
-              <a:solidFill>
-                <a:srgbClr val="FF0000"/>
-              </a:solidFill>
-              <a:latin typeface="メイリオ" panose="020B0604030504040204" pitchFamily="50" charset="-128"/>
-              <a:ea typeface="メイリオ" panose="020B0604030504040204" pitchFamily="50" charset="-128"/>
-            </a:endParaRPr>
+              <a:rPr kumimoji="1" lang="ja-JP" altLang="en-US" dirty="0"/>
+              <a:t>プレイ画面２イメージ</a:t>
+            </a:r>
           </a:p>
         </p:txBody>
       </p:sp>
     </p:spTree>
     <p:extLst>
       <p:ext uri="{BB962C8B-B14F-4D97-AF65-F5344CB8AC3E}">
-        <p14:creationId xmlns:p14="http://schemas.microsoft.com/office/powerpoint/2010/main" val="1417576500"/>
+        <p14:creationId xmlns:p14="http://schemas.microsoft.com/office/powerpoint/2010/main" val="919960110"/>
       </p:ext>
     </p:extLst>
   </p:cSld>
@@ -6490,42 +9035,12 @@
           <a:chExt cx="0" cy="0"/>
         </a:xfrm>
       </p:grpSpPr>
-      <p:pic>
-        <p:nvPicPr>
-          <p:cNvPr id="3" name="図 2">
-            <a:extLst>
-              <a:ext uri="{FF2B5EF4-FFF2-40B4-BE49-F238E27FC236}">
-                <a16:creationId xmlns:a16="http://schemas.microsoft.com/office/drawing/2014/main" id="{042B6202-40C1-4F10-B7F8-05F0C96734AB}"/>
-              </a:ext>
-            </a:extLst>
-          </p:cNvPr>
-          <p:cNvPicPr>
-            <a:picLocks noChangeAspect="1"/>
-          </p:cNvPicPr>
-          <p:nvPr/>
-        </p:nvPicPr>
-        <p:blipFill>
-          <a:blip r:embed="rId2"/>
-          <a:stretch>
-            <a:fillRect/>
-          </a:stretch>
-        </p:blipFill>
-        <p:spPr>
-          <a:xfrm>
-            <a:off x="265176" y="3291840"/>
-            <a:ext cx="4876800" cy="2743200"/>
-          </a:xfrm>
-          <a:prstGeom prst="rect">
-            <a:avLst/>
-          </a:prstGeom>
-        </p:spPr>
-      </p:pic>
-      <p:sp>
-        <p:nvSpPr>
-          <p:cNvPr id="4" name="正方形/長方形 3">
-            <a:extLst>
-              <a:ext uri="{FF2B5EF4-FFF2-40B4-BE49-F238E27FC236}">
-                <a16:creationId xmlns:a16="http://schemas.microsoft.com/office/drawing/2014/main" id="{A84147B3-AEFB-4ABF-A40D-9EB6200E68C3}"/>
+      <p:sp>
+        <p:nvSpPr>
+          <p:cNvPr id="2" name="正方形/長方形 1">
+            <a:extLst>
+              <a:ext uri="{FF2B5EF4-FFF2-40B4-BE49-F238E27FC236}">
+                <a16:creationId xmlns:a16="http://schemas.microsoft.com/office/drawing/2014/main" id="{9F7CA3D4-E67C-4023-B580-346E725E68BF}"/>
               </a:ext>
             </a:extLst>
           </p:cNvPr>
@@ -6534,30 +9049,27 @@
         </p:nvSpPr>
         <p:spPr>
           <a:xfrm>
-            <a:off x="2770632" y="1453896"/>
-            <a:ext cx="6181344" cy="1344168"/>
+            <a:off x="2569464" y="457201"/>
+            <a:ext cx="7863840" cy="4325112"/>
           </a:xfrm>
           <a:prstGeom prst="rect">
             <a:avLst/>
           </a:prstGeom>
-          <a:ln>
-            <a:solidFill>
-              <a:schemeClr val="tx1"/>
-            </a:solidFill>
-          </a:ln>
         </p:spPr>
         <p:style>
           <a:lnRef idx="2">
-            <a:schemeClr val="accent6"/>
+            <a:schemeClr val="accent1">
+              <a:shade val="50000"/>
+            </a:schemeClr>
           </a:lnRef>
           <a:fillRef idx="1">
-            <a:schemeClr val="lt1"/>
+            <a:schemeClr val="accent1"/>
           </a:fillRef>
           <a:effectRef idx="0">
-            <a:schemeClr val="accent6"/>
+            <a:schemeClr val="accent1"/>
           </a:effectRef>
           <a:fontRef idx="minor">
-            <a:schemeClr val="dk1"/>
+            <a:schemeClr val="lt1"/>
           </a:fontRef>
         </p:style>
         <p:txBody>
@@ -6566,23 +9078,719 @@
           <a:p>
             <a:pPr algn="ctr"/>
             <a:r>
-              <a:rPr lang="ja-JP" altLang="en-US" sz="2400" dirty="0">
-                <a:latin typeface="メイリオ" panose="020B0604030504040204" pitchFamily="50" charset="-128"/>
-                <a:ea typeface="メイリオ" panose="020B0604030504040204" pitchFamily="50" charset="-128"/>
-              </a:rPr>
-              <a:t>自由に描くではなく　自分で書けるように盤面を整えるパズル要素もある</a:t>
-            </a:r>
-            <a:endParaRPr kumimoji="1" lang="ja-JP" altLang="en-US" sz="2400" dirty="0">
-              <a:latin typeface="メイリオ" panose="020B0604030504040204" pitchFamily="50" charset="-128"/>
-              <a:ea typeface="メイリオ" panose="020B0604030504040204" pitchFamily="50" charset="-128"/>
-            </a:endParaRPr>
+              <a:rPr kumimoji="1" lang="ja-JP" altLang="en-US" dirty="0"/>
+              <a:t>雨粒をどうする　お題を簡単にするより</a:t>
+            </a:r>
+            <a:endParaRPr kumimoji="1" lang="en-US" altLang="ja-JP" dirty="0"/>
+          </a:p>
+          <a:p>
+            <a:pPr algn="ctr"/>
+            <a:r>
+              <a:rPr lang="ja-JP" altLang="en-US" dirty="0"/>
+              <a:t>もともとのシステムを見ろ</a:t>
+            </a:r>
+            <a:endParaRPr lang="en-US" altLang="ja-JP" dirty="0"/>
+          </a:p>
+          <a:p>
+            <a:pPr algn="ctr"/>
+            <a:r>
+              <a:rPr kumimoji="1" lang="ja-JP" altLang="en-US" dirty="0"/>
+              <a:t>　</a:t>
+            </a:r>
+            <a:endParaRPr kumimoji="1" lang="en-US" altLang="ja-JP" dirty="0"/>
+          </a:p>
+          <a:p>
+            <a:pPr algn="ctr"/>
+            <a:r>
+              <a:rPr lang="ja-JP" altLang="en-US" dirty="0"/>
+              <a:t>頭で自分のゲームをプレイしてみろ</a:t>
+            </a:r>
+            <a:endParaRPr lang="en-US" altLang="ja-JP" dirty="0"/>
+          </a:p>
+          <a:p>
+            <a:pPr algn="ctr"/>
+            <a:endParaRPr kumimoji="1" lang="ja-JP" altLang="en-US" dirty="0"/>
           </a:p>
         </p:txBody>
       </p:sp>
     </p:spTree>
     <p:extLst>
       <p:ext uri="{BB962C8B-B14F-4D97-AF65-F5344CB8AC3E}">
-        <p14:creationId xmlns:p14="http://schemas.microsoft.com/office/powerpoint/2010/main" val="2174802983"/>
+        <p14:creationId xmlns:p14="http://schemas.microsoft.com/office/powerpoint/2010/main" val="1752989940"/>
+      </p:ext>
+    </p:extLst>
+  </p:cSld>
+  <p:clrMapOvr>
+    <a:masterClrMapping/>
+  </p:clrMapOvr>
+</p:sld>
+</file>
+
+<file path=ppt/slides/slide9.xml><?xml version="1.0" encoding="utf-8"?>
+<p:sld xmlns:a="http://schemas.openxmlformats.org/drawingml/2006/main" xmlns:r="http://schemas.openxmlformats.org/officeDocument/2006/relationships" xmlns:p="http://schemas.openxmlformats.org/presentationml/2006/main">
+  <p:cSld>
+    <p:spTree>
+      <p:nvGrpSpPr>
+        <p:cNvPr id="1" name=""/>
+        <p:cNvGrpSpPr/>
+        <p:nvPr/>
+      </p:nvGrpSpPr>
+      <p:grpSpPr>
+        <a:xfrm>
+          <a:off x="0" y="0"/>
+          <a:ext cx="0" cy="0"/>
+          <a:chOff x="0" y="0"/>
+          <a:chExt cx="0" cy="0"/>
+        </a:xfrm>
+      </p:grpSpPr>
+      <p:sp>
+        <p:nvSpPr>
+          <p:cNvPr id="2" name="楕円 1">
+            <a:extLst>
+              <a:ext uri="{FF2B5EF4-FFF2-40B4-BE49-F238E27FC236}">
+                <a16:creationId xmlns:a16="http://schemas.microsoft.com/office/drawing/2014/main" id="{D6B1115E-D305-4D46-AB9A-8F11C8AEC40F}"/>
+              </a:ext>
+            </a:extLst>
+          </p:cNvPr>
+          <p:cNvSpPr/>
+          <p:nvPr/>
+        </p:nvSpPr>
+        <p:spPr>
+          <a:xfrm>
+            <a:off x="3337560" y="2514600"/>
+            <a:ext cx="393192" cy="438912"/>
+          </a:xfrm>
+          <a:prstGeom prst="ellipse">
+            <a:avLst/>
+          </a:prstGeom>
+        </p:spPr>
+        <p:style>
+          <a:lnRef idx="2">
+            <a:schemeClr val="accent1">
+              <a:shade val="50000"/>
+            </a:schemeClr>
+          </a:lnRef>
+          <a:fillRef idx="1">
+            <a:schemeClr val="accent1"/>
+          </a:fillRef>
+          <a:effectRef idx="0">
+            <a:schemeClr val="accent1"/>
+          </a:effectRef>
+          <a:fontRef idx="minor">
+            <a:schemeClr val="lt1"/>
+          </a:fontRef>
+        </p:style>
+        <p:txBody>
+          <a:bodyPr rtlCol="0" anchor="ctr"/>
+          <a:lstStyle/>
+          <a:p>
+            <a:pPr algn="ctr"/>
+            <a:endParaRPr kumimoji="1" lang="ja-JP" altLang="en-US"/>
+          </a:p>
+        </p:txBody>
+      </p:sp>
+      <p:sp>
+        <p:nvSpPr>
+          <p:cNvPr id="8" name="楕円 7">
+            <a:extLst>
+              <a:ext uri="{FF2B5EF4-FFF2-40B4-BE49-F238E27FC236}">
+                <a16:creationId xmlns:a16="http://schemas.microsoft.com/office/drawing/2014/main" id="{F176A1D4-4FDF-4A47-ACF2-1ED266931630}"/>
+              </a:ext>
+            </a:extLst>
+          </p:cNvPr>
+          <p:cNvSpPr/>
+          <p:nvPr/>
+        </p:nvSpPr>
+        <p:spPr>
+          <a:xfrm>
+            <a:off x="3489960" y="2667000"/>
+            <a:ext cx="393192" cy="438912"/>
+          </a:xfrm>
+          <a:prstGeom prst="ellipse">
+            <a:avLst/>
+          </a:prstGeom>
+        </p:spPr>
+        <p:style>
+          <a:lnRef idx="2">
+            <a:schemeClr val="accent1">
+              <a:shade val="50000"/>
+            </a:schemeClr>
+          </a:lnRef>
+          <a:fillRef idx="1">
+            <a:schemeClr val="accent1"/>
+          </a:fillRef>
+          <a:effectRef idx="0">
+            <a:schemeClr val="accent1"/>
+          </a:effectRef>
+          <a:fontRef idx="minor">
+            <a:schemeClr val="lt1"/>
+          </a:fontRef>
+        </p:style>
+        <p:txBody>
+          <a:bodyPr rtlCol="0" anchor="ctr"/>
+          <a:lstStyle/>
+          <a:p>
+            <a:pPr algn="ctr"/>
+            <a:endParaRPr kumimoji="1" lang="ja-JP" altLang="en-US"/>
+          </a:p>
+        </p:txBody>
+      </p:sp>
+      <p:sp>
+        <p:nvSpPr>
+          <p:cNvPr id="9" name="楕円 8">
+            <a:extLst>
+              <a:ext uri="{FF2B5EF4-FFF2-40B4-BE49-F238E27FC236}">
+                <a16:creationId xmlns:a16="http://schemas.microsoft.com/office/drawing/2014/main" id="{66123DBD-858F-42CD-BA18-EA03A6265CF3}"/>
+              </a:ext>
+            </a:extLst>
+          </p:cNvPr>
+          <p:cNvSpPr/>
+          <p:nvPr/>
+        </p:nvSpPr>
+        <p:spPr>
+          <a:xfrm>
+            <a:off x="3642360" y="2819400"/>
+            <a:ext cx="393192" cy="438912"/>
+          </a:xfrm>
+          <a:prstGeom prst="ellipse">
+            <a:avLst/>
+          </a:prstGeom>
+        </p:spPr>
+        <p:style>
+          <a:lnRef idx="2">
+            <a:schemeClr val="accent1">
+              <a:shade val="50000"/>
+            </a:schemeClr>
+          </a:lnRef>
+          <a:fillRef idx="1">
+            <a:schemeClr val="accent1"/>
+          </a:fillRef>
+          <a:effectRef idx="0">
+            <a:schemeClr val="accent1"/>
+          </a:effectRef>
+          <a:fontRef idx="minor">
+            <a:schemeClr val="lt1"/>
+          </a:fontRef>
+        </p:style>
+        <p:txBody>
+          <a:bodyPr rtlCol="0" anchor="ctr"/>
+          <a:lstStyle/>
+          <a:p>
+            <a:pPr algn="ctr"/>
+            <a:endParaRPr kumimoji="1" lang="ja-JP" altLang="en-US"/>
+          </a:p>
+        </p:txBody>
+      </p:sp>
+      <p:sp>
+        <p:nvSpPr>
+          <p:cNvPr id="10" name="楕円 9">
+            <a:extLst>
+              <a:ext uri="{FF2B5EF4-FFF2-40B4-BE49-F238E27FC236}">
+                <a16:creationId xmlns:a16="http://schemas.microsoft.com/office/drawing/2014/main" id="{E88FE659-FD37-45BB-A382-3E92E9355853}"/>
+              </a:ext>
+            </a:extLst>
+          </p:cNvPr>
+          <p:cNvSpPr/>
+          <p:nvPr/>
+        </p:nvSpPr>
+        <p:spPr>
+          <a:xfrm>
+            <a:off x="3547110" y="3752088"/>
+            <a:ext cx="393192" cy="438912"/>
+          </a:xfrm>
+          <a:prstGeom prst="ellipse">
+            <a:avLst/>
+          </a:prstGeom>
+        </p:spPr>
+        <p:style>
+          <a:lnRef idx="2">
+            <a:schemeClr val="accent1">
+              <a:shade val="50000"/>
+            </a:schemeClr>
+          </a:lnRef>
+          <a:fillRef idx="1">
+            <a:schemeClr val="accent1"/>
+          </a:fillRef>
+          <a:effectRef idx="0">
+            <a:schemeClr val="accent1"/>
+          </a:effectRef>
+          <a:fontRef idx="minor">
+            <a:schemeClr val="lt1"/>
+          </a:fontRef>
+        </p:style>
+        <p:txBody>
+          <a:bodyPr rtlCol="0" anchor="ctr"/>
+          <a:lstStyle/>
+          <a:p>
+            <a:pPr algn="ctr"/>
+            <a:endParaRPr kumimoji="1" lang="ja-JP" altLang="en-US"/>
+          </a:p>
+        </p:txBody>
+      </p:sp>
+      <p:sp>
+        <p:nvSpPr>
+          <p:cNvPr id="11" name="楕円 10">
+            <a:extLst>
+              <a:ext uri="{FF2B5EF4-FFF2-40B4-BE49-F238E27FC236}">
+                <a16:creationId xmlns:a16="http://schemas.microsoft.com/office/drawing/2014/main" id="{7DF02EA0-B6F8-4A6C-9957-A00D864F36A8}"/>
+              </a:ext>
+            </a:extLst>
+          </p:cNvPr>
+          <p:cNvSpPr/>
+          <p:nvPr/>
+        </p:nvSpPr>
+        <p:spPr>
+          <a:xfrm>
+            <a:off x="2974848" y="4041649"/>
+            <a:ext cx="393192" cy="438912"/>
+          </a:xfrm>
+          <a:prstGeom prst="ellipse">
+            <a:avLst/>
+          </a:prstGeom>
+        </p:spPr>
+        <p:style>
+          <a:lnRef idx="2">
+            <a:schemeClr val="accent1">
+              <a:shade val="50000"/>
+            </a:schemeClr>
+          </a:lnRef>
+          <a:fillRef idx="1">
+            <a:schemeClr val="accent1"/>
+          </a:fillRef>
+          <a:effectRef idx="0">
+            <a:schemeClr val="accent1"/>
+          </a:effectRef>
+          <a:fontRef idx="minor">
+            <a:schemeClr val="lt1"/>
+          </a:fontRef>
+        </p:style>
+        <p:txBody>
+          <a:bodyPr rtlCol="0" anchor="ctr"/>
+          <a:lstStyle/>
+          <a:p>
+            <a:pPr algn="ctr"/>
+            <a:endParaRPr kumimoji="1" lang="ja-JP" altLang="en-US"/>
+          </a:p>
+        </p:txBody>
+      </p:sp>
+      <p:sp>
+        <p:nvSpPr>
+          <p:cNvPr id="12" name="楕円 11">
+            <a:extLst>
+              <a:ext uri="{FF2B5EF4-FFF2-40B4-BE49-F238E27FC236}">
+                <a16:creationId xmlns:a16="http://schemas.microsoft.com/office/drawing/2014/main" id="{324B2212-6109-48C6-B020-6F52BF8E4677}"/>
+              </a:ext>
+            </a:extLst>
+          </p:cNvPr>
+          <p:cNvSpPr/>
+          <p:nvPr/>
+        </p:nvSpPr>
+        <p:spPr>
+          <a:xfrm>
+            <a:off x="4035552" y="4236721"/>
+            <a:ext cx="393192" cy="438912"/>
+          </a:xfrm>
+          <a:prstGeom prst="ellipse">
+            <a:avLst/>
+          </a:prstGeom>
+        </p:spPr>
+        <p:style>
+          <a:lnRef idx="2">
+            <a:schemeClr val="accent1">
+              <a:shade val="50000"/>
+            </a:schemeClr>
+          </a:lnRef>
+          <a:fillRef idx="1">
+            <a:schemeClr val="accent1"/>
+          </a:fillRef>
+          <a:effectRef idx="0">
+            <a:schemeClr val="accent1"/>
+          </a:effectRef>
+          <a:fontRef idx="minor">
+            <a:schemeClr val="lt1"/>
+          </a:fontRef>
+        </p:style>
+        <p:txBody>
+          <a:bodyPr rtlCol="0" anchor="ctr"/>
+          <a:lstStyle/>
+          <a:p>
+            <a:pPr algn="ctr"/>
+            <a:endParaRPr kumimoji="1" lang="ja-JP" altLang="en-US"/>
+          </a:p>
+        </p:txBody>
+      </p:sp>
+      <p:sp>
+        <p:nvSpPr>
+          <p:cNvPr id="13" name="楕円 12">
+            <a:extLst>
+              <a:ext uri="{FF2B5EF4-FFF2-40B4-BE49-F238E27FC236}">
+                <a16:creationId xmlns:a16="http://schemas.microsoft.com/office/drawing/2014/main" id="{673C9526-63F9-4F46-B507-6AB8933F0C8B}"/>
+              </a:ext>
+            </a:extLst>
+          </p:cNvPr>
+          <p:cNvSpPr/>
+          <p:nvPr/>
+        </p:nvSpPr>
+        <p:spPr>
+          <a:xfrm>
+            <a:off x="3429000" y="4882896"/>
+            <a:ext cx="393192" cy="438912"/>
+          </a:xfrm>
+          <a:prstGeom prst="ellipse">
+            <a:avLst/>
+          </a:prstGeom>
+        </p:spPr>
+        <p:style>
+          <a:lnRef idx="2">
+            <a:schemeClr val="accent1">
+              <a:shade val="50000"/>
+            </a:schemeClr>
+          </a:lnRef>
+          <a:fillRef idx="1">
+            <a:schemeClr val="accent1"/>
+          </a:fillRef>
+          <a:effectRef idx="0">
+            <a:schemeClr val="accent1"/>
+          </a:effectRef>
+          <a:fontRef idx="minor">
+            <a:schemeClr val="lt1"/>
+          </a:fontRef>
+        </p:style>
+        <p:txBody>
+          <a:bodyPr rtlCol="0" anchor="ctr"/>
+          <a:lstStyle/>
+          <a:p>
+            <a:pPr algn="ctr"/>
+            <a:endParaRPr kumimoji="1" lang="ja-JP" altLang="en-US"/>
+          </a:p>
+        </p:txBody>
+      </p:sp>
+      <p:sp>
+        <p:nvSpPr>
+          <p:cNvPr id="14" name="楕円 13">
+            <a:extLst>
+              <a:ext uri="{FF2B5EF4-FFF2-40B4-BE49-F238E27FC236}">
+                <a16:creationId xmlns:a16="http://schemas.microsoft.com/office/drawing/2014/main" id="{AAA8DC7F-6EA4-4A4C-BEF5-93339F2C7F43}"/>
+              </a:ext>
+            </a:extLst>
+          </p:cNvPr>
+          <p:cNvSpPr/>
+          <p:nvPr/>
+        </p:nvSpPr>
+        <p:spPr>
+          <a:xfrm>
+            <a:off x="2639568" y="4456177"/>
+            <a:ext cx="393192" cy="438912"/>
+          </a:xfrm>
+          <a:prstGeom prst="ellipse">
+            <a:avLst/>
+          </a:prstGeom>
+        </p:spPr>
+        <p:style>
+          <a:lnRef idx="2">
+            <a:schemeClr val="accent1">
+              <a:shade val="50000"/>
+            </a:schemeClr>
+          </a:lnRef>
+          <a:fillRef idx="1">
+            <a:schemeClr val="accent1"/>
+          </a:fillRef>
+          <a:effectRef idx="0">
+            <a:schemeClr val="accent1"/>
+          </a:effectRef>
+          <a:fontRef idx="minor">
+            <a:schemeClr val="lt1"/>
+          </a:fontRef>
+        </p:style>
+        <p:txBody>
+          <a:bodyPr rtlCol="0" anchor="ctr"/>
+          <a:lstStyle/>
+          <a:p>
+            <a:pPr algn="ctr"/>
+            <a:endParaRPr kumimoji="1" lang="ja-JP" altLang="en-US"/>
+          </a:p>
+        </p:txBody>
+      </p:sp>
+      <p:sp>
+        <p:nvSpPr>
+          <p:cNvPr id="15" name="楕円 14">
+            <a:extLst>
+              <a:ext uri="{FF2B5EF4-FFF2-40B4-BE49-F238E27FC236}">
+                <a16:creationId xmlns:a16="http://schemas.microsoft.com/office/drawing/2014/main" id="{790E5A46-6D4F-4785-9BD2-C3710EF2D01C}"/>
+              </a:ext>
+            </a:extLst>
+          </p:cNvPr>
+          <p:cNvSpPr/>
+          <p:nvPr/>
+        </p:nvSpPr>
+        <p:spPr>
+          <a:xfrm>
+            <a:off x="3346704" y="2514600"/>
+            <a:ext cx="393192" cy="438912"/>
+          </a:xfrm>
+          <a:prstGeom prst="ellipse">
+            <a:avLst/>
+          </a:prstGeom>
+        </p:spPr>
+        <p:style>
+          <a:lnRef idx="2">
+            <a:schemeClr val="accent1">
+              <a:shade val="50000"/>
+            </a:schemeClr>
+          </a:lnRef>
+          <a:fillRef idx="1">
+            <a:schemeClr val="accent1"/>
+          </a:fillRef>
+          <a:effectRef idx="0">
+            <a:schemeClr val="accent1"/>
+          </a:effectRef>
+          <a:fontRef idx="minor">
+            <a:schemeClr val="lt1"/>
+          </a:fontRef>
+        </p:style>
+        <p:txBody>
+          <a:bodyPr rtlCol="0" anchor="ctr"/>
+          <a:lstStyle/>
+          <a:p>
+            <a:pPr algn="ctr"/>
+            <a:endParaRPr kumimoji="1" lang="ja-JP" altLang="en-US"/>
+          </a:p>
+        </p:txBody>
+      </p:sp>
+      <p:sp>
+        <p:nvSpPr>
+          <p:cNvPr id="16" name="楕円 15">
+            <a:extLst>
+              <a:ext uri="{FF2B5EF4-FFF2-40B4-BE49-F238E27FC236}">
+                <a16:creationId xmlns:a16="http://schemas.microsoft.com/office/drawing/2014/main" id="{54E718A8-C194-4C20-BB55-1FDE59670CB8}"/>
+              </a:ext>
+            </a:extLst>
+          </p:cNvPr>
+          <p:cNvSpPr/>
+          <p:nvPr/>
+        </p:nvSpPr>
+        <p:spPr>
+          <a:xfrm>
+            <a:off x="6385560" y="4885944"/>
+            <a:ext cx="393192" cy="438912"/>
+          </a:xfrm>
+          <a:prstGeom prst="ellipse">
+            <a:avLst/>
+          </a:prstGeom>
+        </p:spPr>
+        <p:style>
+          <a:lnRef idx="2">
+            <a:schemeClr val="accent1">
+              <a:shade val="50000"/>
+            </a:schemeClr>
+          </a:lnRef>
+          <a:fillRef idx="1">
+            <a:schemeClr val="accent1"/>
+          </a:fillRef>
+          <a:effectRef idx="0">
+            <a:schemeClr val="accent1"/>
+          </a:effectRef>
+          <a:fontRef idx="minor">
+            <a:schemeClr val="lt1"/>
+          </a:fontRef>
+        </p:style>
+        <p:txBody>
+          <a:bodyPr rtlCol="0" anchor="ctr"/>
+          <a:lstStyle/>
+          <a:p>
+            <a:pPr algn="ctr"/>
+            <a:endParaRPr kumimoji="1" lang="ja-JP" altLang="en-US"/>
+          </a:p>
+        </p:txBody>
+      </p:sp>
+      <p:sp>
+        <p:nvSpPr>
+          <p:cNvPr id="17" name="楕円 16">
+            <a:extLst>
+              <a:ext uri="{FF2B5EF4-FFF2-40B4-BE49-F238E27FC236}">
+                <a16:creationId xmlns:a16="http://schemas.microsoft.com/office/drawing/2014/main" id="{90FF442E-8CD0-4054-AA21-54424510B52E}"/>
+              </a:ext>
+            </a:extLst>
+          </p:cNvPr>
+          <p:cNvSpPr/>
+          <p:nvPr/>
+        </p:nvSpPr>
+        <p:spPr>
+          <a:xfrm>
+            <a:off x="4905756" y="3648456"/>
+            <a:ext cx="425196" cy="542544"/>
+          </a:xfrm>
+          <a:prstGeom prst="ellipse">
+            <a:avLst/>
+          </a:prstGeom>
+        </p:spPr>
+        <p:style>
+          <a:lnRef idx="2">
+            <a:schemeClr val="accent1">
+              <a:shade val="50000"/>
+            </a:schemeClr>
+          </a:lnRef>
+          <a:fillRef idx="1">
+            <a:schemeClr val="accent1"/>
+          </a:fillRef>
+          <a:effectRef idx="0">
+            <a:schemeClr val="accent1"/>
+          </a:effectRef>
+          <a:fontRef idx="minor">
+            <a:schemeClr val="lt1"/>
+          </a:fontRef>
+        </p:style>
+        <p:txBody>
+          <a:bodyPr rtlCol="0" anchor="ctr"/>
+          <a:lstStyle/>
+          <a:p>
+            <a:pPr algn="ctr"/>
+            <a:endParaRPr kumimoji="1" lang="ja-JP" altLang="en-US"/>
+          </a:p>
+        </p:txBody>
+      </p:sp>
+      <p:sp>
+        <p:nvSpPr>
+          <p:cNvPr id="18" name="楕円 17">
+            <a:extLst>
+              <a:ext uri="{FF2B5EF4-FFF2-40B4-BE49-F238E27FC236}">
+                <a16:creationId xmlns:a16="http://schemas.microsoft.com/office/drawing/2014/main" id="{845A5E4D-DE58-4E0C-A3D0-E279F0219CB5}"/>
+              </a:ext>
+            </a:extLst>
+          </p:cNvPr>
+          <p:cNvSpPr/>
+          <p:nvPr/>
+        </p:nvSpPr>
+        <p:spPr>
+          <a:xfrm>
+            <a:off x="4861560" y="4885944"/>
+            <a:ext cx="393192" cy="438912"/>
+          </a:xfrm>
+          <a:prstGeom prst="ellipse">
+            <a:avLst/>
+          </a:prstGeom>
+        </p:spPr>
+        <p:style>
+          <a:lnRef idx="2">
+            <a:schemeClr val="accent1">
+              <a:shade val="50000"/>
+            </a:schemeClr>
+          </a:lnRef>
+          <a:fillRef idx="1">
+            <a:schemeClr val="accent1"/>
+          </a:fillRef>
+          <a:effectRef idx="0">
+            <a:schemeClr val="accent1"/>
+          </a:effectRef>
+          <a:fontRef idx="minor">
+            <a:schemeClr val="lt1"/>
+          </a:fontRef>
+        </p:style>
+        <p:txBody>
+          <a:bodyPr rtlCol="0" anchor="ctr"/>
+          <a:lstStyle/>
+          <a:p>
+            <a:pPr algn="ctr"/>
+            <a:endParaRPr kumimoji="1" lang="ja-JP" altLang="en-US"/>
+          </a:p>
+        </p:txBody>
+      </p:sp>
+      <p:sp>
+        <p:nvSpPr>
+          <p:cNvPr id="19" name="楕円 18">
+            <a:extLst>
+              <a:ext uri="{FF2B5EF4-FFF2-40B4-BE49-F238E27FC236}">
+                <a16:creationId xmlns:a16="http://schemas.microsoft.com/office/drawing/2014/main" id="{81933CC8-99D5-4AE5-9B81-4F5565E33C58}"/>
+              </a:ext>
+            </a:extLst>
+          </p:cNvPr>
+          <p:cNvSpPr/>
+          <p:nvPr/>
+        </p:nvSpPr>
+        <p:spPr>
+          <a:xfrm>
+            <a:off x="6385560" y="2444496"/>
+            <a:ext cx="393192" cy="438912"/>
+          </a:xfrm>
+          <a:prstGeom prst="ellipse">
+            <a:avLst/>
+          </a:prstGeom>
+        </p:spPr>
+        <p:style>
+          <a:lnRef idx="2">
+            <a:schemeClr val="accent1">
+              <a:shade val="50000"/>
+            </a:schemeClr>
+          </a:lnRef>
+          <a:fillRef idx="1">
+            <a:schemeClr val="accent1"/>
+          </a:fillRef>
+          <a:effectRef idx="0">
+            <a:schemeClr val="accent1"/>
+          </a:effectRef>
+          <a:fontRef idx="minor">
+            <a:schemeClr val="lt1"/>
+          </a:fontRef>
+        </p:style>
+        <p:txBody>
+          <a:bodyPr rtlCol="0" anchor="ctr"/>
+          <a:lstStyle/>
+          <a:p>
+            <a:pPr algn="ctr"/>
+            <a:endParaRPr kumimoji="1" lang="ja-JP" altLang="en-US"/>
+          </a:p>
+        </p:txBody>
+      </p:sp>
+      <p:sp>
+        <p:nvSpPr>
+          <p:cNvPr id="20" name="楕円 19">
+            <a:extLst>
+              <a:ext uri="{FF2B5EF4-FFF2-40B4-BE49-F238E27FC236}">
+                <a16:creationId xmlns:a16="http://schemas.microsoft.com/office/drawing/2014/main" id="{E3C0F741-AB12-441B-BE49-6E3573FA328B}"/>
+              </a:ext>
+            </a:extLst>
+          </p:cNvPr>
+          <p:cNvSpPr/>
+          <p:nvPr/>
+        </p:nvSpPr>
+        <p:spPr>
+          <a:xfrm>
+            <a:off x="4861560" y="2514600"/>
+            <a:ext cx="393192" cy="438912"/>
+          </a:xfrm>
+          <a:prstGeom prst="ellipse">
+            <a:avLst/>
+          </a:prstGeom>
+        </p:spPr>
+        <p:style>
+          <a:lnRef idx="2">
+            <a:schemeClr val="accent1">
+              <a:shade val="50000"/>
+            </a:schemeClr>
+          </a:lnRef>
+          <a:fillRef idx="1">
+            <a:schemeClr val="accent1"/>
+          </a:fillRef>
+          <a:effectRef idx="0">
+            <a:schemeClr val="accent1"/>
+          </a:effectRef>
+          <a:fontRef idx="minor">
+            <a:schemeClr val="lt1"/>
+          </a:fontRef>
+        </p:style>
+        <p:txBody>
+          <a:bodyPr rtlCol="0" anchor="ctr"/>
+          <a:lstStyle/>
+          <a:p>
+            <a:pPr algn="ctr"/>
+            <a:endParaRPr kumimoji="1" lang="ja-JP" altLang="en-US"/>
+          </a:p>
+        </p:txBody>
+      </p:sp>
+    </p:spTree>
+    <p:extLst>
+      <p:ext uri="{BB962C8B-B14F-4D97-AF65-F5344CB8AC3E}">
+        <p14:creationId xmlns:p14="http://schemas.microsoft.com/office/powerpoint/2010/main" val="332326839"/>
       </p:ext>
     </p:extLst>
   </p:cSld>

--- a/3DLV3/Plam/ゲーム設計.pptx
+++ b/3DLV3/Plam/ゲーム設計.pptx
@@ -5,7 +5,7 @@
     <p:sldMasterId id="2147483889" r:id="rId1"/>
   </p:sldMasterIdLst>
   <p:notesMasterIdLst>
-    <p:notesMasterId r:id="rId11"/>
+    <p:notesMasterId r:id="rId12"/>
   </p:notesMasterIdLst>
   <p:sldIdLst>
     <p:sldId id="264" r:id="rId2"/>
@@ -15,8 +15,9 @@
     <p:sldId id="273" r:id="rId6"/>
     <p:sldId id="280" r:id="rId7"/>
     <p:sldId id="279" r:id="rId8"/>
-    <p:sldId id="278" r:id="rId9"/>
+    <p:sldId id="282" r:id="rId9"/>
     <p:sldId id="281" r:id="rId10"/>
+    <p:sldId id="278" r:id="rId11"/>
   </p:sldIdLst>
   <p:sldSz cx="12192000" cy="6858000"/>
   <p:notesSz cx="6858000" cy="9144000"/>
@@ -185,11 +186,34 @@
   </pc:docChgLst>
   <pc:docChgLst>
     <pc:chgData name="kousuke yamamoto" userId="516c4d66ab16f868" providerId="LiveId" clId="{D5857573-2C41-4D75-AB9F-5CA89102AE51}"/>
-    <pc:docChg chg="custSel addSld delSld modSld">
-      <pc:chgData name="kousuke yamamoto" userId="516c4d66ab16f868" providerId="LiveId" clId="{D5857573-2C41-4D75-AB9F-5CA89102AE51}" dt="2026-10-07T06:11:25.329" v="579" actId="1076"/>
+    <pc:docChg chg="undo custSel addSld delSld modSld sldOrd">
+      <pc:chgData name="kousuke yamamoto" userId="516c4d66ab16f868" providerId="LiveId" clId="{D5857573-2C41-4D75-AB9F-5CA89102AE51}" dt="2026-10-08T06:04:18.056" v="1635" actId="20577"/>
       <pc:docMkLst>
         <pc:docMk/>
       </pc:docMkLst>
+      <pc:sldChg chg="delSp mod">
+        <pc:chgData name="kousuke yamamoto" userId="516c4d66ab16f868" providerId="LiveId" clId="{D5857573-2C41-4D75-AB9F-5CA89102AE51}" dt="2026-10-08T05:56:33.320" v="1532" actId="478"/>
+        <pc:sldMkLst>
+          <pc:docMk/>
+          <pc:sldMk cId="0" sldId="257"/>
+        </pc:sldMkLst>
+        <pc:spChg chg="del">
+          <ac:chgData name="kousuke yamamoto" userId="516c4d66ab16f868" providerId="LiveId" clId="{D5857573-2C41-4D75-AB9F-5CA89102AE51}" dt="2026-10-08T05:56:32.230" v="1531" actId="478"/>
+          <ac:spMkLst>
+            <pc:docMk/>
+            <pc:sldMk cId="0" sldId="257"/>
+            <ac:spMk id="9" creationId="{00039B03-7452-4948-AB40-CEC2825954EC}"/>
+          </ac:spMkLst>
+        </pc:spChg>
+        <pc:spChg chg="del">
+          <ac:chgData name="kousuke yamamoto" userId="516c4d66ab16f868" providerId="LiveId" clId="{D5857573-2C41-4D75-AB9F-5CA89102AE51}" dt="2026-10-08T05:56:33.320" v="1532" actId="478"/>
+          <ac:spMkLst>
+            <pc:docMk/>
+            <pc:sldMk cId="0" sldId="257"/>
+            <ac:spMk id="11" creationId="{13BABEA7-2FB4-4D0E-9CE5-C9EE47AFD26F}"/>
+          </ac:spMkLst>
+        </pc:spChg>
+      </pc:sldChg>
       <pc:sldChg chg="del">
         <pc:chgData name="kousuke yamamoto" userId="516c4d66ab16f868" providerId="LiveId" clId="{D5857573-2C41-4D75-AB9F-5CA89102AE51}" dt="2026-10-06T07:45:46.574" v="1" actId="2696"/>
         <pc:sldMkLst>
@@ -744,14 +768,14 @@
           </ac:cxnSpMkLst>
         </pc:cxnChg>
       </pc:sldChg>
-      <pc:sldChg chg="addSp delSp modSp new mod">
-        <pc:chgData name="kousuke yamamoto" userId="516c4d66ab16f868" providerId="LiveId" clId="{D5857573-2C41-4D75-AB9F-5CA89102AE51}" dt="2026-10-07T06:11:25.329" v="579" actId="1076"/>
+      <pc:sldChg chg="addSp delSp modSp new mod ord">
+        <pc:chgData name="kousuke yamamoto" userId="516c4d66ab16f868" providerId="LiveId" clId="{D5857573-2C41-4D75-AB9F-5CA89102AE51}" dt="2026-10-08T05:39:24.191" v="1477"/>
         <pc:sldMkLst>
           <pc:docMk/>
           <pc:sldMk cId="332326839" sldId="281"/>
         </pc:sldMkLst>
         <pc:spChg chg="add mod">
-          <ac:chgData name="kousuke yamamoto" userId="516c4d66ab16f868" providerId="LiveId" clId="{D5857573-2C41-4D75-AB9F-5CA89102AE51}" dt="2026-10-07T06:06:56.466" v="547" actId="14100"/>
+          <ac:chgData name="kousuke yamamoto" userId="516c4d66ab16f868" providerId="LiveId" clId="{D5857573-2C41-4D75-AB9F-5CA89102AE51}" dt="2026-10-08T05:36:10.983" v="1314" actId="1076"/>
           <ac:spMkLst>
             <pc:docMk/>
             <pc:sldMk cId="332326839" sldId="281"/>
@@ -764,6 +788,14 @@
             <pc:docMk/>
             <pc:sldMk cId="332326839" sldId="281"/>
             <ac:spMk id="3" creationId="{282DD71E-1765-4184-A68C-EEAB0AA7D6CB}"/>
+          </ac:spMkLst>
+        </pc:spChg>
+        <pc:spChg chg="add mod">
+          <ac:chgData name="kousuke yamamoto" userId="516c4d66ab16f868" providerId="LiveId" clId="{D5857573-2C41-4D75-AB9F-5CA89102AE51}" dt="2026-10-08T05:39:14.041" v="1473" actId="20577"/>
+          <ac:spMkLst>
+            <pc:docMk/>
+            <pc:sldMk cId="332326839" sldId="281"/>
+            <ac:spMk id="3" creationId="{E52E4B79-EA2F-4BAA-8F50-398E1B341567}"/>
           </ac:spMkLst>
         </pc:spChg>
         <pc:spChg chg="add del mod">
@@ -799,7 +831,7 @@
           </ac:spMkLst>
         </pc:spChg>
         <pc:spChg chg="add mod">
-          <ac:chgData name="kousuke yamamoto" userId="516c4d66ab16f868" providerId="LiveId" clId="{D5857573-2C41-4D75-AB9F-5CA89102AE51}" dt="2026-10-07T06:06:59.077" v="548"/>
+          <ac:chgData name="kousuke yamamoto" userId="516c4d66ab16f868" providerId="LiveId" clId="{D5857573-2C41-4D75-AB9F-5CA89102AE51}" dt="2026-10-08T05:36:05.175" v="1313" actId="1076"/>
           <ac:spMkLst>
             <pc:docMk/>
             <pc:sldMk cId="332326839" sldId="281"/>
@@ -807,7 +839,7 @@
           </ac:spMkLst>
         </pc:spChg>
         <pc:spChg chg="add mod">
-          <ac:chgData name="kousuke yamamoto" userId="516c4d66ab16f868" providerId="LiveId" clId="{D5857573-2C41-4D75-AB9F-5CA89102AE51}" dt="2026-10-07T06:06:59.309" v="549"/>
+          <ac:chgData name="kousuke yamamoto" userId="516c4d66ab16f868" providerId="LiveId" clId="{D5857573-2C41-4D75-AB9F-5CA89102AE51}" dt="2026-10-08T05:35:45.479" v="1308" actId="1076"/>
           <ac:spMkLst>
             <pc:docMk/>
             <pc:sldMk cId="332326839" sldId="281"/>
@@ -815,7 +847,7 @@
           </ac:spMkLst>
         </pc:spChg>
         <pc:spChg chg="add mod">
-          <ac:chgData name="kousuke yamamoto" userId="516c4d66ab16f868" providerId="LiveId" clId="{D5857573-2C41-4D75-AB9F-5CA89102AE51}" dt="2026-10-07T06:11:25.329" v="579" actId="1076"/>
+          <ac:chgData name="kousuke yamamoto" userId="516c4d66ab16f868" providerId="LiveId" clId="{D5857573-2C41-4D75-AB9F-5CA89102AE51}" dt="2026-10-08T05:36:30.390" v="1320" actId="1076"/>
           <ac:spMkLst>
             <pc:docMk/>
             <pc:sldMk cId="332326839" sldId="281"/>
@@ -823,7 +855,7 @@
           </ac:spMkLst>
         </pc:spChg>
         <pc:spChg chg="add mod">
-          <ac:chgData name="kousuke yamamoto" userId="516c4d66ab16f868" providerId="LiveId" clId="{D5857573-2C41-4D75-AB9F-5CA89102AE51}" dt="2026-10-07T06:11:24.043" v="578" actId="1076"/>
+          <ac:chgData name="kousuke yamamoto" userId="516c4d66ab16f868" providerId="LiveId" clId="{D5857573-2C41-4D75-AB9F-5CA89102AE51}" dt="2026-10-08T05:36:27.590" v="1319" actId="1076"/>
           <ac:spMkLst>
             <pc:docMk/>
             <pc:sldMk cId="332326839" sldId="281"/>
@@ -831,7 +863,7 @@
           </ac:spMkLst>
         </pc:spChg>
         <pc:spChg chg="add mod">
-          <ac:chgData name="kousuke yamamoto" userId="516c4d66ab16f868" providerId="LiveId" clId="{D5857573-2C41-4D75-AB9F-5CA89102AE51}" dt="2026-10-07T06:11:23.154" v="577" actId="1076"/>
+          <ac:chgData name="kousuke yamamoto" userId="516c4d66ab16f868" providerId="LiveId" clId="{D5857573-2C41-4D75-AB9F-5CA89102AE51}" dt="2026-10-08T05:36:42.567" v="1325" actId="1076"/>
           <ac:spMkLst>
             <pc:docMk/>
             <pc:sldMk cId="332326839" sldId="281"/>
@@ -839,7 +871,7 @@
           </ac:spMkLst>
         </pc:spChg>
         <pc:spChg chg="add mod">
-          <ac:chgData name="kousuke yamamoto" userId="516c4d66ab16f868" providerId="LiveId" clId="{D5857573-2C41-4D75-AB9F-5CA89102AE51}" dt="2026-10-07T06:11:21.602" v="576" actId="1076"/>
+          <ac:chgData name="kousuke yamamoto" userId="516c4d66ab16f868" providerId="LiveId" clId="{D5857573-2C41-4D75-AB9F-5CA89102AE51}" dt="2026-10-08T05:36:36.855" v="1323" actId="1076"/>
           <ac:spMkLst>
             <pc:docMk/>
             <pc:sldMk cId="332326839" sldId="281"/>
@@ -847,7 +879,7 @@
           </ac:spMkLst>
         </pc:spChg>
         <pc:spChg chg="add mod">
-          <ac:chgData name="kousuke yamamoto" userId="516c4d66ab16f868" providerId="LiveId" clId="{D5857573-2C41-4D75-AB9F-5CA89102AE51}" dt="2026-10-07T06:11:20.410" v="575" actId="1076"/>
+          <ac:chgData name="kousuke yamamoto" userId="516c4d66ab16f868" providerId="LiveId" clId="{D5857573-2C41-4D75-AB9F-5CA89102AE51}" dt="2026-10-08T05:36:23.854" v="1317" actId="1076"/>
           <ac:spMkLst>
             <pc:docMk/>
             <pc:sldMk cId="332326839" sldId="281"/>
@@ -855,7 +887,7 @@
           </ac:spMkLst>
         </pc:spChg>
         <pc:spChg chg="add mod">
-          <ac:chgData name="kousuke yamamoto" userId="516c4d66ab16f868" providerId="LiveId" clId="{D5857573-2C41-4D75-AB9F-5CA89102AE51}" dt="2026-10-07T06:11:19.155" v="574" actId="1076"/>
+          <ac:chgData name="kousuke yamamoto" userId="516c4d66ab16f868" providerId="LiveId" clId="{D5857573-2C41-4D75-AB9F-5CA89102AE51}" dt="2026-10-08T05:36:20.550" v="1315" actId="1076"/>
           <ac:spMkLst>
             <pc:docMk/>
             <pc:sldMk cId="332326839" sldId="281"/>
@@ -863,7 +895,7 @@
           </ac:spMkLst>
         </pc:spChg>
         <pc:spChg chg="add mod">
-          <ac:chgData name="kousuke yamamoto" userId="516c4d66ab16f868" providerId="LiveId" clId="{D5857573-2C41-4D75-AB9F-5CA89102AE51}" dt="2026-10-07T06:11:16.730" v="573" actId="1076"/>
+          <ac:chgData name="kousuke yamamoto" userId="516c4d66ab16f868" providerId="LiveId" clId="{D5857573-2C41-4D75-AB9F-5CA89102AE51}" dt="2026-10-08T05:37:31.605" v="1346" actId="1076"/>
           <ac:spMkLst>
             <pc:docMk/>
             <pc:sldMk cId="332326839" sldId="281"/>
@@ -871,7 +903,7 @@
           </ac:spMkLst>
         </pc:spChg>
         <pc:spChg chg="add mod">
-          <ac:chgData name="kousuke yamamoto" userId="516c4d66ab16f868" providerId="LiveId" clId="{D5857573-2C41-4D75-AB9F-5CA89102AE51}" dt="2026-10-07T06:11:11.812" v="572" actId="1076"/>
+          <ac:chgData name="kousuke yamamoto" userId="516c4d66ab16f868" providerId="LiveId" clId="{D5857573-2C41-4D75-AB9F-5CA89102AE51}" dt="2026-10-08T05:35:22.215" v="1298" actId="1076"/>
           <ac:spMkLst>
             <pc:docMk/>
             <pc:sldMk cId="332326839" sldId="281"/>
@@ -879,7 +911,7 @@
           </ac:spMkLst>
         </pc:spChg>
         <pc:spChg chg="add mod">
-          <ac:chgData name="kousuke yamamoto" userId="516c4d66ab16f868" providerId="LiveId" clId="{D5857573-2C41-4D75-AB9F-5CA89102AE51}" dt="2026-10-07T06:11:03.050" v="569" actId="1076"/>
+          <ac:chgData name="kousuke yamamoto" userId="516c4d66ab16f868" providerId="LiveId" clId="{D5857573-2C41-4D75-AB9F-5CA89102AE51}" dt="2026-10-08T05:36:34.263" v="1322" actId="1076"/>
           <ac:spMkLst>
             <pc:docMk/>
             <pc:sldMk cId="332326839" sldId="281"/>
@@ -887,7 +919,7 @@
           </ac:spMkLst>
         </pc:spChg>
         <pc:spChg chg="add mod">
-          <ac:chgData name="kousuke yamamoto" userId="516c4d66ab16f868" providerId="LiveId" clId="{D5857573-2C41-4D75-AB9F-5CA89102AE51}" dt="2026-10-07T06:10:57.387" v="568" actId="1076"/>
+          <ac:chgData name="kousuke yamamoto" userId="516c4d66ab16f868" providerId="LiveId" clId="{D5857573-2C41-4D75-AB9F-5CA89102AE51}" dt="2026-10-08T05:36:22.151" v="1316" actId="1076"/>
           <ac:spMkLst>
             <pc:docMk/>
             <pc:sldMk cId="332326839" sldId="281"/>
@@ -895,11 +927,225 @@
           </ac:spMkLst>
         </pc:spChg>
         <pc:spChg chg="add mod">
-          <ac:chgData name="kousuke yamamoto" userId="516c4d66ab16f868" providerId="LiveId" clId="{D5857573-2C41-4D75-AB9F-5CA89102AE51}" dt="2026-10-07T06:10:52.866" v="567" actId="1076"/>
+          <ac:chgData name="kousuke yamamoto" userId="516c4d66ab16f868" providerId="LiveId" clId="{D5857573-2C41-4D75-AB9F-5CA89102AE51}" dt="2026-10-08T05:35:08.663" v="1294" actId="1076"/>
           <ac:spMkLst>
             <pc:docMk/>
             <pc:sldMk cId="332326839" sldId="281"/>
             <ac:spMk id="20" creationId="{E3C0F741-AB12-441B-BE49-6E3573FA328B}"/>
+          </ac:spMkLst>
+        </pc:spChg>
+        <pc:spChg chg="add mod">
+          <ac:chgData name="kousuke yamamoto" userId="516c4d66ab16f868" providerId="LiveId" clId="{D5857573-2C41-4D75-AB9F-5CA89102AE51}" dt="2026-10-08T05:37:16.544" v="1341" actId="1076"/>
+          <ac:spMkLst>
+            <pc:docMk/>
+            <pc:sldMk cId="332326839" sldId="281"/>
+            <ac:spMk id="21" creationId="{A867E8D4-47EA-4B45-B6B8-DFB9FE680D5E}"/>
+          </ac:spMkLst>
+        </pc:spChg>
+        <pc:spChg chg="add mod">
+          <ac:chgData name="kousuke yamamoto" userId="516c4d66ab16f868" providerId="LiveId" clId="{D5857573-2C41-4D75-AB9F-5CA89102AE51}" dt="2026-10-08T05:36:47.663" v="1328" actId="1076"/>
+          <ac:spMkLst>
+            <pc:docMk/>
+            <pc:sldMk cId="332326839" sldId="281"/>
+            <ac:spMk id="22" creationId="{D9D6815E-2842-496F-9F85-10875ACA5D9D}"/>
+          </ac:spMkLst>
+        </pc:spChg>
+        <pc:spChg chg="add mod">
+          <ac:chgData name="kousuke yamamoto" userId="516c4d66ab16f868" providerId="LiveId" clId="{D5857573-2C41-4D75-AB9F-5CA89102AE51}" dt="2026-10-08T05:37:04.249" v="1335" actId="1076"/>
+          <ac:spMkLst>
+            <pc:docMk/>
+            <pc:sldMk cId="332326839" sldId="281"/>
+            <ac:spMk id="23" creationId="{DA7286D5-0334-4C02-B247-FC3DD518A09B}"/>
+          </ac:spMkLst>
+        </pc:spChg>
+        <pc:spChg chg="add mod">
+          <ac:chgData name="kousuke yamamoto" userId="516c4d66ab16f868" providerId="LiveId" clId="{D5857573-2C41-4D75-AB9F-5CA89102AE51}" dt="2026-10-08T05:37:12.257" v="1338" actId="1076"/>
+          <ac:spMkLst>
+            <pc:docMk/>
+            <pc:sldMk cId="332326839" sldId="281"/>
+            <ac:spMk id="24" creationId="{A01A2207-C14C-46CC-8978-57E8A75BAF0C}"/>
+          </ac:spMkLst>
+        </pc:spChg>
+        <pc:spChg chg="add mod">
+          <ac:chgData name="kousuke yamamoto" userId="516c4d66ab16f868" providerId="LiveId" clId="{D5857573-2C41-4D75-AB9F-5CA89102AE51}" dt="2026-10-08T05:37:07.118" v="1336" actId="1076"/>
+          <ac:spMkLst>
+            <pc:docMk/>
+            <pc:sldMk cId="332326839" sldId="281"/>
+            <ac:spMk id="25" creationId="{B9E2E807-F23B-44B4-81F0-CD4702602729}"/>
+          </ac:spMkLst>
+        </pc:spChg>
+        <pc:spChg chg="add mod">
+          <ac:chgData name="kousuke yamamoto" userId="516c4d66ab16f868" providerId="LiveId" clId="{D5857573-2C41-4D75-AB9F-5CA89102AE51}" dt="2026-10-08T05:37:04.249" v="1335" actId="1076"/>
+          <ac:spMkLst>
+            <pc:docMk/>
+            <pc:sldMk cId="332326839" sldId="281"/>
+            <ac:spMk id="26" creationId="{6674BA37-8890-4F36-ABA3-0E9DF2D91E47}"/>
+          </ac:spMkLst>
+        </pc:spChg>
+        <pc:spChg chg="add mod">
+          <ac:chgData name="kousuke yamamoto" userId="516c4d66ab16f868" providerId="LiveId" clId="{D5857573-2C41-4D75-AB9F-5CA89102AE51}" dt="2026-10-08T05:37:23.319" v="1343" actId="1076"/>
+          <ac:spMkLst>
+            <pc:docMk/>
+            <pc:sldMk cId="332326839" sldId="281"/>
+            <ac:spMk id="27" creationId="{E1383340-5DAD-45F0-8617-7B9C21837BCC}"/>
+          </ac:spMkLst>
+        </pc:spChg>
+        <pc:spChg chg="add mod">
+          <ac:chgData name="kousuke yamamoto" userId="516c4d66ab16f868" providerId="LiveId" clId="{D5857573-2C41-4D75-AB9F-5CA89102AE51}" dt="2026-10-08T05:37:28.640" v="1345" actId="1076"/>
+          <ac:spMkLst>
+            <pc:docMk/>
+            <pc:sldMk cId="332326839" sldId="281"/>
+            <ac:spMk id="28" creationId="{2B7139EB-8193-4B7E-95C0-9C60DF46EB90}"/>
+          </ac:spMkLst>
+        </pc:spChg>
+        <pc:spChg chg="add mod">
+          <ac:chgData name="kousuke yamamoto" userId="516c4d66ab16f868" providerId="LiveId" clId="{D5857573-2C41-4D75-AB9F-5CA89102AE51}" dt="2026-10-08T05:38:11.276" v="1360" actId="14100"/>
+          <ac:spMkLst>
+            <pc:docMk/>
+            <pc:sldMk cId="332326839" sldId="281"/>
+            <ac:spMk id="29" creationId="{D7527CB8-8DC7-46C5-A80E-F5C07024A608}"/>
+          </ac:spMkLst>
+        </pc:spChg>
+        <pc:spChg chg="add mod">
+          <ac:chgData name="kousuke yamamoto" userId="516c4d66ab16f868" providerId="LiveId" clId="{D5857573-2C41-4D75-AB9F-5CA89102AE51}" dt="2026-10-08T05:38:12.084" v="1362" actId="14100"/>
+          <ac:spMkLst>
+            <pc:docMk/>
+            <pc:sldMk cId="332326839" sldId="281"/>
+            <ac:spMk id="30" creationId="{CA9E4F79-7CBA-45FB-A51C-E12EEC8E42C5}"/>
+          </ac:spMkLst>
+        </pc:spChg>
+        <pc:spChg chg="add mod">
+          <ac:chgData name="kousuke yamamoto" userId="516c4d66ab16f868" providerId="LiveId" clId="{D5857573-2C41-4D75-AB9F-5CA89102AE51}" dt="2026-10-08T05:37:48.958" v="1354" actId="1076"/>
+          <ac:spMkLst>
+            <pc:docMk/>
+            <pc:sldMk cId="332326839" sldId="281"/>
+            <ac:spMk id="31" creationId="{613F05B1-B1E5-4C92-832A-40F85ACE7E2E}"/>
+          </ac:spMkLst>
+        </pc:spChg>
+        <pc:spChg chg="add mod">
+          <ac:chgData name="kousuke yamamoto" userId="516c4d66ab16f868" providerId="LiveId" clId="{D5857573-2C41-4D75-AB9F-5CA89102AE51}" dt="2026-10-08T05:37:45.087" v="1353" actId="1076"/>
+          <ac:spMkLst>
+            <pc:docMk/>
+            <pc:sldMk cId="332326839" sldId="281"/>
+            <ac:spMk id="32" creationId="{4F685951-D9FA-46C8-BEA6-826D435742A0}"/>
+          </ac:spMkLst>
+        </pc:spChg>
+      </pc:sldChg>
+      <pc:sldChg chg="addSp delSp modSp new mod">
+        <pc:chgData name="kousuke yamamoto" userId="516c4d66ab16f868" providerId="LiveId" clId="{D5857573-2C41-4D75-AB9F-5CA89102AE51}" dt="2026-10-08T06:04:18.056" v="1635" actId="20577"/>
+        <pc:sldMkLst>
+          <pc:docMk/>
+          <pc:sldMk cId="145451468" sldId="282"/>
+        </pc:sldMkLst>
+        <pc:spChg chg="add mod">
+          <ac:chgData name="kousuke yamamoto" userId="516c4d66ab16f868" providerId="LiveId" clId="{D5857573-2C41-4D75-AB9F-5CA89102AE51}" dt="2026-10-08T05:24:54.142" v="614" actId="1076"/>
+          <ac:spMkLst>
+            <pc:docMk/>
+            <pc:sldMk cId="145451468" sldId="282"/>
+            <ac:spMk id="2" creationId="{8F9312B2-00CA-4000-AE35-188DBCE90775}"/>
+          </ac:spMkLst>
+        </pc:spChg>
+        <pc:spChg chg="add mod">
+          <ac:chgData name="kousuke yamamoto" userId="516c4d66ab16f868" providerId="LiveId" clId="{D5857573-2C41-4D75-AB9F-5CA89102AE51}" dt="2026-10-08T06:04:18.056" v="1635" actId="20577"/>
+          <ac:spMkLst>
+            <pc:docMk/>
+            <pc:sldMk cId="145451468" sldId="282"/>
+            <ac:spMk id="3" creationId="{CBB94633-EFE1-49F6-8DB8-90B75CAE2B31}"/>
+          </ac:spMkLst>
+        </pc:spChg>
+        <pc:spChg chg="add del mod">
+          <ac:chgData name="kousuke yamamoto" userId="516c4d66ab16f868" providerId="LiveId" clId="{D5857573-2C41-4D75-AB9F-5CA89102AE51}" dt="2026-10-08T05:30:07.212" v="1045" actId="478"/>
+          <ac:spMkLst>
+            <pc:docMk/>
+            <pc:sldMk cId="145451468" sldId="282"/>
+            <ac:spMk id="4" creationId="{A4E9AC79-F830-4D01-8D66-57CDCD6AD57B}"/>
+          </ac:spMkLst>
+        </pc:spChg>
+      </pc:sldChg>
+      <pc:sldChg chg="addSp delSp modSp new del mod">
+        <pc:chgData name="kousuke yamamoto" userId="516c4d66ab16f868" providerId="LiveId" clId="{D5857573-2C41-4D75-AB9F-5CA89102AE51}" dt="2026-10-08T05:53:29.277" v="1530" actId="2696"/>
+        <pc:sldMkLst>
+          <pc:docMk/>
+          <pc:sldMk cId="742584505" sldId="283"/>
+        </pc:sldMkLst>
+        <pc:spChg chg="add mod">
+          <ac:chgData name="kousuke yamamoto" userId="516c4d66ab16f868" providerId="LiveId" clId="{D5857573-2C41-4D75-AB9F-5CA89102AE51}" dt="2026-10-08T05:53:25.644" v="1526" actId="1076"/>
+          <ac:spMkLst>
+            <pc:docMk/>
+            <pc:sldMk cId="742584505" sldId="283"/>
+            <ac:spMk id="2" creationId="{30643A52-1350-47B3-A200-2F33D359CEC6}"/>
+          </ac:spMkLst>
+        </pc:spChg>
+        <pc:spChg chg="add mod">
+          <ac:chgData name="kousuke yamamoto" userId="516c4d66ab16f868" providerId="LiveId" clId="{D5857573-2C41-4D75-AB9F-5CA89102AE51}" dt="2026-10-08T05:53:26.244" v="1529" actId="1076"/>
+          <ac:spMkLst>
+            <pc:docMk/>
+            <pc:sldMk cId="742584505" sldId="283"/>
+            <ac:spMk id="3" creationId="{9AD1AAD3-D9C0-4759-A846-BC800CC1AB9C}"/>
+          </ac:spMkLst>
+        </pc:spChg>
+        <pc:spChg chg="add mod">
+          <ac:chgData name="kousuke yamamoto" userId="516c4d66ab16f868" providerId="LiveId" clId="{D5857573-2C41-4D75-AB9F-5CA89102AE51}" dt="2026-10-08T05:52:35.191" v="1502" actId="1076"/>
+          <ac:spMkLst>
+            <pc:docMk/>
+            <pc:sldMk cId="742584505" sldId="283"/>
+            <ac:spMk id="4" creationId="{293D7AA8-4BF8-49FE-9331-BB0E6E9DE144}"/>
+          </ac:spMkLst>
+        </pc:spChg>
+        <pc:spChg chg="add mod">
+          <ac:chgData name="kousuke yamamoto" userId="516c4d66ab16f868" providerId="LiveId" clId="{D5857573-2C41-4D75-AB9F-5CA89102AE51}" dt="2026-10-08T05:53:24.807" v="1522" actId="1076"/>
+          <ac:spMkLst>
+            <pc:docMk/>
+            <pc:sldMk cId="742584505" sldId="283"/>
+            <ac:spMk id="5" creationId="{5F77B555-7F8C-4DC1-B7D2-EE7E2F1BB0ED}"/>
+          </ac:spMkLst>
+        </pc:spChg>
+        <pc:spChg chg="add mod">
+          <ac:chgData name="kousuke yamamoto" userId="516c4d66ab16f868" providerId="LiveId" clId="{D5857573-2C41-4D75-AB9F-5CA89102AE51}" dt="2026-10-08T05:53:25.069" v="1523" actId="1076"/>
+          <ac:spMkLst>
+            <pc:docMk/>
+            <pc:sldMk cId="742584505" sldId="283"/>
+            <ac:spMk id="6" creationId="{098C0C8B-DA81-4DEC-B361-2587E1E9C43A}"/>
+          </ac:spMkLst>
+        </pc:spChg>
+        <pc:spChg chg="add mod">
+          <ac:chgData name="kousuke yamamoto" userId="516c4d66ab16f868" providerId="LiveId" clId="{D5857573-2C41-4D75-AB9F-5CA89102AE51}" dt="2026-10-08T05:53:24.586" v="1521" actId="1076"/>
+          <ac:spMkLst>
+            <pc:docMk/>
+            <pc:sldMk cId="742584505" sldId="283"/>
+            <ac:spMk id="7" creationId="{81A74DBC-CBB0-406E-8A5C-9E2C2D580178}"/>
+          </ac:spMkLst>
+        </pc:spChg>
+        <pc:spChg chg="add mod">
+          <ac:chgData name="kousuke yamamoto" userId="516c4d66ab16f868" providerId="LiveId" clId="{D5857573-2C41-4D75-AB9F-5CA89102AE51}" dt="2026-10-08T05:52:20" v="1497" actId="1076"/>
+          <ac:spMkLst>
+            <pc:docMk/>
+            <pc:sldMk cId="742584505" sldId="283"/>
+            <ac:spMk id="8" creationId="{C9C72AAA-4BC8-4D2E-B587-CCC62564EEF8}"/>
+          </ac:spMkLst>
+        </pc:spChg>
+        <pc:spChg chg="add mod">
+          <ac:chgData name="kousuke yamamoto" userId="516c4d66ab16f868" providerId="LiveId" clId="{D5857573-2C41-4D75-AB9F-5CA89102AE51}" dt="2026-10-08T05:53:25.456" v="1525" actId="1076"/>
+          <ac:spMkLst>
+            <pc:docMk/>
+            <pc:sldMk cId="742584505" sldId="283"/>
+            <ac:spMk id="9" creationId="{C71A325B-AA0F-488A-A74D-5561CC865564}"/>
+          </ac:spMkLst>
+        </pc:spChg>
+        <pc:spChg chg="add mod">
+          <ac:chgData name="kousuke yamamoto" userId="516c4d66ab16f868" providerId="LiveId" clId="{D5857573-2C41-4D75-AB9F-5CA89102AE51}" dt="2026-10-08T05:53:25.264" v="1524" actId="1076"/>
+          <ac:spMkLst>
+            <pc:docMk/>
+            <pc:sldMk cId="742584505" sldId="283"/>
+            <ac:spMk id="10" creationId="{F6E08433-0F92-494E-9BFD-B2AE55D216B6}"/>
+          </ac:spMkLst>
+        </pc:spChg>
+        <pc:spChg chg="add del mod">
+          <ac:chgData name="kousuke yamamoto" userId="516c4d66ab16f868" providerId="LiveId" clId="{D5857573-2C41-4D75-AB9F-5CA89102AE51}" dt="2026-10-08T05:53:24.013" v="1518"/>
+          <ac:spMkLst>
+            <pc:docMk/>
+            <pc:sldMk cId="742584505" sldId="283"/>
+            <ac:spMk id="11" creationId="{DD271843-EBDC-4410-A930-0F16FBE3DB54}"/>
           </ac:spMkLst>
         </pc:spChg>
       </pc:sldChg>
@@ -990,7 +1236,7 @@
           <a:p>
             <a:fld id="{EA23BABC-04D1-40FF-A826-E108E600BEAD}" type="datetimeFigureOut">
               <a:rPr kumimoji="1" lang="ja-JP" altLang="en-US" smtClean="0"/>
-              <a:t>2026/10/7</a:t>
+              <a:t>2026/10/8</a:t>
             </a:fld>
             <a:endParaRPr kumimoji="1" lang="ja-JP" altLang="en-US"/>
           </a:p>
@@ -1520,7 +1766,7 @@
           <a:p>
             <a:fld id="{5BCAD085-E8A6-8845-BD4E-CB4CCA059FC4}" type="datetimeFigureOut">
               <a:rPr lang="en-US" smtClean="0"/>
-              <a:t>10/7/2026</a:t>
+              <a:t>10/8/2026</a:t>
             </a:fld>
             <a:endParaRPr lang="en-US"/>
           </a:p>
@@ -1750,7 +1996,7 @@
           <a:p>
             <a:fld id="{5BCAD085-E8A6-8845-BD4E-CB4CCA059FC4}" type="datetimeFigureOut">
               <a:rPr lang="en-US" smtClean="0"/>
-              <a:t>10/7/2026</a:t>
+              <a:t>10/8/2026</a:t>
             </a:fld>
             <a:endParaRPr lang="en-US"/>
           </a:p>
@@ -1990,7 +2236,7 @@
           <a:p>
             <a:fld id="{5BCAD085-E8A6-8845-BD4E-CB4CCA059FC4}" type="datetimeFigureOut">
               <a:rPr lang="en-US" smtClean="0"/>
-              <a:t>10/7/2026</a:t>
+              <a:t>10/8/2026</a:t>
             </a:fld>
             <a:endParaRPr lang="en-US"/>
           </a:p>
@@ -2220,7 +2466,7 @@
           <a:p>
             <a:fld id="{5BCAD085-E8A6-8845-BD4E-CB4CCA059FC4}" type="datetimeFigureOut">
               <a:rPr lang="en-US" smtClean="0"/>
-              <a:t>10/7/2026</a:t>
+              <a:t>10/8/2026</a:t>
             </a:fld>
             <a:endParaRPr lang="en-US"/>
           </a:p>
@@ -2495,7 +2741,7 @@
           <a:p>
             <a:fld id="{5BCAD085-E8A6-8845-BD4E-CB4CCA059FC4}" type="datetimeFigureOut">
               <a:rPr lang="en-US" smtClean="0"/>
-              <a:t>10/7/2026</a:t>
+              <a:t>10/8/2026</a:t>
             </a:fld>
             <a:endParaRPr lang="en-US"/>
           </a:p>
@@ -2824,7 +3070,7 @@
           <a:p>
             <a:fld id="{5BCAD085-E8A6-8845-BD4E-CB4CCA059FC4}" type="datetimeFigureOut">
               <a:rPr lang="en-US" smtClean="0"/>
-              <a:t>10/7/2026</a:t>
+              <a:t>10/8/2026</a:t>
             </a:fld>
             <a:endParaRPr lang="en-US"/>
           </a:p>
@@ -3300,7 +3546,7 @@
           <a:p>
             <a:fld id="{5BCAD085-E8A6-8845-BD4E-CB4CCA059FC4}" type="datetimeFigureOut">
               <a:rPr lang="en-US" smtClean="0"/>
-              <a:t>10/7/2026</a:t>
+              <a:t>10/8/2026</a:t>
             </a:fld>
             <a:endParaRPr lang="en-US"/>
           </a:p>
@@ -3441,7 +3687,7 @@
           <a:p>
             <a:fld id="{5BCAD085-E8A6-8845-BD4E-CB4CCA059FC4}" type="datetimeFigureOut">
               <a:rPr lang="en-US" smtClean="0"/>
-              <a:t>10/7/2026</a:t>
+              <a:t>10/8/2026</a:t>
             </a:fld>
             <a:endParaRPr lang="en-US"/>
           </a:p>
@@ -3554,7 +3800,7 @@
           <a:p>
             <a:fld id="{5BCAD085-E8A6-8845-BD4E-CB4CCA059FC4}" type="datetimeFigureOut">
               <a:rPr lang="en-US" smtClean="0"/>
-              <a:t>10/7/2026</a:t>
+              <a:t>10/8/2026</a:t>
             </a:fld>
             <a:endParaRPr lang="en-US"/>
           </a:p>
@@ -3897,7 +4143,7 @@
           <a:p>
             <a:fld id="{5BCAD085-E8A6-8845-BD4E-CB4CCA059FC4}" type="datetimeFigureOut">
               <a:rPr lang="en-US" smtClean="0"/>
-              <a:t>10/7/2026</a:t>
+              <a:t>10/8/2026</a:t>
             </a:fld>
             <a:endParaRPr lang="en-US"/>
           </a:p>
@@ -4185,7 +4431,7 @@
           <a:p>
             <a:fld id="{5BCAD085-E8A6-8845-BD4E-CB4CCA059FC4}" type="datetimeFigureOut">
               <a:rPr lang="en-US" smtClean="0"/>
-              <a:t>10/7/2026</a:t>
+              <a:t>10/8/2026</a:t>
             </a:fld>
             <a:endParaRPr lang="en-US"/>
           </a:p>
@@ -4461,7 +4707,7 @@
           <a:p>
             <a:fld id="{5BCAD085-E8A6-8845-BD4E-CB4CCA059FC4}" type="datetimeFigureOut">
               <a:rPr lang="en-US" smtClean="0"/>
-              <a:t>10/7/2026</a:t>
+              <a:t>10/8/2026</a:t>
             </a:fld>
             <a:endParaRPr lang="en-US"/>
           </a:p>
@@ -4944,6 +5190,114 @@
 </p:sld>
 </file>
 
+<file path=ppt/slides/slide10.xml><?xml version="1.0" encoding="utf-8"?>
+<p:sld xmlns:a="http://schemas.openxmlformats.org/drawingml/2006/main" xmlns:r="http://schemas.openxmlformats.org/officeDocument/2006/relationships" xmlns:p="http://schemas.openxmlformats.org/presentationml/2006/main">
+  <p:cSld>
+    <p:spTree>
+      <p:nvGrpSpPr>
+        <p:cNvPr id="1" name=""/>
+        <p:cNvGrpSpPr/>
+        <p:nvPr/>
+      </p:nvGrpSpPr>
+      <p:grpSpPr>
+        <a:xfrm>
+          <a:off x="0" y="0"/>
+          <a:ext cx="0" cy="0"/>
+          <a:chOff x="0" y="0"/>
+          <a:chExt cx="0" cy="0"/>
+        </a:xfrm>
+      </p:grpSpPr>
+      <p:sp>
+        <p:nvSpPr>
+          <p:cNvPr id="2" name="正方形/長方形 1">
+            <a:extLst>
+              <a:ext uri="{FF2B5EF4-FFF2-40B4-BE49-F238E27FC236}">
+                <a16:creationId xmlns:a16="http://schemas.microsoft.com/office/drawing/2014/main" id="{9F7CA3D4-E67C-4023-B580-346E725E68BF}"/>
+              </a:ext>
+            </a:extLst>
+          </p:cNvPr>
+          <p:cNvSpPr/>
+          <p:nvPr/>
+        </p:nvSpPr>
+        <p:spPr>
+          <a:xfrm>
+            <a:off x="2569464" y="457201"/>
+            <a:ext cx="7863840" cy="4325112"/>
+          </a:xfrm>
+          <a:prstGeom prst="rect">
+            <a:avLst/>
+          </a:prstGeom>
+        </p:spPr>
+        <p:style>
+          <a:lnRef idx="2">
+            <a:schemeClr val="accent1">
+              <a:shade val="50000"/>
+            </a:schemeClr>
+          </a:lnRef>
+          <a:fillRef idx="1">
+            <a:schemeClr val="accent1"/>
+          </a:fillRef>
+          <a:effectRef idx="0">
+            <a:schemeClr val="accent1"/>
+          </a:effectRef>
+          <a:fontRef idx="minor">
+            <a:schemeClr val="lt1"/>
+          </a:fontRef>
+        </p:style>
+        <p:txBody>
+          <a:bodyPr rtlCol="0" anchor="ctr"/>
+          <a:lstStyle/>
+          <a:p>
+            <a:pPr algn="ctr"/>
+            <a:r>
+              <a:rPr kumimoji="1" lang="ja-JP" altLang="en-US" dirty="0"/>
+              <a:t>雨粒をどうする　お題を簡単にするより</a:t>
+            </a:r>
+            <a:endParaRPr kumimoji="1" lang="en-US" altLang="ja-JP" dirty="0"/>
+          </a:p>
+          <a:p>
+            <a:pPr algn="ctr"/>
+            <a:r>
+              <a:rPr lang="ja-JP" altLang="en-US" dirty="0"/>
+              <a:t>もともとのシステムを見ろ</a:t>
+            </a:r>
+            <a:endParaRPr lang="en-US" altLang="ja-JP" dirty="0"/>
+          </a:p>
+          <a:p>
+            <a:pPr algn="ctr"/>
+            <a:r>
+              <a:rPr kumimoji="1" lang="ja-JP" altLang="en-US" dirty="0"/>
+              <a:t>　</a:t>
+            </a:r>
+            <a:endParaRPr kumimoji="1" lang="en-US" altLang="ja-JP" dirty="0"/>
+          </a:p>
+          <a:p>
+            <a:pPr algn="ctr"/>
+            <a:r>
+              <a:rPr lang="ja-JP" altLang="en-US" dirty="0"/>
+              <a:t>頭で自分のゲームをプレイしてみろ</a:t>
+            </a:r>
+            <a:endParaRPr lang="en-US" altLang="ja-JP" dirty="0"/>
+          </a:p>
+          <a:p>
+            <a:pPr algn="ctr"/>
+            <a:endParaRPr kumimoji="1" lang="ja-JP" altLang="en-US" dirty="0"/>
+          </a:p>
+        </p:txBody>
+      </p:sp>
+    </p:spTree>
+    <p:extLst>
+      <p:ext uri="{BB962C8B-B14F-4D97-AF65-F5344CB8AC3E}">
+        <p14:creationId xmlns:p14="http://schemas.microsoft.com/office/powerpoint/2010/main" val="1752989940"/>
+      </p:ext>
+    </p:extLst>
+  </p:cSld>
+  <p:clrMapOvr>
+    <a:masterClrMapping/>
+  </p:clrMapOvr>
+</p:sld>
+</file>
+
 <file path=ppt/slides/slide2.xml><?xml version="1.0" encoding="utf-8"?>
 <p:sld xmlns:a="http://schemas.openxmlformats.org/drawingml/2006/main" xmlns:r="http://schemas.openxmlformats.org/officeDocument/2006/relationships" xmlns:p="http://schemas.openxmlformats.org/presentationml/2006/main">
   <p:cSld>
@@ -5617,124 +5971,6 @@
               </a:rPr>
               <a:t>モード</a:t>
             </a:r>
-          </a:p>
-        </p:txBody>
-      </p:sp>
-      <p:sp>
-        <p:nvSpPr>
-          <p:cNvPr id="9" name="正方形/長方形 8">
-            <a:extLst>
-              <a:ext uri="{FF2B5EF4-FFF2-40B4-BE49-F238E27FC236}">
-                <a16:creationId xmlns:a16="http://schemas.microsoft.com/office/drawing/2014/main" id="{00039B03-7452-4948-AB40-CEC2825954EC}"/>
-              </a:ext>
-            </a:extLst>
-          </p:cNvPr>
-          <p:cNvSpPr/>
-          <p:nvPr/>
-        </p:nvSpPr>
-        <p:spPr>
-          <a:xfrm>
-            <a:off x="4133850" y="4699570"/>
-            <a:ext cx="7096126" cy="542933"/>
-          </a:xfrm>
-          <a:prstGeom prst="rect">
-            <a:avLst/>
-          </a:prstGeom>
-          <a:ln>
-            <a:solidFill>
-              <a:schemeClr val="tx1"/>
-            </a:solidFill>
-          </a:ln>
-        </p:spPr>
-        <p:style>
-          <a:lnRef idx="2">
-            <a:schemeClr val="accent6"/>
-          </a:lnRef>
-          <a:fillRef idx="1">
-            <a:schemeClr val="lt1"/>
-          </a:fillRef>
-          <a:effectRef idx="0">
-            <a:schemeClr val="accent6"/>
-          </a:effectRef>
-          <a:fontRef idx="minor">
-            <a:schemeClr val="dk1"/>
-          </a:fontRef>
-        </p:style>
-        <p:txBody>
-          <a:bodyPr rtlCol="0" anchor="ctr"/>
-          <a:lstStyle/>
-          <a:p>
-            <a:pPr algn="ctr"/>
-            <a:r>
-              <a:rPr lang="ja-JP" altLang="en-US" sz="3600" dirty="0">
-                <a:solidFill>
-                  <a:srgbClr val="FF0000"/>
-                </a:solidFill>
-                <a:latin typeface="メイリオ" panose="020B0604030504040204" pitchFamily="50" charset="-128"/>
-                <a:ea typeface="メイリオ" panose="020B0604030504040204" pitchFamily="50" charset="-128"/>
-              </a:rPr>
-              <a:t>お題</a:t>
-            </a:r>
-            <a:r>
-              <a:rPr kumimoji="1" lang="ja-JP" altLang="en-US" sz="3600" dirty="0">
-                <a:solidFill>
-                  <a:srgbClr val="FF0000"/>
-                </a:solidFill>
-                <a:latin typeface="メイリオ" panose="020B0604030504040204" pitchFamily="50" charset="-128"/>
-                <a:ea typeface="メイリオ" panose="020B0604030504040204" pitchFamily="50" charset="-128"/>
-              </a:rPr>
-              <a:t>モード</a:t>
-            </a:r>
-          </a:p>
-        </p:txBody>
-      </p:sp>
-      <p:sp>
-        <p:nvSpPr>
-          <p:cNvPr id="11" name="正方形/長方形 10">
-            <a:extLst>
-              <a:ext uri="{FF2B5EF4-FFF2-40B4-BE49-F238E27FC236}">
-                <a16:creationId xmlns:a16="http://schemas.microsoft.com/office/drawing/2014/main" id="{13BABEA7-2FB4-4D0E-9CE5-C9EE47AFD26F}"/>
-              </a:ext>
-            </a:extLst>
-          </p:cNvPr>
-          <p:cNvSpPr/>
-          <p:nvPr/>
-        </p:nvSpPr>
-        <p:spPr>
-          <a:xfrm>
-            <a:off x="4133851" y="5242503"/>
-            <a:ext cx="7096125" cy="914400"/>
-          </a:xfrm>
-          <a:prstGeom prst="rect">
-            <a:avLst/>
-          </a:prstGeom>
-        </p:spPr>
-        <p:style>
-          <a:lnRef idx="2">
-            <a:schemeClr val="dk1"/>
-          </a:lnRef>
-          <a:fillRef idx="1">
-            <a:schemeClr val="lt1"/>
-          </a:fillRef>
-          <a:effectRef idx="0">
-            <a:schemeClr val="dk1"/>
-          </a:effectRef>
-          <a:fontRef idx="minor">
-            <a:schemeClr val="dk1"/>
-          </a:fontRef>
-        </p:style>
-        <p:txBody>
-          <a:bodyPr rtlCol="0" anchor="ctr"/>
-          <a:lstStyle/>
-          <a:p>
-            <a:r>
-              <a:rPr lang="ja-JP" altLang="en-US" dirty="0">
-                <a:latin typeface="メイリオ" panose="020B0604030504040204" pitchFamily="50" charset="-128"/>
-                <a:ea typeface="メイリオ" panose="020B0604030504040204" pitchFamily="50" charset="-128"/>
-              </a:rPr>
-              <a:t>１　出されたお題に沿った絵を、自由な描き方で完成させる</a:t>
-            </a:r>
-            <a:endParaRPr kumimoji="1" lang="ja-JP" altLang="en-US" dirty="0"/>
           </a:p>
         </p:txBody>
       </p:sp>
@@ -9040,7 +9276,7 @@
           <p:cNvPr id="2" name="正方形/長方形 1">
             <a:extLst>
               <a:ext uri="{FF2B5EF4-FFF2-40B4-BE49-F238E27FC236}">
-                <a16:creationId xmlns:a16="http://schemas.microsoft.com/office/drawing/2014/main" id="{9F7CA3D4-E67C-4023-B580-346E725E68BF}"/>
+                <a16:creationId xmlns:a16="http://schemas.microsoft.com/office/drawing/2014/main" id="{8F9312B2-00CA-4000-AE35-188DBCE90775}"/>
               </a:ext>
             </a:extLst>
           </p:cNvPr>
@@ -9049,8 +9285,8 @@
         </p:nvSpPr>
         <p:spPr>
           <a:xfrm>
-            <a:off x="2569464" y="457201"/>
-            <a:ext cx="7863840" cy="4325112"/>
+            <a:off x="3584448" y="128017"/>
+            <a:ext cx="5632704" cy="996695"/>
           </a:xfrm>
           <a:prstGeom prst="rect">
             <a:avLst/>
@@ -9079,44 +9315,273 @@
             <a:pPr algn="ctr"/>
             <a:r>
               <a:rPr kumimoji="1" lang="ja-JP" altLang="en-US" dirty="0"/>
-              <a:t>雨粒をどうする　お題を簡単にするより</a:t>
-            </a:r>
+              <a:t>雨の仕様について</a:t>
+            </a:r>
+          </a:p>
+        </p:txBody>
+      </p:sp>
+      <p:sp>
+        <p:nvSpPr>
+          <p:cNvPr id="3" name="正方形/長方形 2">
+            <a:extLst>
+              <a:ext uri="{FF2B5EF4-FFF2-40B4-BE49-F238E27FC236}">
+                <a16:creationId xmlns:a16="http://schemas.microsoft.com/office/drawing/2014/main" id="{CBB94633-EFE1-49F6-8DB8-90B75CAE2B31}"/>
+              </a:ext>
+            </a:extLst>
+          </p:cNvPr>
+          <p:cNvSpPr/>
+          <p:nvPr/>
+        </p:nvSpPr>
+        <p:spPr>
+          <a:xfrm>
+            <a:off x="1965960" y="1271016"/>
+            <a:ext cx="8439912" cy="4736592"/>
+          </a:xfrm>
+          <a:prstGeom prst="rect">
+            <a:avLst/>
+          </a:prstGeom>
+        </p:spPr>
+        <p:style>
+          <a:lnRef idx="2">
+            <a:schemeClr val="accent1">
+              <a:shade val="50000"/>
+            </a:schemeClr>
+          </a:lnRef>
+          <a:fillRef idx="1">
+            <a:schemeClr val="accent1"/>
+          </a:fillRef>
+          <a:effectRef idx="0">
+            <a:schemeClr val="accent1"/>
+          </a:effectRef>
+          <a:fontRef idx="minor">
+            <a:schemeClr val="lt1"/>
+          </a:fontRef>
+        </p:style>
+        <p:txBody>
+          <a:bodyPr rtlCol="0" anchor="ctr"/>
+          <a:lstStyle/>
+          <a:p>
+            <a:pPr algn="ctr"/>
+            <a:endParaRPr lang="en-US" altLang="ja-JP" dirty="0"/>
+          </a:p>
+          <a:p>
+            <a:pPr algn="ctr"/>
             <a:endParaRPr kumimoji="1" lang="en-US" altLang="ja-JP" dirty="0"/>
           </a:p>
           <a:p>
             <a:pPr algn="ctr"/>
+            <a:endParaRPr kumimoji="1" lang="en-US" altLang="ja-JP" dirty="0"/>
+          </a:p>
+          <a:p>
+            <a:pPr algn="ctr"/>
+            <a:r>
+              <a:rPr lang="ja-JP" altLang="en-US" dirty="0">
+                <a:solidFill>
+                  <a:srgbClr val="FF0000"/>
+                </a:solidFill>
+              </a:rPr>
+              <a:t>１盤面に固定</a:t>
+            </a:r>
+            <a:endParaRPr lang="en-US" altLang="ja-JP" dirty="0">
+              <a:solidFill>
+                <a:srgbClr val="FF0000"/>
+              </a:solidFill>
+            </a:endParaRPr>
+          </a:p>
+          <a:p>
+            <a:pPr algn="ctr"/>
             <a:r>
               <a:rPr lang="ja-JP" altLang="en-US" dirty="0"/>
-              <a:t>もともとのシステムを見ろ</a:t>
+              <a:t>２盤面に配置した雨粒が流れる</a:t>
             </a:r>
             <a:endParaRPr lang="en-US" altLang="ja-JP" dirty="0"/>
           </a:p>
           <a:p>
             <a:pPr algn="ctr"/>
-            <a:r>
-              <a:rPr kumimoji="1" lang="ja-JP" altLang="en-US" dirty="0"/>
-              <a:t>　</a:t>
-            </a:r>
+            <a:endParaRPr lang="en-US" altLang="ja-JP" dirty="0">
+              <a:solidFill>
+                <a:srgbClr val="FF0000"/>
+              </a:solidFill>
+            </a:endParaRPr>
+          </a:p>
+          <a:p>
+            <a:pPr algn="ctr"/>
+            <a:r>
+              <a:rPr kumimoji="1" lang="ja-JP" altLang="en-US" dirty="0">
+                <a:solidFill>
+                  <a:srgbClr val="FF0000"/>
+                </a:solidFill>
+              </a:rPr>
+              <a:t>新しい雨粒を降らすか</a:t>
+            </a:r>
+            <a:r>
+              <a:rPr lang="ja-JP" altLang="en-US" dirty="0">
+                <a:solidFill>
+                  <a:srgbClr val="FF0000"/>
+                </a:solidFill>
+              </a:rPr>
+              <a:t>　　盤面にある雨粒を動かせる</a:t>
+            </a:r>
+            <a:endParaRPr lang="en-US" altLang="ja-JP" dirty="0">
+              <a:solidFill>
+                <a:srgbClr val="FF0000"/>
+              </a:solidFill>
+            </a:endParaRPr>
+          </a:p>
+          <a:p>
+            <a:pPr algn="ctr"/>
+            <a:r>
+              <a:rPr lang="ja-JP" altLang="en-US" dirty="0">
+                <a:solidFill>
+                  <a:srgbClr val="FF0000"/>
+                </a:solidFill>
+              </a:rPr>
+              <a:t>もしくは両方</a:t>
+            </a:r>
+            <a:endParaRPr lang="en-US" altLang="ja-JP" dirty="0">
+              <a:solidFill>
+                <a:srgbClr val="FF0000"/>
+              </a:solidFill>
+            </a:endParaRPr>
+          </a:p>
+          <a:p>
+            <a:pPr algn="ctr"/>
+            <a:endParaRPr kumimoji="1" lang="en-US" altLang="ja-JP" dirty="0">
+              <a:solidFill>
+                <a:srgbClr val="FF0000"/>
+              </a:solidFill>
+            </a:endParaRPr>
+          </a:p>
+          <a:p>
+            <a:pPr algn="ctr"/>
+            <a:r>
+              <a:rPr lang="ja-JP" altLang="en-US" dirty="0">
+                <a:solidFill>
+                  <a:srgbClr val="FF0000"/>
+                </a:solidFill>
+              </a:rPr>
+              <a:t>指で雨粒を固定し流れなくすることができる</a:t>
+            </a:r>
+            <a:endParaRPr lang="en-US" altLang="ja-JP" dirty="0">
+              <a:solidFill>
+                <a:srgbClr val="FF0000"/>
+              </a:solidFill>
+            </a:endParaRPr>
+          </a:p>
+          <a:p>
+            <a:pPr algn="ctr"/>
+            <a:r>
+              <a:rPr lang="ja-JP" altLang="en-US" dirty="0">
+                <a:solidFill>
+                  <a:srgbClr val="FF0000"/>
+                </a:solidFill>
+              </a:rPr>
+              <a:t>一気にすべてを描かずに部分だけ書ける</a:t>
+            </a:r>
+            <a:endParaRPr lang="en-US" altLang="ja-JP" dirty="0">
+              <a:solidFill>
+                <a:srgbClr val="FF0000"/>
+              </a:solidFill>
+            </a:endParaRPr>
+          </a:p>
+          <a:p>
+            <a:pPr algn="ctr"/>
+            <a:r>
+              <a:rPr lang="ja-JP" altLang="en-US" dirty="0">
+                <a:solidFill>
+                  <a:srgbClr val="FF0000"/>
+                </a:solidFill>
+              </a:rPr>
+              <a:t>例　お題が雨　　一だけ書ける</a:t>
+            </a:r>
+            <a:endParaRPr lang="en-US" altLang="ja-JP" dirty="0">
+              <a:solidFill>
+                <a:srgbClr val="FF0000"/>
+              </a:solidFill>
+            </a:endParaRPr>
+          </a:p>
+          <a:p>
+            <a:pPr algn="ctr"/>
+            <a:endParaRPr lang="en-US" altLang="ja-JP" dirty="0"/>
+          </a:p>
+          <a:p>
+            <a:pPr algn="ctr"/>
+            <a:r>
+              <a:rPr lang="ja-JP" altLang="en-US" dirty="0"/>
+              <a:t>お題を何回も描く　</a:t>
+            </a:r>
+            <a:r>
+              <a:rPr lang="ja-JP" altLang="en-US" dirty="0">
+                <a:solidFill>
+                  <a:srgbClr val="FF0000"/>
+                </a:solidFill>
+              </a:rPr>
+              <a:t>１回でクリア</a:t>
+            </a:r>
+            <a:endParaRPr lang="en-US" altLang="ja-JP" dirty="0">
+              <a:solidFill>
+                <a:srgbClr val="FF0000"/>
+              </a:solidFill>
+            </a:endParaRPr>
+          </a:p>
+          <a:p>
+            <a:pPr algn="ctr"/>
+            <a:endParaRPr lang="en-US" altLang="ja-JP" dirty="0"/>
+          </a:p>
+          <a:p>
+            <a:pPr algn="ctr"/>
             <a:endParaRPr kumimoji="1" lang="en-US" altLang="ja-JP" dirty="0"/>
           </a:p>
           <a:p>
             <a:pPr algn="ctr"/>
             <a:r>
+              <a:rPr lang="en-US" altLang="ja-JP" dirty="0"/>
+              <a:t>Q</a:t>
+            </a:r>
+            <a:r>
               <a:rPr lang="ja-JP" altLang="en-US" dirty="0"/>
-              <a:t>頭で自分のゲームをプレイしてみろ</a:t>
+              <a:t>雨粒何個で文字を描けるようにするか</a:t>
+            </a:r>
+            <a:endParaRPr kumimoji="1" lang="en-US" altLang="ja-JP" dirty="0"/>
+          </a:p>
+          <a:p>
+            <a:pPr algn="ctr"/>
+            <a:r>
+              <a:rPr lang="en-US" altLang="ja-JP" dirty="0"/>
+              <a:t>A</a:t>
+            </a:r>
+            <a:r>
+              <a:rPr lang="ja-JP" altLang="en-US" dirty="0"/>
+              <a:t>１０個以上</a:t>
             </a:r>
             <a:endParaRPr lang="en-US" altLang="ja-JP" dirty="0"/>
           </a:p>
           <a:p>
             <a:pPr algn="ctr"/>
-            <a:endParaRPr kumimoji="1" lang="ja-JP" altLang="en-US" dirty="0"/>
+            <a:endParaRPr kumimoji="1" lang="en-US" altLang="ja-JP" dirty="0"/>
+          </a:p>
+          <a:p>
+            <a:pPr algn="ctr"/>
+            <a:endParaRPr lang="en-US" altLang="ja-JP" dirty="0"/>
+          </a:p>
+          <a:p>
+            <a:pPr algn="ctr"/>
+            <a:endParaRPr kumimoji="1" lang="en-US" altLang="ja-JP" dirty="0"/>
+          </a:p>
+          <a:p>
+            <a:pPr algn="ctr"/>
+            <a:endParaRPr lang="en-US" altLang="ja-JP" dirty="0"/>
+          </a:p>
+          <a:p>
+            <a:pPr algn="ctr"/>
+            <a:endParaRPr kumimoji="1" lang="en-US" altLang="ja-JP" dirty="0"/>
           </a:p>
         </p:txBody>
       </p:sp>
     </p:spTree>
     <p:extLst>
       <p:ext uri="{BB962C8B-B14F-4D97-AF65-F5344CB8AC3E}">
-        <p14:creationId xmlns:p14="http://schemas.microsoft.com/office/powerpoint/2010/main" val="1752989940"/>
+        <p14:creationId xmlns:p14="http://schemas.microsoft.com/office/powerpoint/2010/main" val="145451468"/>
       </p:ext>
     </p:extLst>
   </p:cSld>
@@ -9157,7 +9622,7 @@
         </p:nvSpPr>
         <p:spPr>
           <a:xfrm>
-            <a:off x="3337560" y="2514600"/>
+            <a:off x="4709160" y="1991487"/>
             <a:ext cx="393192" cy="438912"/>
           </a:xfrm>
           <a:prstGeom prst="ellipse">
@@ -9203,7 +9668,7 @@
         </p:nvSpPr>
         <p:spPr>
           <a:xfrm>
-            <a:off x="3489960" y="2667000"/>
+            <a:off x="4703064" y="3724657"/>
             <a:ext cx="393192" cy="438912"/>
           </a:xfrm>
           <a:prstGeom prst="ellipse">
@@ -9249,7 +9714,7 @@
         </p:nvSpPr>
         <p:spPr>
           <a:xfrm>
-            <a:off x="3642360" y="2819400"/>
+            <a:off x="4687062" y="2795778"/>
             <a:ext cx="393192" cy="438912"/>
           </a:xfrm>
           <a:prstGeom prst="ellipse">
@@ -9295,7 +9760,7 @@
         </p:nvSpPr>
         <p:spPr>
           <a:xfrm>
-            <a:off x="3547110" y="3752088"/>
+            <a:off x="3578352" y="2795778"/>
             <a:ext cx="393192" cy="438912"/>
           </a:xfrm>
           <a:prstGeom prst="ellipse">
@@ -9341,7 +9806,7 @@
         </p:nvSpPr>
         <p:spPr>
           <a:xfrm>
-            <a:off x="2974848" y="4041649"/>
+            <a:off x="2286000" y="4693922"/>
             <a:ext cx="393192" cy="438912"/>
           </a:xfrm>
           <a:prstGeom prst="ellipse">
@@ -9387,7 +9852,7 @@
         </p:nvSpPr>
         <p:spPr>
           <a:xfrm>
-            <a:off x="4035552" y="4236721"/>
+            <a:off x="2267712" y="5843017"/>
             <a:ext cx="393192" cy="438912"/>
           </a:xfrm>
           <a:prstGeom prst="ellipse">
@@ -9433,7 +9898,7 @@
         </p:nvSpPr>
         <p:spPr>
           <a:xfrm>
-            <a:off x="3429000" y="4882896"/>
+            <a:off x="5903977" y="2796541"/>
             <a:ext cx="393192" cy="438912"/>
           </a:xfrm>
           <a:prstGeom prst="ellipse">
@@ -9479,7 +9944,7 @@
         </p:nvSpPr>
         <p:spPr>
           <a:xfrm>
-            <a:off x="2639568" y="4456177"/>
+            <a:off x="2267712" y="2712720"/>
             <a:ext cx="393192" cy="438912"/>
           </a:xfrm>
           <a:prstGeom prst="ellipse">
@@ -9525,7 +9990,7 @@
         </p:nvSpPr>
         <p:spPr>
           <a:xfrm>
-            <a:off x="3346704" y="2514600"/>
+            <a:off x="1591056" y="1193290"/>
             <a:ext cx="393192" cy="438912"/>
           </a:xfrm>
           <a:prstGeom prst="ellipse">
@@ -9571,7 +10036,7 @@
         </p:nvSpPr>
         <p:spPr>
           <a:xfrm>
-            <a:off x="6385560" y="4885944"/>
+            <a:off x="7223762" y="4831082"/>
             <a:ext cx="393192" cy="438912"/>
           </a:xfrm>
           <a:prstGeom prst="ellipse">
@@ -9617,7 +10082,7 @@
         </p:nvSpPr>
         <p:spPr>
           <a:xfrm>
-            <a:off x="4905756" y="3648456"/>
+            <a:off x="4671060" y="4404361"/>
             <a:ext cx="425196" cy="542544"/>
           </a:xfrm>
           <a:prstGeom prst="ellipse">
@@ -9663,7 +10128,7 @@
         </p:nvSpPr>
         <p:spPr>
           <a:xfrm>
-            <a:off x="4861560" y="4885944"/>
+            <a:off x="7111748" y="2756916"/>
             <a:ext cx="393192" cy="438912"/>
           </a:xfrm>
           <a:prstGeom prst="ellipse">
@@ -9709,7 +10174,7 @@
         </p:nvSpPr>
         <p:spPr>
           <a:xfrm>
-            <a:off x="6385560" y="2444496"/>
+            <a:off x="8037576" y="1187196"/>
             <a:ext cx="393192" cy="438912"/>
           </a:xfrm>
           <a:prstGeom prst="ellipse">
@@ -9755,7 +10220,7 @@
         </p:nvSpPr>
         <p:spPr>
           <a:xfrm>
-            <a:off x="4861560" y="2514600"/>
+            <a:off x="4709160" y="1187196"/>
             <a:ext cx="393192" cy="438912"/>
           </a:xfrm>
           <a:prstGeom prst="ellipse">
@@ -9784,6 +10249,614 @@
           <a:p>
             <a:pPr algn="ctr"/>
             <a:endParaRPr kumimoji="1" lang="ja-JP" altLang="en-US"/>
+          </a:p>
+        </p:txBody>
+      </p:sp>
+      <p:sp>
+        <p:nvSpPr>
+          <p:cNvPr id="21" name="楕円 20">
+            <a:extLst>
+              <a:ext uri="{FF2B5EF4-FFF2-40B4-BE49-F238E27FC236}">
+                <a16:creationId xmlns:a16="http://schemas.microsoft.com/office/drawing/2014/main" id="{A867E8D4-47EA-4B45-B6B8-DFB9FE680D5E}"/>
+              </a:ext>
+            </a:extLst>
+          </p:cNvPr>
+          <p:cNvSpPr/>
+          <p:nvPr/>
+        </p:nvSpPr>
+        <p:spPr>
+          <a:xfrm>
+            <a:off x="4760975" y="6158487"/>
+            <a:ext cx="346712" cy="438912"/>
+          </a:xfrm>
+          <a:prstGeom prst="ellipse">
+            <a:avLst/>
+          </a:prstGeom>
+        </p:spPr>
+        <p:style>
+          <a:lnRef idx="2">
+            <a:schemeClr val="accent1">
+              <a:shade val="50000"/>
+            </a:schemeClr>
+          </a:lnRef>
+          <a:fillRef idx="1">
+            <a:schemeClr val="accent1"/>
+          </a:fillRef>
+          <a:effectRef idx="0">
+            <a:schemeClr val="accent1"/>
+          </a:effectRef>
+          <a:fontRef idx="minor">
+            <a:schemeClr val="lt1"/>
+          </a:fontRef>
+        </p:style>
+        <p:txBody>
+          <a:bodyPr rtlCol="0" anchor="ctr"/>
+          <a:lstStyle/>
+          <a:p>
+            <a:pPr algn="ctr"/>
+            <a:endParaRPr kumimoji="1" lang="ja-JP" altLang="en-US"/>
+          </a:p>
+        </p:txBody>
+      </p:sp>
+      <p:sp>
+        <p:nvSpPr>
+          <p:cNvPr id="22" name="楕円 21">
+            <a:extLst>
+              <a:ext uri="{FF2B5EF4-FFF2-40B4-BE49-F238E27FC236}">
+                <a16:creationId xmlns:a16="http://schemas.microsoft.com/office/drawing/2014/main" id="{D9D6815E-2842-496F-9F85-10875ACA5D9D}"/>
+              </a:ext>
+            </a:extLst>
+          </p:cNvPr>
+          <p:cNvSpPr/>
+          <p:nvPr/>
+        </p:nvSpPr>
+        <p:spPr>
+          <a:xfrm>
+            <a:off x="7223762" y="5995417"/>
+            <a:ext cx="393192" cy="438912"/>
+          </a:xfrm>
+          <a:prstGeom prst="ellipse">
+            <a:avLst/>
+          </a:prstGeom>
+        </p:spPr>
+        <p:style>
+          <a:lnRef idx="2">
+            <a:schemeClr val="accent1">
+              <a:shade val="50000"/>
+            </a:schemeClr>
+          </a:lnRef>
+          <a:fillRef idx="1">
+            <a:schemeClr val="accent1"/>
+          </a:fillRef>
+          <a:effectRef idx="0">
+            <a:schemeClr val="accent1"/>
+          </a:effectRef>
+          <a:fontRef idx="minor">
+            <a:schemeClr val="lt1"/>
+          </a:fontRef>
+        </p:style>
+        <p:txBody>
+          <a:bodyPr rtlCol="0" anchor="ctr"/>
+          <a:lstStyle/>
+          <a:p>
+            <a:pPr algn="ctr"/>
+            <a:endParaRPr kumimoji="1" lang="ja-JP" altLang="en-US"/>
+          </a:p>
+        </p:txBody>
+      </p:sp>
+      <p:sp>
+        <p:nvSpPr>
+          <p:cNvPr id="23" name="楕円 22">
+            <a:extLst>
+              <a:ext uri="{FF2B5EF4-FFF2-40B4-BE49-F238E27FC236}">
+                <a16:creationId xmlns:a16="http://schemas.microsoft.com/office/drawing/2014/main" id="{DA7286D5-0334-4C02-B247-FC3DD518A09B}"/>
+              </a:ext>
+            </a:extLst>
+          </p:cNvPr>
+          <p:cNvSpPr/>
+          <p:nvPr/>
+        </p:nvSpPr>
+        <p:spPr>
+          <a:xfrm>
+            <a:off x="4188336" y="-3982975"/>
+            <a:ext cx="393192" cy="438912"/>
+          </a:xfrm>
+          <a:prstGeom prst="ellipse">
+            <a:avLst/>
+          </a:prstGeom>
+        </p:spPr>
+        <p:style>
+          <a:lnRef idx="2">
+            <a:schemeClr val="accent1">
+              <a:shade val="50000"/>
+            </a:schemeClr>
+          </a:lnRef>
+          <a:fillRef idx="1">
+            <a:schemeClr val="accent1"/>
+          </a:fillRef>
+          <a:effectRef idx="0">
+            <a:schemeClr val="accent1"/>
+          </a:effectRef>
+          <a:fontRef idx="minor">
+            <a:schemeClr val="lt1"/>
+          </a:fontRef>
+        </p:style>
+        <p:txBody>
+          <a:bodyPr rtlCol="0" anchor="ctr"/>
+          <a:lstStyle/>
+          <a:p>
+            <a:pPr algn="ctr"/>
+            <a:endParaRPr kumimoji="1" lang="ja-JP" altLang="en-US"/>
+          </a:p>
+        </p:txBody>
+      </p:sp>
+      <p:sp>
+        <p:nvSpPr>
+          <p:cNvPr id="24" name="楕円 23">
+            <a:extLst>
+              <a:ext uri="{FF2B5EF4-FFF2-40B4-BE49-F238E27FC236}">
+                <a16:creationId xmlns:a16="http://schemas.microsoft.com/office/drawing/2014/main" id="{A01A2207-C14C-46CC-8978-57E8A75BAF0C}"/>
+              </a:ext>
+            </a:extLst>
+          </p:cNvPr>
+          <p:cNvSpPr/>
+          <p:nvPr/>
+        </p:nvSpPr>
+        <p:spPr>
+          <a:xfrm>
+            <a:off x="4709160" y="5333240"/>
+            <a:ext cx="393192" cy="438912"/>
+          </a:xfrm>
+          <a:prstGeom prst="ellipse">
+            <a:avLst/>
+          </a:prstGeom>
+        </p:spPr>
+        <p:style>
+          <a:lnRef idx="2">
+            <a:schemeClr val="accent1">
+              <a:shade val="50000"/>
+            </a:schemeClr>
+          </a:lnRef>
+          <a:fillRef idx="1">
+            <a:schemeClr val="accent1"/>
+          </a:fillRef>
+          <a:effectRef idx="0">
+            <a:schemeClr val="accent1"/>
+          </a:effectRef>
+          <a:fontRef idx="minor">
+            <a:schemeClr val="lt1"/>
+          </a:fontRef>
+        </p:style>
+        <p:txBody>
+          <a:bodyPr rtlCol="0" anchor="ctr"/>
+          <a:lstStyle/>
+          <a:p>
+            <a:pPr algn="ctr"/>
+            <a:endParaRPr kumimoji="1" lang="ja-JP" altLang="en-US"/>
+          </a:p>
+        </p:txBody>
+      </p:sp>
+      <p:sp>
+        <p:nvSpPr>
+          <p:cNvPr id="25" name="楕円 24">
+            <a:extLst>
+              <a:ext uri="{FF2B5EF4-FFF2-40B4-BE49-F238E27FC236}">
+                <a16:creationId xmlns:a16="http://schemas.microsoft.com/office/drawing/2014/main" id="{B9E2E807-F23B-44B4-81F0-CD4702602729}"/>
+              </a:ext>
+            </a:extLst>
+          </p:cNvPr>
+          <p:cNvSpPr/>
+          <p:nvPr/>
+        </p:nvSpPr>
+        <p:spPr>
+          <a:xfrm>
+            <a:off x="3003421" y="1193290"/>
+            <a:ext cx="393192" cy="438912"/>
+          </a:xfrm>
+          <a:prstGeom prst="ellipse">
+            <a:avLst/>
+          </a:prstGeom>
+        </p:spPr>
+        <p:style>
+          <a:lnRef idx="2">
+            <a:schemeClr val="accent1">
+              <a:shade val="50000"/>
+            </a:schemeClr>
+          </a:lnRef>
+          <a:fillRef idx="1">
+            <a:schemeClr val="accent1"/>
+          </a:fillRef>
+          <a:effectRef idx="0">
+            <a:schemeClr val="accent1"/>
+          </a:effectRef>
+          <a:fontRef idx="minor">
+            <a:schemeClr val="lt1"/>
+          </a:fontRef>
+        </p:style>
+        <p:txBody>
+          <a:bodyPr rtlCol="0" anchor="ctr"/>
+          <a:lstStyle/>
+          <a:p>
+            <a:pPr algn="ctr"/>
+            <a:endParaRPr kumimoji="1" lang="ja-JP" altLang="en-US"/>
+          </a:p>
+        </p:txBody>
+      </p:sp>
+      <p:sp>
+        <p:nvSpPr>
+          <p:cNvPr id="26" name="楕円 25">
+            <a:extLst>
+              <a:ext uri="{FF2B5EF4-FFF2-40B4-BE49-F238E27FC236}">
+                <a16:creationId xmlns:a16="http://schemas.microsoft.com/office/drawing/2014/main" id="{6674BA37-8890-4F36-ABA3-0E9DF2D91E47}"/>
+              </a:ext>
+            </a:extLst>
+          </p:cNvPr>
+          <p:cNvSpPr/>
+          <p:nvPr/>
+        </p:nvSpPr>
+        <p:spPr>
+          <a:xfrm>
+            <a:off x="6232019" y="1187196"/>
+            <a:ext cx="393192" cy="438912"/>
+          </a:xfrm>
+          <a:prstGeom prst="ellipse">
+            <a:avLst/>
+          </a:prstGeom>
+        </p:spPr>
+        <p:style>
+          <a:lnRef idx="2">
+            <a:schemeClr val="accent1">
+              <a:shade val="50000"/>
+            </a:schemeClr>
+          </a:lnRef>
+          <a:fillRef idx="1">
+            <a:schemeClr val="accent1"/>
+          </a:fillRef>
+          <a:effectRef idx="0">
+            <a:schemeClr val="accent1"/>
+          </a:effectRef>
+          <a:fontRef idx="minor">
+            <a:schemeClr val="lt1"/>
+          </a:fontRef>
+        </p:style>
+        <p:txBody>
+          <a:bodyPr rtlCol="0" anchor="ctr"/>
+          <a:lstStyle/>
+          <a:p>
+            <a:pPr algn="ctr"/>
+            <a:endParaRPr kumimoji="1" lang="ja-JP" altLang="en-US"/>
+          </a:p>
+        </p:txBody>
+      </p:sp>
+      <p:sp>
+        <p:nvSpPr>
+          <p:cNvPr id="27" name="楕円 26">
+            <a:extLst>
+              <a:ext uri="{FF2B5EF4-FFF2-40B4-BE49-F238E27FC236}">
+                <a16:creationId xmlns:a16="http://schemas.microsoft.com/office/drawing/2014/main" id="{E1383340-5DAD-45F0-8617-7B9C21837BCC}"/>
+              </a:ext>
+            </a:extLst>
+          </p:cNvPr>
+          <p:cNvSpPr/>
+          <p:nvPr/>
+        </p:nvSpPr>
+        <p:spPr>
+          <a:xfrm>
+            <a:off x="2241804" y="3832862"/>
+            <a:ext cx="393192" cy="438912"/>
+          </a:xfrm>
+          <a:prstGeom prst="ellipse">
+            <a:avLst/>
+          </a:prstGeom>
+        </p:spPr>
+        <p:style>
+          <a:lnRef idx="2">
+            <a:schemeClr val="accent1">
+              <a:shade val="50000"/>
+            </a:schemeClr>
+          </a:lnRef>
+          <a:fillRef idx="1">
+            <a:schemeClr val="accent1"/>
+          </a:fillRef>
+          <a:effectRef idx="0">
+            <a:schemeClr val="accent1"/>
+          </a:effectRef>
+          <a:fontRef idx="minor">
+            <a:schemeClr val="lt1"/>
+          </a:fontRef>
+        </p:style>
+        <p:txBody>
+          <a:bodyPr rtlCol="0" anchor="ctr"/>
+          <a:lstStyle/>
+          <a:p>
+            <a:pPr algn="ctr"/>
+            <a:endParaRPr kumimoji="1" lang="ja-JP" altLang="en-US"/>
+          </a:p>
+        </p:txBody>
+      </p:sp>
+      <p:sp>
+        <p:nvSpPr>
+          <p:cNvPr id="28" name="楕円 27">
+            <a:extLst>
+              <a:ext uri="{FF2B5EF4-FFF2-40B4-BE49-F238E27FC236}">
+                <a16:creationId xmlns:a16="http://schemas.microsoft.com/office/drawing/2014/main" id="{2B7139EB-8193-4B7E-95C0-9C60DF46EB90}"/>
+              </a:ext>
+            </a:extLst>
+          </p:cNvPr>
+          <p:cNvSpPr/>
+          <p:nvPr/>
+        </p:nvSpPr>
+        <p:spPr>
+          <a:xfrm>
+            <a:off x="7164324" y="3832862"/>
+            <a:ext cx="393192" cy="438912"/>
+          </a:xfrm>
+          <a:prstGeom prst="ellipse">
+            <a:avLst/>
+          </a:prstGeom>
+        </p:spPr>
+        <p:style>
+          <a:lnRef idx="2">
+            <a:schemeClr val="accent1">
+              <a:shade val="50000"/>
+            </a:schemeClr>
+          </a:lnRef>
+          <a:fillRef idx="1">
+            <a:schemeClr val="accent1"/>
+          </a:fillRef>
+          <a:effectRef idx="0">
+            <a:schemeClr val="accent1"/>
+          </a:effectRef>
+          <a:fontRef idx="minor">
+            <a:schemeClr val="lt1"/>
+          </a:fontRef>
+        </p:style>
+        <p:txBody>
+          <a:bodyPr rtlCol="0" anchor="ctr"/>
+          <a:lstStyle/>
+          <a:p>
+            <a:pPr algn="ctr"/>
+            <a:endParaRPr kumimoji="1" lang="ja-JP" altLang="en-US"/>
+          </a:p>
+        </p:txBody>
+      </p:sp>
+      <p:sp>
+        <p:nvSpPr>
+          <p:cNvPr id="29" name="楕円 28">
+            <a:extLst>
+              <a:ext uri="{FF2B5EF4-FFF2-40B4-BE49-F238E27FC236}">
+                <a16:creationId xmlns:a16="http://schemas.microsoft.com/office/drawing/2014/main" id="{D7527CB8-8DC7-46C5-A80E-F5C07024A608}"/>
+              </a:ext>
+            </a:extLst>
+          </p:cNvPr>
+          <p:cNvSpPr/>
+          <p:nvPr/>
+        </p:nvSpPr>
+        <p:spPr>
+          <a:xfrm>
+            <a:off x="6035423" y="5355338"/>
+            <a:ext cx="393192" cy="438912"/>
+          </a:xfrm>
+          <a:prstGeom prst="ellipse">
+            <a:avLst/>
+          </a:prstGeom>
+        </p:spPr>
+        <p:style>
+          <a:lnRef idx="2">
+            <a:schemeClr val="accent1">
+              <a:shade val="50000"/>
+            </a:schemeClr>
+          </a:lnRef>
+          <a:fillRef idx="1">
+            <a:schemeClr val="accent1"/>
+          </a:fillRef>
+          <a:effectRef idx="0">
+            <a:schemeClr val="accent1"/>
+          </a:effectRef>
+          <a:fontRef idx="minor">
+            <a:schemeClr val="lt1"/>
+          </a:fontRef>
+        </p:style>
+        <p:txBody>
+          <a:bodyPr rtlCol="0" anchor="ctr"/>
+          <a:lstStyle/>
+          <a:p>
+            <a:pPr algn="ctr"/>
+            <a:endParaRPr kumimoji="1" lang="ja-JP" altLang="en-US"/>
+          </a:p>
+        </p:txBody>
+      </p:sp>
+      <p:sp>
+        <p:nvSpPr>
+          <p:cNvPr id="30" name="楕円 29">
+            <a:extLst>
+              <a:ext uri="{FF2B5EF4-FFF2-40B4-BE49-F238E27FC236}">
+                <a16:creationId xmlns:a16="http://schemas.microsoft.com/office/drawing/2014/main" id="{CA9E4F79-7CBA-45FB-A51C-E12EEC8E42C5}"/>
+              </a:ext>
+            </a:extLst>
+          </p:cNvPr>
+          <p:cNvSpPr/>
+          <p:nvPr/>
+        </p:nvSpPr>
+        <p:spPr>
+          <a:xfrm>
+            <a:off x="6035423" y="4184905"/>
+            <a:ext cx="393192" cy="438912"/>
+          </a:xfrm>
+          <a:prstGeom prst="ellipse">
+            <a:avLst/>
+          </a:prstGeom>
+        </p:spPr>
+        <p:style>
+          <a:lnRef idx="2">
+            <a:schemeClr val="accent1">
+              <a:shade val="50000"/>
+            </a:schemeClr>
+          </a:lnRef>
+          <a:fillRef idx="1">
+            <a:schemeClr val="accent1"/>
+          </a:fillRef>
+          <a:effectRef idx="0">
+            <a:schemeClr val="accent1"/>
+          </a:effectRef>
+          <a:fontRef idx="minor">
+            <a:schemeClr val="lt1"/>
+          </a:fontRef>
+        </p:style>
+        <p:txBody>
+          <a:bodyPr rtlCol="0" anchor="ctr"/>
+          <a:lstStyle/>
+          <a:p>
+            <a:pPr algn="ctr"/>
+            <a:endParaRPr kumimoji="1" lang="ja-JP" altLang="en-US"/>
+          </a:p>
+        </p:txBody>
+      </p:sp>
+      <p:sp>
+        <p:nvSpPr>
+          <p:cNvPr id="31" name="楕円 30">
+            <a:extLst>
+              <a:ext uri="{FF2B5EF4-FFF2-40B4-BE49-F238E27FC236}">
+                <a16:creationId xmlns:a16="http://schemas.microsoft.com/office/drawing/2014/main" id="{613F05B1-B1E5-4C92-832A-40F85ACE7E2E}"/>
+              </a:ext>
+            </a:extLst>
+          </p:cNvPr>
+          <p:cNvSpPr/>
+          <p:nvPr/>
+        </p:nvSpPr>
+        <p:spPr>
+          <a:xfrm>
+            <a:off x="3533014" y="5458210"/>
+            <a:ext cx="393192" cy="438912"/>
+          </a:xfrm>
+          <a:prstGeom prst="ellipse">
+            <a:avLst/>
+          </a:prstGeom>
+        </p:spPr>
+        <p:style>
+          <a:lnRef idx="2">
+            <a:schemeClr val="accent1">
+              <a:shade val="50000"/>
+            </a:schemeClr>
+          </a:lnRef>
+          <a:fillRef idx="1">
+            <a:schemeClr val="accent1"/>
+          </a:fillRef>
+          <a:effectRef idx="0">
+            <a:schemeClr val="accent1"/>
+          </a:effectRef>
+          <a:fontRef idx="minor">
+            <a:schemeClr val="lt1"/>
+          </a:fontRef>
+        </p:style>
+        <p:txBody>
+          <a:bodyPr rtlCol="0" anchor="ctr"/>
+          <a:lstStyle/>
+          <a:p>
+            <a:pPr algn="ctr"/>
+            <a:endParaRPr kumimoji="1" lang="ja-JP" altLang="en-US"/>
+          </a:p>
+        </p:txBody>
+      </p:sp>
+      <p:sp>
+        <p:nvSpPr>
+          <p:cNvPr id="32" name="楕円 31">
+            <a:extLst>
+              <a:ext uri="{FF2B5EF4-FFF2-40B4-BE49-F238E27FC236}">
+                <a16:creationId xmlns:a16="http://schemas.microsoft.com/office/drawing/2014/main" id="{4F685951-D9FA-46C8-BEA6-826D435742A0}"/>
+              </a:ext>
+            </a:extLst>
+          </p:cNvPr>
+          <p:cNvSpPr/>
+          <p:nvPr/>
+        </p:nvSpPr>
+        <p:spPr>
+          <a:xfrm>
+            <a:off x="3574163" y="4126994"/>
+            <a:ext cx="393192" cy="438912"/>
+          </a:xfrm>
+          <a:prstGeom prst="ellipse">
+            <a:avLst/>
+          </a:prstGeom>
+        </p:spPr>
+        <p:style>
+          <a:lnRef idx="2">
+            <a:schemeClr val="accent1">
+              <a:shade val="50000"/>
+            </a:schemeClr>
+          </a:lnRef>
+          <a:fillRef idx="1">
+            <a:schemeClr val="accent1"/>
+          </a:fillRef>
+          <a:effectRef idx="0">
+            <a:schemeClr val="accent1"/>
+          </a:effectRef>
+          <a:fontRef idx="minor">
+            <a:schemeClr val="lt1"/>
+          </a:fontRef>
+        </p:style>
+        <p:txBody>
+          <a:bodyPr rtlCol="0" anchor="ctr"/>
+          <a:lstStyle/>
+          <a:p>
+            <a:pPr algn="ctr"/>
+            <a:endParaRPr kumimoji="1" lang="ja-JP" altLang="en-US"/>
+          </a:p>
+        </p:txBody>
+      </p:sp>
+      <p:sp>
+        <p:nvSpPr>
+          <p:cNvPr id="3" name="正方形/長方形 2">
+            <a:extLst>
+              <a:ext uri="{FF2B5EF4-FFF2-40B4-BE49-F238E27FC236}">
+                <a16:creationId xmlns:a16="http://schemas.microsoft.com/office/drawing/2014/main" id="{E52E4B79-EA2F-4BAA-8F50-398E1B341567}"/>
+              </a:ext>
+            </a:extLst>
+          </p:cNvPr>
+          <p:cNvSpPr/>
+          <p:nvPr/>
+        </p:nvSpPr>
+        <p:spPr>
+          <a:xfrm>
+            <a:off x="2007108" y="25907"/>
+            <a:ext cx="7008876" cy="914400"/>
+          </a:xfrm>
+          <a:prstGeom prst="rect">
+            <a:avLst/>
+          </a:prstGeom>
+        </p:spPr>
+        <p:style>
+          <a:lnRef idx="2">
+            <a:schemeClr val="accent6"/>
+          </a:lnRef>
+          <a:fillRef idx="1">
+            <a:schemeClr val="lt1"/>
+          </a:fillRef>
+          <a:effectRef idx="0">
+            <a:schemeClr val="accent6"/>
+          </a:effectRef>
+          <a:fontRef idx="minor">
+            <a:schemeClr val="dk1"/>
+          </a:fontRef>
+        </p:style>
+        <p:txBody>
+          <a:bodyPr rtlCol="0" anchor="ctr"/>
+          <a:lstStyle/>
+          <a:p>
+            <a:pPr algn="ctr"/>
+            <a:r>
+              <a:rPr kumimoji="1" lang="ja-JP" altLang="en-US" dirty="0"/>
+              <a:t>描くのほぼ無理</a:t>
+            </a:r>
+            <a:endParaRPr kumimoji="1" lang="en-US" altLang="ja-JP" dirty="0"/>
+          </a:p>
+          <a:p>
+            <a:pPr algn="ctr"/>
+            <a:r>
+              <a:rPr lang="ja-JP" altLang="en-US" dirty="0"/>
+              <a:t>点と点だけで間の雨粒いらない</a:t>
+            </a:r>
+            <a:endParaRPr kumimoji="1" lang="ja-JP" altLang="en-US" dirty="0"/>
           </a:p>
         </p:txBody>
       </p:sp>
